--- a/plugins/gradient-cio/assets/examples/gradient-odd-manager-compare.pptx
+++ b/plugins/gradient-cio/assets/examples/gradient-odd-manager-compare.pptx
@@ -710,6 +710,81 @@
               </a:solidFill>
             </c:spPr>
           </c:dPt>
+          <c:dLbls>
+            <c:dLbl>
+              <c:idx val="0"/>
+              <c:tx>
+                <c:rich>
+                  <a:bodyPr/>
+                  <a:lstStyle/>
+                  <a:p>
+                    <a:r>
+                      <a:rPr lang="en-US" sz="800"/>
+                      <a:t>$12.40B</a:t>
+                    </a:r>
+                  </a:p>
+                </c:rich>
+              </c:tx>
+              <c:dLblPos val="outEnd"/>
+              <c:showLegendKey val="0"/>
+              <c:showVal val="0"/>
+              <c:showCatName val="0"/>
+              <c:showSerName val="0"/>
+              <c:showPercent val="0"/>
+              <c:showBubbleSize val="0"/>
+            </c:dLbl>
+            <c:dLbl>
+              <c:idx val="1"/>
+              <c:tx>
+                <c:rich>
+                  <a:bodyPr/>
+                  <a:lstStyle/>
+                  <a:p>
+                    <a:r>
+                      <a:rPr lang="en-US" sz="800"/>
+                      <a:t>$4.85B</a:t>
+                    </a:r>
+                  </a:p>
+                </c:rich>
+              </c:tx>
+              <c:dLblPos val="outEnd"/>
+              <c:showLegendKey val="0"/>
+              <c:showVal val="0"/>
+              <c:showCatName val="0"/>
+              <c:showSerName val="0"/>
+              <c:showPercent val="0"/>
+              <c:showBubbleSize val="0"/>
+            </c:dLbl>
+            <c:dLbl>
+              <c:idx val="2"/>
+              <c:tx>
+                <c:rich>
+                  <a:bodyPr/>
+                  <a:lstStyle/>
+                  <a:p>
+                    <a:r>
+                      <a:rPr lang="en-US" sz="800"/>
+                      <a:t>$1.92B</a:t>
+                    </a:r>
+                  </a:p>
+                </c:rich>
+              </c:tx>
+              <c:dLblPos val="outEnd"/>
+              <c:showLegendKey val="0"/>
+              <c:showVal val="0"/>
+              <c:showCatName val="0"/>
+              <c:showSerName val="0"/>
+              <c:showPercent val="0"/>
+              <c:showBubbleSize val="0"/>
+            </c:dLbl>
+            <c:dLblPos val="outEnd"/>
+            <c:showLegendKey val="0"/>
+            <c:showVal val="0"/>
+            <c:showCatName val="0"/>
+            <c:showSerName val="0"/>
+            <c:showPercent val="0"/>
+            <c:showBubbleSize val="0"/>
+          </c:dLbls>
           <c:cat>
             <c:strRef>
               <c:f>Sheet1!$A$2:$A$4</c:f>
@@ -1487,7 +1562,7 @@
           </a:p>
           <a:p>
             <a:r>
-              <a:t>Observation: Harbor lacks complete provider evidence, while Northfield also lacks catalog identity [S2][S3]. Why it matters: The gaps require different diligence paths before selection. Uncertainty: The compact fixture omits some corroborating provider detail. What would change the view: Updated governed records resolving either named evidence gap.</a:t>
+              <a:t>Observation: Harbor lacks complete provider evidence, while Northfield also lacks catalog identity [S2][S3]. Why it matters: The gaps require different diligence paths before selection. Uncertainty: The public sample omits some corroborating provider detail. What would change the view: Updated governed records resolving either named evidence gap.</a:t>
             </a:r>
           </a:p>
         </p:txBody>
@@ -3907,7 +3982,7 @@
         </p:nvSpPr>
         <p:spPr>
           <a:xfrm>
-            <a:off x="685800" y="1828800"/>
+            <a:off x="685800" y="1664208"/>
             <a:ext cx="9966960" cy="274320"/>
           </a:xfrm>
           <a:prstGeom prst="rect">
@@ -3925,7 +4000,7 @@
               <a:spcAft>
                 <a:spcPts val="0"/>
               </a:spcAft>
-              <a:defRPr sz="900" b="1">
+              <a:defRPr sz="850" b="1">
                 <a:solidFill>
                   <a:srgbClr val="C6F432"/>
                 </a:solidFill>
@@ -3949,7 +4024,7 @@
         </p:nvSpPr>
         <p:spPr>
           <a:xfrm>
-            <a:off x="685800" y="2176272"/>
+            <a:off x="685800" y="2011680"/>
             <a:ext cx="9966960" cy="1234440"/>
           </a:xfrm>
           <a:prstGeom prst="rect">
@@ -3967,7 +4042,7 @@
               <a:spcAft>
                 <a:spcPts val="0"/>
               </a:spcAft>
-              <a:defRPr sz="3400" b="1">
+              <a:defRPr sz="3300" b="1">
                 <a:solidFill>
                   <a:srgbClr val="FFFFFF"/>
                 </a:solidFill>
@@ -3978,7 +4053,7 @@
               <a:rPr>
                 <a:latin typeface="Inter"/>
               </a:rPr>
-              <a:t>Global Macro Mandate (TEST)</a:t>
+              <a:t>Global Macro Mandate</a:t>
             </a:r>
           </a:p>
         </p:txBody>
@@ -3991,8 +4066,8 @@
         </p:nvSpPr>
         <p:spPr>
           <a:xfrm>
-            <a:off x="685800" y="3456432"/>
-            <a:ext cx="9692640" cy="640080"/>
+            <a:off x="685800" y="3273552"/>
+            <a:ext cx="9692640" cy="594360"/>
           </a:xfrm>
           <a:prstGeom prst="rect">
             <a:avLst/>
@@ -4009,7 +4084,7 @@
               <a:spcAft>
                 <a:spcPts val="0"/>
               </a:spcAft>
-              <a:defRPr sz="1500" b="0">
+              <a:defRPr sz="1400" b="0">
                 <a:solidFill>
                   <a:srgbClr val="9AA5B1"/>
                 </a:solidFill>
@@ -4020,7 +4095,7 @@
               <a:rPr>
                 <a:latin typeface="Inter"/>
               </a:rPr>
-              <a:t>3 managers · named by user · RENDER TEST</a:t>
+              <a:t>Three-manager operational diligence comparison</a:t>
             </a:r>
           </a:p>
         </p:txBody>
@@ -4033,8 +4108,8 @@
         </p:nvSpPr>
         <p:spPr>
           <a:xfrm>
-            <a:off x="685800" y="4251960"/>
-            <a:ext cx="1005840" cy="54864"/>
+            <a:off x="685800" y="4005072"/>
+            <a:ext cx="822960" cy="45720"/>
           </a:xfrm>
           <a:prstGeom prst="rect">
             <a:avLst/>
@@ -4082,8 +4157,8 @@
         </p:nvSpPr>
         <p:spPr>
           <a:xfrm>
-            <a:off x="685800" y="4572000"/>
-            <a:ext cx="3063240" cy="182880"/>
+            <a:off x="685800" y="4315968"/>
+            <a:ext cx="4709160" cy="182880"/>
           </a:xfrm>
           <a:prstGeom prst="rect">
             <a:avLst/>
@@ -4124,8 +4199,8 @@
         </p:nvSpPr>
         <p:spPr>
           <a:xfrm>
-            <a:off x="685800" y="4773168"/>
-            <a:ext cx="3063240" cy="320040"/>
+            <a:off x="685800" y="4507992"/>
+            <a:ext cx="4709160" cy="310896"/>
           </a:xfrm>
           <a:prstGeom prst="rect">
             <a:avLst/>
@@ -4166,8 +4241,8 @@
         </p:nvSpPr>
         <p:spPr>
           <a:xfrm>
-            <a:off x="4160520" y="4572000"/>
-            <a:ext cx="3063240" cy="182880"/>
+            <a:off x="5852160" y="4315968"/>
+            <a:ext cx="4709160" cy="182880"/>
           </a:xfrm>
           <a:prstGeom prst="rect">
             <a:avLst/>
@@ -4195,7 +4270,7 @@
               <a:rPr>
                 <a:latin typeface="Inter"/>
               </a:rPr>
-              <a:t>SCREEN BASIS</a:t>
+              <a:t>IN DILIGENCE CATALOG</a:t>
             </a:r>
           </a:p>
         </p:txBody>
@@ -4208,8 +4283,8 @@
         </p:nvSpPr>
         <p:spPr>
           <a:xfrm>
-            <a:off x="4160520" y="4773168"/>
-            <a:ext cx="3063240" cy="320040"/>
+            <a:off x="5852160" y="4507992"/>
+            <a:ext cx="4709160" cy="310896"/>
           </a:xfrm>
           <a:prstGeom prst="rect">
             <a:avLst/>
@@ -4237,7 +4312,7 @@
               <a:rPr>
                 <a:latin typeface="Inter"/>
               </a:rPr>
-              <a:t>Named by user</a:t>
+              <a:t>2 of 3</a:t>
             </a:r>
           </a:p>
         </p:txBody>
@@ -4250,8 +4325,8 @@
         </p:nvSpPr>
         <p:spPr>
           <a:xfrm>
-            <a:off x="7635240" y="4572000"/>
-            <a:ext cx="3063240" cy="182880"/>
+            <a:off x="685800" y="4937759"/>
+            <a:ext cx="4709160" cy="182880"/>
           </a:xfrm>
           <a:prstGeom prst="rect">
             <a:avLst/>
@@ -4279,7 +4354,7 @@
               <a:rPr>
                 <a:latin typeface="Inter"/>
               </a:rPr>
-              <a:t>IN DILIGENCE CATALOG</a:t>
+              <a:t>FORM ADV AS OF</a:t>
             </a:r>
           </a:p>
         </p:txBody>
@@ -4292,8 +4367,8 @@
         </p:nvSpPr>
         <p:spPr>
           <a:xfrm>
-            <a:off x="7635240" y="4773168"/>
-            <a:ext cx="3063240" cy="320040"/>
+            <a:off x="685800" y="5129783"/>
+            <a:ext cx="4709160" cy="310896"/>
           </a:xfrm>
           <a:prstGeom prst="rect">
             <a:avLst/>
@@ -4321,7 +4396,7 @@
               <a:rPr>
                 <a:latin typeface="Inter"/>
               </a:rPr>
-              <a:t>2 of 3</a:t>
+              <a:t>2026-10-01</a:t>
             </a:r>
           </a:p>
         </p:txBody>
@@ -4334,8 +4409,8 @@
         </p:nvSpPr>
         <p:spPr>
           <a:xfrm>
-            <a:off x="685800" y="5230368"/>
-            <a:ext cx="3063240" cy="182880"/>
+            <a:off x="5852160" y="4937759"/>
+            <a:ext cx="4709160" cy="182880"/>
           </a:xfrm>
           <a:prstGeom prst="rect">
             <a:avLst/>
@@ -4363,7 +4438,7 @@
               <a:rPr>
                 <a:latin typeface="Inter"/>
               </a:rPr>
-              <a:t>FORM ADV AS OF</a:t>
+              <a:t>REPORT DATE</a:t>
             </a:r>
           </a:p>
         </p:txBody>
@@ -4376,8 +4451,8 @@
         </p:nvSpPr>
         <p:spPr>
           <a:xfrm>
-            <a:off x="685800" y="5431536"/>
-            <a:ext cx="3063240" cy="320040"/>
+            <a:off x="5852160" y="5129783"/>
+            <a:ext cx="4709160" cy="310896"/>
           </a:xfrm>
           <a:prstGeom prst="rect">
             <a:avLst/>
@@ -4405,174 +4480,6 @@
               <a:rPr>
                 <a:latin typeface="Inter"/>
               </a:rPr>
-              <a:t>2026-10-01</a:t>
-            </a:r>
-          </a:p>
-        </p:txBody>
-      </p:sp>
-      <p:sp>
-        <p:nvSpPr>
-          <p:cNvPr id="17" name="TextBox 16"/>
-          <p:cNvSpPr txBox="1"/>
-          <p:nvPr/>
-        </p:nvSpPr>
-        <p:spPr>
-          <a:xfrm>
-            <a:off x="4160520" y="5230368"/>
-            <a:ext cx="3063240" cy="182880"/>
-          </a:xfrm>
-          <a:prstGeom prst="rect">
-            <a:avLst/>
-          </a:prstGeom>
-          <a:noFill/>
-        </p:spPr>
-        <p:txBody>
-          <a:bodyPr wrap="none" lIns="9144" rIns="9144" tIns="9144" bIns="9144" anchor="t">
-            <a:spAutoFit/>
-          </a:bodyPr>
-          <a:lstStyle/>
-          <a:p>
-            <a:pPr algn="l">
-              <a:spcAft>
-                <a:spcPts val="0"/>
-              </a:spcAft>
-              <a:defRPr sz="700" b="1">
-                <a:solidFill>
-                  <a:srgbClr val="8A94A1"/>
-                </a:solidFill>
-                <a:latin typeface="Inter"/>
-              </a:defRPr>
-            </a:pPr>
-            <a:r>
-              <a:rPr>
-                <a:latin typeface="Inter"/>
-              </a:rPr>
-              <a:t>LATEST 13F PERIOD</a:t>
-            </a:r>
-          </a:p>
-        </p:txBody>
-      </p:sp>
-      <p:sp>
-        <p:nvSpPr>
-          <p:cNvPr id="18" name="TextBox 17"/>
-          <p:cNvSpPr txBox="1"/>
-          <p:nvPr/>
-        </p:nvSpPr>
-        <p:spPr>
-          <a:xfrm>
-            <a:off x="4160520" y="5431536"/>
-            <a:ext cx="3063240" cy="320040"/>
-          </a:xfrm>
-          <a:prstGeom prst="rect">
-            <a:avLst/>
-          </a:prstGeom>
-          <a:noFill/>
-        </p:spPr>
-        <p:txBody>
-          <a:bodyPr wrap="none" lIns="9144" rIns="9144" tIns="9144" bIns="9144" anchor="t">
-            <a:spAutoFit/>
-          </a:bodyPr>
-          <a:lstStyle/>
-          <a:p>
-            <a:pPr algn="l">
-              <a:spcAft>
-                <a:spcPts val="0"/>
-              </a:spcAft>
-              <a:defRPr sz="1000" b="1">
-                <a:solidFill>
-                  <a:srgbClr val="FFFFFF"/>
-                </a:solidFill>
-                <a:latin typeface="Inter"/>
-              </a:defRPr>
-            </a:pPr>
-            <a:r>
-              <a:rPr>
-                <a:latin typeface="Inter"/>
-              </a:rPr>
-              <a:t>2026-06-30</a:t>
-            </a:r>
-          </a:p>
-        </p:txBody>
-      </p:sp>
-      <p:sp>
-        <p:nvSpPr>
-          <p:cNvPr id="19" name="TextBox 18"/>
-          <p:cNvSpPr txBox="1"/>
-          <p:nvPr/>
-        </p:nvSpPr>
-        <p:spPr>
-          <a:xfrm>
-            <a:off x="7635240" y="5230368"/>
-            <a:ext cx="3063240" cy="182880"/>
-          </a:xfrm>
-          <a:prstGeom prst="rect">
-            <a:avLst/>
-          </a:prstGeom>
-          <a:noFill/>
-        </p:spPr>
-        <p:txBody>
-          <a:bodyPr wrap="none" lIns="9144" rIns="9144" tIns="9144" bIns="9144" anchor="t">
-            <a:spAutoFit/>
-          </a:bodyPr>
-          <a:lstStyle/>
-          <a:p>
-            <a:pPr algn="l">
-              <a:spcAft>
-                <a:spcPts val="0"/>
-              </a:spcAft>
-              <a:defRPr sz="700" b="1">
-                <a:solidFill>
-                  <a:srgbClr val="8A94A1"/>
-                </a:solidFill>
-                <a:latin typeface="Inter"/>
-              </a:defRPr>
-            </a:pPr>
-            <a:r>
-              <a:rPr>
-                <a:latin typeface="Inter"/>
-              </a:rPr>
-              <a:t>REPORT DATE</a:t>
-            </a:r>
-          </a:p>
-        </p:txBody>
-      </p:sp>
-      <p:sp>
-        <p:nvSpPr>
-          <p:cNvPr id="20" name="TextBox 19"/>
-          <p:cNvSpPr txBox="1"/>
-          <p:nvPr/>
-        </p:nvSpPr>
-        <p:spPr>
-          <a:xfrm>
-            <a:off x="7635240" y="5431536"/>
-            <a:ext cx="3063240" cy="320040"/>
-          </a:xfrm>
-          <a:prstGeom prst="rect">
-            <a:avLst/>
-          </a:prstGeom>
-          <a:noFill/>
-        </p:spPr>
-        <p:txBody>
-          <a:bodyPr wrap="none" lIns="9144" rIns="9144" tIns="9144" bIns="9144" anchor="t">
-            <a:spAutoFit/>
-          </a:bodyPr>
-          <a:lstStyle/>
-          <a:p>
-            <a:pPr algn="l">
-              <a:spcAft>
-                <a:spcPts val="0"/>
-              </a:spcAft>
-              <a:defRPr sz="1000" b="1">
-                <a:solidFill>
-                  <a:srgbClr val="FFFFFF"/>
-                </a:solidFill>
-                <a:latin typeface="Inter"/>
-              </a:defRPr>
-            </a:pPr>
-            <a:r>
-              <a:rPr>
-                <a:latin typeface="Inter"/>
-              </a:rPr>
               <a:t>2026-10-04</a:t>
             </a:r>
           </a:p>
@@ -4580,14 +4487,14 @@
       </p:sp>
       <p:sp>
         <p:nvSpPr>
-          <p:cNvPr id="21" name="Rectangle 20"/>
+          <p:cNvPr id="17" name="Rectangle 16"/>
           <p:cNvSpPr/>
           <p:nvPr/>
         </p:nvSpPr>
         <p:spPr>
           <a:xfrm>
-            <a:off x="685800" y="5833872"/>
-            <a:ext cx="3063240" cy="384048"/>
+            <a:off x="685800" y="5687568"/>
+            <a:ext cx="3337560" cy="530352"/>
           </a:xfrm>
           <a:prstGeom prst="rect">
             <a:avLst/>
@@ -4629,14 +4536,14 @@
       </p:sp>
       <p:sp>
         <p:nvSpPr>
-          <p:cNvPr id="22" name="TextBox 21"/>
+          <p:cNvPr id="18" name="TextBox 17"/>
           <p:cNvSpPr txBox="1"/>
           <p:nvPr/>
         </p:nvSpPr>
         <p:spPr>
           <a:xfrm>
-            <a:off x="822960" y="5934456"/>
-            <a:ext cx="2788920" cy="164592"/>
+            <a:off x="822960" y="5760720"/>
+            <a:ext cx="3063240" cy="128016"/>
           </a:xfrm>
           <a:prstGeom prst="rect">
             <a:avLst/>
@@ -4653,7 +4560,7 @@
               <a:spcAft>
                 <a:spcPts val="0"/>
               </a:spcAft>
-              <a:defRPr sz="800" b="1">
+              <a:defRPr sz="620" b="1">
                 <a:solidFill>
                   <a:srgbClr val="0D1117"/>
                 </a:solidFill>
@@ -4664,6 +4571,48 @@
               <a:rPr>
                 <a:latin typeface="Inter"/>
               </a:rPr>
+              <a:t>OVERALL VIEW</a:t>
+            </a:r>
+          </a:p>
+        </p:txBody>
+      </p:sp>
+      <p:sp>
+        <p:nvSpPr>
+          <p:cNvPr id="19" name="TextBox 18"/>
+          <p:cNvSpPr txBox="1"/>
+          <p:nvPr/>
+        </p:nvSpPr>
+        <p:spPr>
+          <a:xfrm>
+            <a:off x="822960" y="5916168"/>
+            <a:ext cx="3063240" cy="182880"/>
+          </a:xfrm>
+          <a:prstGeom prst="rect">
+            <a:avLst/>
+          </a:prstGeom>
+          <a:noFill/>
+        </p:spPr>
+        <p:txBody>
+          <a:bodyPr wrap="none" lIns="9144" rIns="9144" tIns="9144" bIns="9144" anchor="t">
+            <a:spAutoFit/>
+          </a:bodyPr>
+          <a:lstStyle/>
+          <a:p>
+            <a:pPr algn="l">
+              <a:spcAft>
+                <a:spcPts val="0"/>
+              </a:spcAft>
+              <a:defRPr sz="900" b="1">
+                <a:solidFill>
+                  <a:srgbClr val="0D1117"/>
+                </a:solidFill>
+                <a:latin typeface="Inter"/>
+              </a:defRPr>
+            </a:pPr>
+            <a:r>
+              <a:rPr>
+                <a:latin typeface="Inter"/>
+              </a:rPr>
               <a:t>2 of 3 managers with flags</a:t>
             </a:r>
           </a:p>
@@ -4671,13 +4620,13 @@
       </p:sp>
       <p:sp>
         <p:nvSpPr>
-          <p:cNvPr id="23" name="TextBox 22"/>
+          <p:cNvPr id="20" name="TextBox 19"/>
           <p:cNvSpPr txBox="1"/>
           <p:nvPr/>
         </p:nvSpPr>
         <p:spPr>
           <a:xfrm>
-            <a:off x="3977639" y="5824728"/>
+            <a:off x="4297680" y="5733288"/>
             <a:ext cx="3108960" cy="164592"/>
           </a:xfrm>
           <a:prstGeom prst="rect">
@@ -4706,20 +4655,20 @@
               <a:rPr>
                 <a:latin typeface="Inter"/>
               </a:rPr>
-              <a:t>EVIDENCE COMPLETENESS</a:t>
+              <a:t>SCOPE REVIEWED</a:t>
             </a:r>
           </a:p>
         </p:txBody>
       </p:sp>
       <p:sp>
         <p:nvSpPr>
-          <p:cNvPr id="24" name="TextBox 23"/>
+          <p:cNvPr id="21" name="TextBox 20"/>
           <p:cNvSpPr txBox="1"/>
           <p:nvPr/>
         </p:nvSpPr>
         <p:spPr>
           <a:xfrm>
-            <a:off x="3977639" y="5998464"/>
+            <a:off x="4297680" y="5934456"/>
             <a:ext cx="3108960" cy="201168"/>
           </a:xfrm>
           <a:prstGeom prst="rect">
@@ -4755,14 +4704,14 @@
       </p:sp>
       <p:sp>
         <p:nvSpPr>
-          <p:cNvPr id="25" name="TextBox 24"/>
+          <p:cNvPr id="22" name="TextBox 21"/>
           <p:cNvSpPr txBox="1"/>
           <p:nvPr/>
         </p:nvSpPr>
         <p:spPr>
           <a:xfrm>
-            <a:off x="685800" y="6473952"/>
-            <a:ext cx="8046720" cy="182880"/>
+            <a:off x="685800" y="6400800"/>
+            <a:ext cx="8046720" cy="146304"/>
           </a:xfrm>
           <a:prstGeom prst="rect">
             <a:avLst/>
@@ -4790,14 +4739,56 @@
               <a:rPr>
                 <a:latin typeface="Inter"/>
               </a:rPr>
-              <a:t>RENDER TEST — fictional managers, not a real comparison</a:t>
+              <a:t>Confidential — manager diligence review</a:t>
             </a:r>
           </a:p>
         </p:txBody>
       </p:sp>
       <p:sp>
         <p:nvSpPr>
-          <p:cNvPr id="26" name="TextBox 25"/>
+          <p:cNvPr id="23" name="TextBox 22"/>
+          <p:cNvSpPr txBox="1"/>
+          <p:nvPr/>
+        </p:nvSpPr>
+        <p:spPr>
+          <a:xfrm>
+            <a:off x="685800" y="6556248"/>
+            <a:ext cx="8046720" cy="128016"/>
+          </a:xfrm>
+          <a:prstGeom prst="rect">
+            <a:avLst/>
+          </a:prstGeom>
+          <a:noFill/>
+        </p:spPr>
+        <p:txBody>
+          <a:bodyPr wrap="none" lIns="9144" rIns="9144" tIns="9144" bIns="9144" anchor="t">
+            <a:spAutoFit/>
+          </a:bodyPr>
+          <a:lstStyle/>
+          <a:p>
+            <a:pPr algn="l">
+              <a:spcAft>
+                <a:spcPts val="0"/>
+              </a:spcAft>
+              <a:defRPr sz="650" b="0">
+                <a:solidFill>
+                  <a:srgbClr val="8A94A1"/>
+                </a:solidFill>
+                <a:latin typeface="Inter"/>
+              </a:defRPr>
+            </a:pPr>
+            <a:r>
+              <a:rPr>
+                <a:latin typeface="Inter"/>
+              </a:rPr>
+              <a:t>Illustrative sample · not client data</a:t>
+            </a:r>
+          </a:p>
+        </p:txBody>
+      </p:sp>
+      <p:sp>
+        <p:nvSpPr>
+          <p:cNvPr id="24" name="TextBox 23"/>
           <p:cNvSpPr txBox="1"/>
           <p:nvPr/>
         </p:nvSpPr>
@@ -4913,7 +4904,7 @@
         <p:spPr>
           <a:xfrm>
             <a:off x="640080" y="329184"/>
-            <a:ext cx="9875520" cy="182880"/>
+            <a:ext cx="5303520" cy="182880"/>
           </a:xfrm>
           <a:prstGeom prst="rect">
             <a:avLst/>
@@ -4954,6 +4945,48 @@
         </p:nvSpPr>
         <p:spPr>
           <a:xfrm>
+            <a:off x="5897880" y="310896"/>
+            <a:ext cx="4800600" cy="256032"/>
+          </a:xfrm>
+          <a:prstGeom prst="rect">
+            <a:avLst/>
+          </a:prstGeom>
+          <a:noFill/>
+        </p:spPr>
+        <p:txBody>
+          <a:bodyPr wrap="none" lIns="9144" rIns="9144" tIns="9144" bIns="9144" anchor="t">
+            <a:spAutoFit/>
+          </a:bodyPr>
+          <a:lstStyle/>
+          <a:p>
+            <a:pPr algn="r">
+              <a:spcAft>
+                <a:spcPts val="0"/>
+              </a:spcAft>
+              <a:defRPr sz="680" b="1">
+                <a:solidFill>
+                  <a:srgbClr val="4F6B00"/>
+                </a:solidFill>
+                <a:latin typeface="Inter"/>
+              </a:defRPr>
+            </a:pPr>
+            <a:r>
+              <a:rPr>
+                <a:latin typeface="Inter"/>
+              </a:rPr>
+              <a:t>Illustrative, Gradient Maintained — demo data, not the client's holdings or managers</a:t>
+            </a:r>
+          </a:p>
+        </p:txBody>
+      </p:sp>
+      <p:sp>
+        <p:nvSpPr>
+          <p:cNvPr id="5" name="TextBox 4"/>
+          <p:cNvSpPr txBox="1"/>
+          <p:nvPr/>
+        </p:nvSpPr>
+        <p:spPr>
+          <a:xfrm>
             <a:off x="640080" y="566928"/>
             <a:ext cx="10058400" cy="530352"/>
           </a:xfrm>
@@ -4990,7 +5023,7 @@
       </p:sp>
       <p:sp>
         <p:nvSpPr>
-          <p:cNvPr id="5" name="Rectangle 4"/>
+          <p:cNvPr id="6" name="Rectangle 5"/>
           <p:cNvSpPr/>
           <p:nvPr/>
         </p:nvSpPr>
@@ -5039,7 +5072,7 @@
       </p:sp>
       <p:sp>
         <p:nvSpPr>
-          <p:cNvPr id="6" name="Rectangle 5"/>
+          <p:cNvPr id="7" name="Rectangle 6"/>
           <p:cNvSpPr/>
           <p:nvPr/>
         </p:nvSpPr>
@@ -5088,7 +5121,7 @@
       </p:sp>
       <p:sp>
         <p:nvSpPr>
-          <p:cNvPr id="7" name="TextBox 6"/>
+          <p:cNvPr id="8" name="TextBox 7"/>
           <p:cNvSpPr txBox="1"/>
           <p:nvPr/>
         </p:nvSpPr>
@@ -5130,7 +5163,7 @@
       </p:sp>
       <p:sp>
         <p:nvSpPr>
-          <p:cNvPr id="8" name="TextBox 7"/>
+          <p:cNvPr id="9" name="TextBox 8"/>
           <p:cNvSpPr txBox="1"/>
           <p:nvPr/>
         </p:nvSpPr>
@@ -5172,7 +5205,7 @@
       </p:sp>
       <p:graphicFrame>
         <p:nvGraphicFramePr>
-          <p:cNvPr id="9" name="Table 8"/>
+          <p:cNvPr id="10" name="Table 9"/>
           <p:cNvGraphicFramePr>
             <a:graphicFrameLocks noGrp="1"/>
           </p:cNvGraphicFramePr>
@@ -5239,7 +5272,7 @@
                         <a:rPr>
                           <a:latin typeface="Inter"/>
                         </a:rPr>
-                        <a:t>Ridgeview (TEST)</a:t>
+                        <a:t>Ridgeview</a:t>
                       </a:r>
                     </a:p>
                   </a:txBody>
@@ -5266,7 +5299,7 @@
                         <a:rPr>
                           <a:latin typeface="Inter"/>
                         </a:rPr>
-                        <a:t>Harbor (TEST)</a:t>
+                        <a:t>Harbor</a:t>
                       </a:r>
                     </a:p>
                   </a:txBody>
@@ -5293,7 +5326,7 @@
                         <a:rPr>
                           <a:latin typeface="Inter"/>
                         </a:rPr>
-                        <a:t>Northfield (TEST)</a:t>
+                        <a:t>Northfield</a:t>
                       </a:r>
                     </a:p>
                   </a:txBody>
@@ -5860,7 +5893,7 @@
       </p:graphicFrame>
       <p:sp>
         <p:nvSpPr>
-          <p:cNvPr id="10" name="TextBox 9"/>
+          <p:cNvPr id="11" name="TextBox 10"/>
           <p:cNvSpPr txBox="1"/>
           <p:nvPr/>
         </p:nvSpPr>
@@ -5902,7 +5935,7 @@
       </p:sp>
       <p:sp>
         <p:nvSpPr>
-          <p:cNvPr id="11" name="Rectangle 10"/>
+          <p:cNvPr id="12" name="Rectangle 11"/>
           <p:cNvSpPr/>
           <p:nvPr/>
         </p:nvSpPr>
@@ -5951,7 +5984,7 @@
       </p:sp>
       <p:sp>
         <p:nvSpPr>
-          <p:cNvPr id="12" name="Rectangle 11"/>
+          <p:cNvPr id="13" name="Rectangle 12"/>
           <p:cNvSpPr/>
           <p:nvPr/>
         </p:nvSpPr>
@@ -6000,7 +6033,7 @@
       </p:sp>
       <p:sp>
         <p:nvSpPr>
-          <p:cNvPr id="13" name="TextBox 12"/>
+          <p:cNvPr id="14" name="TextBox 13"/>
           <p:cNvSpPr txBox="1"/>
           <p:nvPr/>
         </p:nvSpPr>
@@ -6042,7 +6075,7 @@
       </p:sp>
       <p:sp>
         <p:nvSpPr>
-          <p:cNvPr id="14" name="TextBox 13"/>
+          <p:cNvPr id="15" name="TextBox 14"/>
           <p:cNvSpPr txBox="1"/>
           <p:nvPr/>
         </p:nvSpPr>
@@ -6084,7 +6117,7 @@
       </p:sp>
       <p:sp>
         <p:nvSpPr>
-          <p:cNvPr id="15" name="Rectangle 14"/>
+          <p:cNvPr id="16" name="Rectangle 15"/>
           <p:cNvSpPr/>
           <p:nvPr/>
         </p:nvSpPr>
@@ -6133,7 +6166,7 @@
       </p:sp>
       <p:sp>
         <p:nvSpPr>
-          <p:cNvPr id="16" name="Rectangle 15"/>
+          <p:cNvPr id="17" name="Rectangle 16"/>
           <p:cNvSpPr/>
           <p:nvPr/>
         </p:nvSpPr>
@@ -6182,7 +6215,7 @@
       </p:sp>
       <p:sp>
         <p:nvSpPr>
-          <p:cNvPr id="17" name="TextBox 16"/>
+          <p:cNvPr id="18" name="TextBox 17"/>
           <p:cNvSpPr txBox="1"/>
           <p:nvPr/>
         </p:nvSpPr>
@@ -6224,7 +6257,7 @@
       </p:sp>
       <p:sp>
         <p:nvSpPr>
-          <p:cNvPr id="18" name="TextBox 17"/>
+          <p:cNvPr id="19" name="TextBox 18"/>
           <p:cNvSpPr txBox="1"/>
           <p:nvPr/>
         </p:nvSpPr>
@@ -6266,7 +6299,7 @@
       </p:sp>
       <p:sp>
         <p:nvSpPr>
-          <p:cNvPr id="19" name="Rectangle 18"/>
+          <p:cNvPr id="20" name="Rectangle 19"/>
           <p:cNvSpPr/>
           <p:nvPr/>
         </p:nvSpPr>
@@ -6315,7 +6348,7 @@
       </p:sp>
       <p:sp>
         <p:nvSpPr>
-          <p:cNvPr id="20" name="TextBox 19"/>
+          <p:cNvPr id="21" name="TextBox 20"/>
           <p:cNvSpPr txBox="1"/>
           <p:nvPr/>
         </p:nvSpPr>
@@ -6357,7 +6390,7 @@
       </p:sp>
       <p:sp>
         <p:nvSpPr>
-          <p:cNvPr id="21" name="TextBox 20"/>
+          <p:cNvPr id="22" name="TextBox 21"/>
           <p:cNvSpPr txBox="1"/>
           <p:nvPr/>
         </p:nvSpPr>
@@ -6392,14 +6425,14 @@
               <a:rPr>
                 <a:latin typeface="Inter"/>
               </a:rPr>
-              <a:t>RENDER TEST — fictional managers, not a real comparison · Data as of 2026-10-01 (Form ADV); 2026-06-30 (Form 13F)</a:t>
+              <a:t>Confidential — manager diligence review · Data as of 2026-10-01 (Form ADV); 2026-06-30 (Form 13F)</a:t>
             </a:r>
           </a:p>
         </p:txBody>
       </p:sp>
       <p:sp>
         <p:nvSpPr>
-          <p:cNvPr id="22" name="TextBox 21"/>
+          <p:cNvPr id="23" name="TextBox 22"/>
           <p:cNvSpPr txBox="1"/>
           <p:nvPr/>
         </p:nvSpPr>
@@ -6515,7 +6548,7 @@
         <p:spPr>
           <a:xfrm>
             <a:off x="640080" y="329184"/>
-            <a:ext cx="9875520" cy="182880"/>
+            <a:ext cx="5303520" cy="182880"/>
           </a:xfrm>
           <a:prstGeom prst="rect">
             <a:avLst/>
@@ -6556,6 +6589,48 @@
         </p:nvSpPr>
         <p:spPr>
           <a:xfrm>
+            <a:off x="5897880" y="310896"/>
+            <a:ext cx="4800600" cy="256032"/>
+          </a:xfrm>
+          <a:prstGeom prst="rect">
+            <a:avLst/>
+          </a:prstGeom>
+          <a:noFill/>
+        </p:spPr>
+        <p:txBody>
+          <a:bodyPr wrap="none" lIns="9144" rIns="9144" tIns="9144" bIns="9144" anchor="t">
+            <a:spAutoFit/>
+          </a:bodyPr>
+          <a:lstStyle/>
+          <a:p>
+            <a:pPr algn="r">
+              <a:spcAft>
+                <a:spcPts val="0"/>
+              </a:spcAft>
+              <a:defRPr sz="680" b="1">
+                <a:solidFill>
+                  <a:srgbClr val="4F6B00"/>
+                </a:solidFill>
+                <a:latin typeface="Inter"/>
+              </a:defRPr>
+            </a:pPr>
+            <a:r>
+              <a:rPr>
+                <a:latin typeface="Inter"/>
+              </a:rPr>
+              <a:t>Illustrative, Gradient Maintained — demo data, not the client's holdings or managers</a:t>
+            </a:r>
+          </a:p>
+        </p:txBody>
+      </p:sp>
+      <p:sp>
+        <p:nvSpPr>
+          <p:cNvPr id="5" name="TextBox 4"/>
+          <p:cNvSpPr txBox="1"/>
+          <p:nvPr/>
+        </p:nvSpPr>
+        <p:spPr>
+          <a:xfrm>
             <a:off x="640080" y="566928"/>
             <a:ext cx="10058400" cy="530352"/>
           </a:xfrm>
@@ -6592,7 +6667,7 @@
       </p:sp>
       <p:sp>
         <p:nvSpPr>
-          <p:cNvPr id="5" name="Rectangle 4"/>
+          <p:cNvPr id="6" name="Rectangle 5"/>
           <p:cNvSpPr/>
           <p:nvPr/>
         </p:nvSpPr>
@@ -6641,7 +6716,7 @@
       </p:sp>
       <p:sp>
         <p:nvSpPr>
-          <p:cNvPr id="6" name="Rectangle 5"/>
+          <p:cNvPr id="7" name="Rectangle 6"/>
           <p:cNvSpPr/>
           <p:nvPr/>
         </p:nvSpPr>
@@ -6690,7 +6765,7 @@
       </p:sp>
       <p:sp>
         <p:nvSpPr>
-          <p:cNvPr id="7" name="TextBox 6"/>
+          <p:cNvPr id="8" name="TextBox 7"/>
           <p:cNvSpPr txBox="1"/>
           <p:nvPr/>
         </p:nvSpPr>
@@ -6732,7 +6807,7 @@
       </p:sp>
       <p:sp>
         <p:nvSpPr>
-          <p:cNvPr id="8" name="TextBox 7"/>
+          <p:cNvPr id="9" name="TextBox 8"/>
           <p:cNvSpPr txBox="1"/>
           <p:nvPr/>
         </p:nvSpPr>
@@ -6774,7 +6849,7 @@
       </p:sp>
       <p:graphicFrame>
         <p:nvGraphicFramePr>
-          <p:cNvPr id="9" name="Chart 8"/>
+          <p:cNvPr id="10" name="Chart 9"/>
           <p:cNvGraphicFramePr>
             <a:graphicFrameLocks noGrp="1"/>
           </p:cNvGraphicFramePr>
@@ -6792,7 +6867,7 @@
       </p:graphicFrame>
       <p:sp>
         <p:nvSpPr>
-          <p:cNvPr id="10" name="Rectangle 9"/>
+          <p:cNvPr id="11" name="Rectangle 10"/>
           <p:cNvSpPr/>
           <p:nvPr/>
         </p:nvSpPr>
@@ -6841,7 +6916,7 @@
       </p:sp>
       <p:sp>
         <p:nvSpPr>
-          <p:cNvPr id="11" name="TextBox 10"/>
+          <p:cNvPr id="12" name="TextBox 11"/>
           <p:cNvSpPr txBox="1"/>
           <p:nvPr/>
         </p:nvSpPr>
@@ -6876,14 +6951,14 @@
               <a:rPr>
                 <a:latin typeface="Inter"/>
               </a:rPr>
-              <a:t>Sources: S8</a:t>
+              <a:t>Sources: S1 · S8</a:t>
             </a:r>
           </a:p>
         </p:txBody>
       </p:sp>
       <p:sp>
         <p:nvSpPr>
-          <p:cNvPr id="12" name="TextBox 11"/>
+          <p:cNvPr id="13" name="TextBox 12"/>
           <p:cNvSpPr txBox="1"/>
           <p:nvPr/>
         </p:nvSpPr>
@@ -6918,14 +6993,14 @@
               <a:rPr>
                 <a:latin typeface="Inter"/>
               </a:rPr>
-              <a:t>RENDER TEST — fictional managers, not a real comparison · Data as of 2026-10-01 (Form ADV); 2026-06-30 (Form 13F)</a:t>
+              <a:t>Confidential — manager diligence review · Data as of 2026-10-01 (Form ADV); 2026-06-30 (Form 13F)</a:t>
             </a:r>
           </a:p>
         </p:txBody>
       </p:sp>
       <p:sp>
         <p:nvSpPr>
-          <p:cNvPr id="13" name="TextBox 12"/>
+          <p:cNvPr id="14" name="TextBox 13"/>
           <p:cNvSpPr txBox="1"/>
           <p:nvPr/>
         </p:nvSpPr>
@@ -7041,7 +7116,7 @@
         <p:spPr>
           <a:xfrm>
             <a:off x="640080" y="329184"/>
-            <a:ext cx="9875520" cy="182880"/>
+            <a:ext cx="5303520" cy="182880"/>
           </a:xfrm>
           <a:prstGeom prst="rect">
             <a:avLst/>
@@ -7082,6 +7157,48 @@
         </p:nvSpPr>
         <p:spPr>
           <a:xfrm>
+            <a:off x="5897880" y="310896"/>
+            <a:ext cx="4800600" cy="256032"/>
+          </a:xfrm>
+          <a:prstGeom prst="rect">
+            <a:avLst/>
+          </a:prstGeom>
+          <a:noFill/>
+        </p:spPr>
+        <p:txBody>
+          <a:bodyPr wrap="none" lIns="9144" rIns="9144" tIns="9144" bIns="9144" anchor="t">
+            <a:spAutoFit/>
+          </a:bodyPr>
+          <a:lstStyle/>
+          <a:p>
+            <a:pPr algn="r">
+              <a:spcAft>
+                <a:spcPts val="0"/>
+              </a:spcAft>
+              <a:defRPr sz="680" b="1">
+                <a:solidFill>
+                  <a:srgbClr val="4F6B00"/>
+                </a:solidFill>
+                <a:latin typeface="Inter"/>
+              </a:defRPr>
+            </a:pPr>
+            <a:r>
+              <a:rPr>
+                <a:latin typeface="Inter"/>
+              </a:rPr>
+              <a:t>Illustrative, Gradient Maintained — demo data, not the client's holdings or managers</a:t>
+            </a:r>
+          </a:p>
+        </p:txBody>
+      </p:sp>
+      <p:sp>
+        <p:nvSpPr>
+          <p:cNvPr id="5" name="TextBox 4"/>
+          <p:cNvSpPr txBox="1"/>
+          <p:nvPr/>
+        </p:nvSpPr>
+        <p:spPr>
+          <a:xfrm>
             <a:off x="640080" y="566928"/>
             <a:ext cx="10058400" cy="530352"/>
           </a:xfrm>
@@ -7118,7 +7235,7 @@
       </p:sp>
       <p:sp>
         <p:nvSpPr>
-          <p:cNvPr id="5" name="Rectangle 4"/>
+          <p:cNvPr id="6" name="Rectangle 5"/>
           <p:cNvSpPr/>
           <p:nvPr/>
         </p:nvSpPr>
@@ -7167,7 +7284,7 @@
       </p:sp>
       <p:sp>
         <p:nvSpPr>
-          <p:cNvPr id="6" name="Rectangle 5"/>
+          <p:cNvPr id="7" name="Rectangle 6"/>
           <p:cNvSpPr/>
           <p:nvPr/>
         </p:nvSpPr>
@@ -7216,7 +7333,7 @@
       </p:sp>
       <p:sp>
         <p:nvSpPr>
-          <p:cNvPr id="7" name="TextBox 6"/>
+          <p:cNvPr id="8" name="TextBox 7"/>
           <p:cNvSpPr txBox="1"/>
           <p:nvPr/>
         </p:nvSpPr>
@@ -7258,7 +7375,7 @@
       </p:sp>
       <p:sp>
         <p:nvSpPr>
-          <p:cNvPr id="8" name="Rectangle 7"/>
+          <p:cNvPr id="9" name="Rectangle 8"/>
           <p:cNvSpPr/>
           <p:nvPr/>
         </p:nvSpPr>
@@ -7307,7 +7424,7 @@
       </p:sp>
       <p:sp>
         <p:nvSpPr>
-          <p:cNvPr id="9" name="Rectangle 8"/>
+          <p:cNvPr id="10" name="Rectangle 9"/>
           <p:cNvSpPr/>
           <p:nvPr/>
         </p:nvSpPr>
@@ -7356,7 +7473,7 @@
       </p:sp>
       <p:sp>
         <p:nvSpPr>
-          <p:cNvPr id="10" name="TextBox 9"/>
+          <p:cNvPr id="11" name="TextBox 10"/>
           <p:cNvSpPr txBox="1"/>
           <p:nvPr/>
         </p:nvSpPr>
@@ -7391,14 +7508,14 @@
               <a:rPr>
                 <a:latin typeface="Inter"/>
               </a:rPr>
-              <a:t>Ridgeview Example Advisors (TEST): no flags identified</a:t>
+              <a:t>Ridgeview Advisors: no flags identified</a:t>
             </a:r>
           </a:p>
         </p:txBody>
       </p:sp>
       <p:sp>
         <p:nvSpPr>
-          <p:cNvPr id="11" name="TextBox 10"/>
+          <p:cNvPr id="12" name="TextBox 11"/>
           <p:cNvSpPr txBox="1"/>
           <p:nvPr/>
         </p:nvSpPr>
@@ -7440,7 +7557,7 @@
       </p:sp>
       <p:graphicFrame>
         <p:nvGraphicFramePr>
-          <p:cNvPr id="12" name="Table 11"/>
+          <p:cNvPr id="13" name="Table 12"/>
           <p:cNvGraphicFramePr>
             <a:graphicFrameLocks noGrp="1"/>
           </p:cNvGraphicFramePr>
@@ -7589,7 +7706,7 @@
                         <a:rPr>
                           <a:latin typeface="Inter"/>
                         </a:rPr>
-                        <a:t>Harbor Example Capital (TEST): 2 of 9 private funds name no administrator</a:t>
+                        <a:t>Harbor Example Capital: 2 of 9 private funds name no administrator</a:t>
                       </a:r>
                     </a:p>
                   </a:txBody>
@@ -7616,7 +7733,7 @@
                         <a:rPr>
                           <a:latin typeface="Inter"/>
                         </a:rPr>
-                        <a:t>Schedule D 7.B.1 rows for Harbor Example Opportunities Fund (TEST) and Harbor Example Credit Fund (TEST) leave the administrator blank [S2]. Ask who prepares investor statements.</a:t>
+                        <a:t>Schedule D 7.B.1 rows for Harbor Example Opportunities Fund and Harbor Example Credit Fund leave the administrator blank [S2]. Ask who prepares investor statements.</a:t>
                       </a:r>
                     </a:p>
                   </a:txBody>
@@ -7672,7 +7789,7 @@
                         <a:rPr>
                           <a:latin typeface="Inter"/>
                         </a:rPr>
-                        <a:t>Harbor Example Capital (TEST): PCAOB registry check unavailable</a:t>
+                        <a:t>Harbor Example Capital: PCAOB registry check unavailable</a:t>
                       </a:r>
                     </a:p>
                   </a:txBody>
@@ -7716,7 +7833,7 @@
       </p:graphicFrame>
       <p:graphicFrame>
         <p:nvGraphicFramePr>
-          <p:cNvPr id="13" name="Table 12"/>
+          <p:cNvPr id="14" name="Table 13"/>
           <p:cNvGraphicFramePr>
             <a:graphicFrameLocks noGrp="1"/>
           </p:cNvGraphicFramePr>
@@ -7865,7 +7982,7 @@
                         <a:rPr>
                           <a:latin typeface="Inter"/>
                         </a:rPr>
-                        <a:t>Northfield Example Capital (TEST): custody through a related person</a:t>
+                        <a:t>Northfield Example Capital: custody through a related person</a:t>
                       </a:r>
                     </a:p>
                   </a:txBody>
@@ -7948,7 +8065,7 @@
                         <a:rPr>
                           <a:latin typeface="Inter"/>
                         </a:rPr>
-                        <a:t>Northfield Example Capital (TEST): not in diligence catalog</a:t>
+                        <a:t>Northfield Example Capital: not in diligence catalog</a:t>
                       </a:r>
                     </a:p>
                   </a:txBody>
@@ -7992,7 +8109,7 @@
       </p:graphicFrame>
       <p:sp>
         <p:nvSpPr>
-          <p:cNvPr id="14" name="Rectangle 13"/>
+          <p:cNvPr id="15" name="Rectangle 14"/>
           <p:cNvSpPr/>
           <p:nvPr/>
         </p:nvSpPr>
@@ -8041,7 +8158,7 @@
       </p:sp>
       <p:sp>
         <p:nvSpPr>
-          <p:cNvPr id="15" name="TextBox 14"/>
+          <p:cNvPr id="16" name="TextBox 15"/>
           <p:cNvSpPr txBox="1"/>
           <p:nvPr/>
         </p:nvSpPr>
@@ -8083,7 +8200,7 @@
       </p:sp>
       <p:sp>
         <p:nvSpPr>
-          <p:cNvPr id="16" name="TextBox 15"/>
+          <p:cNvPr id="17" name="TextBox 16"/>
           <p:cNvSpPr txBox="1"/>
           <p:nvPr/>
         </p:nvSpPr>
@@ -8118,14 +8235,14 @@
               <a:rPr>
                 <a:latin typeface="Inter"/>
               </a:rPr>
-              <a:t>RENDER TEST — fictional managers, not a real comparison · Data as of 2026-10-01 (Form ADV); 2026-06-30 (Form 13F)</a:t>
+              <a:t>Confidential — manager diligence review · Data as of 2026-10-01 (Form ADV); 2026-06-30 (Form 13F)</a:t>
             </a:r>
           </a:p>
         </p:txBody>
       </p:sp>
       <p:sp>
         <p:nvSpPr>
-          <p:cNvPr id="17" name="TextBox 16"/>
+          <p:cNvPr id="18" name="TextBox 17"/>
           <p:cNvSpPr txBox="1"/>
           <p:nvPr/>
         </p:nvSpPr>
@@ -8241,7 +8358,7 @@
         <p:spPr>
           <a:xfrm>
             <a:off x="640080" y="329184"/>
-            <a:ext cx="9875520" cy="182880"/>
+            <a:ext cx="5303520" cy="182880"/>
           </a:xfrm>
           <a:prstGeom prst="rect">
             <a:avLst/>
@@ -8282,6 +8399,48 @@
         </p:nvSpPr>
         <p:spPr>
           <a:xfrm>
+            <a:off x="5897880" y="310896"/>
+            <a:ext cx="4800600" cy="256032"/>
+          </a:xfrm>
+          <a:prstGeom prst="rect">
+            <a:avLst/>
+          </a:prstGeom>
+          <a:noFill/>
+        </p:spPr>
+        <p:txBody>
+          <a:bodyPr wrap="none" lIns="9144" rIns="9144" tIns="9144" bIns="9144" anchor="t">
+            <a:spAutoFit/>
+          </a:bodyPr>
+          <a:lstStyle/>
+          <a:p>
+            <a:pPr algn="r">
+              <a:spcAft>
+                <a:spcPts val="0"/>
+              </a:spcAft>
+              <a:defRPr sz="680" b="1">
+                <a:solidFill>
+                  <a:srgbClr val="4F6B00"/>
+                </a:solidFill>
+                <a:latin typeface="Inter"/>
+              </a:defRPr>
+            </a:pPr>
+            <a:r>
+              <a:rPr>
+                <a:latin typeface="Inter"/>
+              </a:rPr>
+              <a:t>Illustrative, Gradient Maintained — demo data, not the client's holdings or managers</a:t>
+            </a:r>
+          </a:p>
+        </p:txBody>
+      </p:sp>
+      <p:sp>
+        <p:nvSpPr>
+          <p:cNvPr id="5" name="TextBox 4"/>
+          <p:cNvSpPr txBox="1"/>
+          <p:nvPr/>
+        </p:nvSpPr>
+        <p:spPr>
+          <a:xfrm>
             <a:off x="640080" y="566928"/>
             <a:ext cx="10058400" cy="530352"/>
           </a:xfrm>
@@ -8318,7 +8477,7 @@
       </p:sp>
       <p:sp>
         <p:nvSpPr>
-          <p:cNvPr id="5" name="Rectangle 4"/>
+          <p:cNvPr id="6" name="Rectangle 5"/>
           <p:cNvSpPr/>
           <p:nvPr/>
         </p:nvSpPr>
@@ -8367,7 +8526,7 @@
       </p:sp>
       <p:sp>
         <p:nvSpPr>
-          <p:cNvPr id="6" name="Rectangle 5"/>
+          <p:cNvPr id="7" name="Rectangle 6"/>
           <p:cNvSpPr/>
           <p:nvPr/>
         </p:nvSpPr>
@@ -8416,7 +8575,7 @@
       </p:sp>
       <p:sp>
         <p:nvSpPr>
-          <p:cNvPr id="7" name="TextBox 6"/>
+          <p:cNvPr id="8" name="TextBox 7"/>
           <p:cNvSpPr txBox="1"/>
           <p:nvPr/>
         </p:nvSpPr>
@@ -8458,7 +8617,7 @@
       </p:sp>
       <p:sp>
         <p:nvSpPr>
-          <p:cNvPr id="8" name="Rectangle 7"/>
+          <p:cNvPr id="9" name="Rectangle 8"/>
           <p:cNvSpPr/>
           <p:nvPr/>
         </p:nvSpPr>
@@ -8507,7 +8666,7 @@
       </p:sp>
       <p:sp>
         <p:nvSpPr>
-          <p:cNvPr id="9" name="Rectangle 8"/>
+          <p:cNvPr id="10" name="Rectangle 9"/>
           <p:cNvSpPr/>
           <p:nvPr/>
         </p:nvSpPr>
@@ -8556,7 +8715,7 @@
       </p:sp>
       <p:sp>
         <p:nvSpPr>
-          <p:cNvPr id="10" name="TextBox 9"/>
+          <p:cNvPr id="11" name="TextBox 10"/>
           <p:cNvSpPr txBox="1"/>
           <p:nvPr/>
         </p:nvSpPr>
@@ -8598,7 +8757,7 @@
       </p:sp>
       <p:sp>
         <p:nvSpPr>
-          <p:cNvPr id="11" name="TextBox 10"/>
+          <p:cNvPr id="12" name="TextBox 11"/>
           <p:cNvSpPr txBox="1"/>
           <p:nvPr/>
         </p:nvSpPr>
@@ -8633,14 +8792,14 @@
               <a:rPr>
                 <a:latin typeface="Inter"/>
               </a:rPr>
-              <a:t>Observation: Harbor lacks complete provider evidence, while Northfield also lacks catalog identity [S2][S3]. Why it matters: The gaps require different diligence paths before selection. Uncertainty: The compact fixture…</a:t>
+              <a:t>Observation: Harbor lacks complete provider evidence, while Northfield also lacks catalog identity [S2][S3]. Why it matters: The gaps require different diligence paths before selection. Uncertainty: The public sample…</a:t>
             </a:r>
           </a:p>
         </p:txBody>
       </p:sp>
       <p:sp>
         <p:nvSpPr>
-          <p:cNvPr id="12" name="Rectangle 11"/>
+          <p:cNvPr id="13" name="Rectangle 12"/>
           <p:cNvSpPr/>
           <p:nvPr/>
         </p:nvSpPr>
@@ -8689,7 +8848,7 @@
       </p:sp>
       <p:sp>
         <p:nvSpPr>
-          <p:cNvPr id="13" name="TextBox 12"/>
+          <p:cNvPr id="14" name="TextBox 13"/>
           <p:cNvSpPr txBox="1"/>
           <p:nvPr/>
         </p:nvSpPr>
@@ -8731,7 +8890,7 @@
       </p:sp>
       <p:sp>
         <p:nvSpPr>
-          <p:cNvPr id="14" name="TextBox 13"/>
+          <p:cNvPr id="15" name="TextBox 14"/>
           <p:cNvSpPr txBox="1"/>
           <p:nvPr/>
         </p:nvSpPr>
@@ -8766,14 +8925,14 @@
               <a:rPr>
                 <a:latin typeface="Inter"/>
               </a:rPr>
-              <a:t>RENDER TEST — fictional managers, not a real comparison · Data as of 2026-10-01 (Form ADV); 2026-06-30 (Form 13F)</a:t>
+              <a:t>Confidential — manager diligence review · Data as of 2026-10-01 (Form ADV); 2026-06-30 (Form 13F)</a:t>
             </a:r>
           </a:p>
         </p:txBody>
       </p:sp>
       <p:sp>
         <p:nvSpPr>
-          <p:cNvPr id="15" name="TextBox 14"/>
+          <p:cNvPr id="16" name="TextBox 15"/>
           <p:cNvSpPr txBox="1"/>
           <p:nvPr/>
         </p:nvSpPr>
@@ -8889,7 +9048,7 @@
         <p:spPr>
           <a:xfrm>
             <a:off x="640080" y="329184"/>
-            <a:ext cx="9875520" cy="182880"/>
+            <a:ext cx="5303520" cy="182880"/>
           </a:xfrm>
           <a:prstGeom prst="rect">
             <a:avLst/>
@@ -8930,6 +9089,48 @@
         </p:nvSpPr>
         <p:spPr>
           <a:xfrm>
+            <a:off x="5897880" y="310896"/>
+            <a:ext cx="4800600" cy="256032"/>
+          </a:xfrm>
+          <a:prstGeom prst="rect">
+            <a:avLst/>
+          </a:prstGeom>
+          <a:noFill/>
+        </p:spPr>
+        <p:txBody>
+          <a:bodyPr wrap="none" lIns="9144" rIns="9144" tIns="9144" bIns="9144" anchor="t">
+            <a:spAutoFit/>
+          </a:bodyPr>
+          <a:lstStyle/>
+          <a:p>
+            <a:pPr algn="r">
+              <a:spcAft>
+                <a:spcPts val="0"/>
+              </a:spcAft>
+              <a:defRPr sz="680" b="1">
+                <a:solidFill>
+                  <a:srgbClr val="4F6B00"/>
+                </a:solidFill>
+                <a:latin typeface="Inter"/>
+              </a:defRPr>
+            </a:pPr>
+            <a:r>
+              <a:rPr>
+                <a:latin typeface="Inter"/>
+              </a:rPr>
+              <a:t>Illustrative, Gradient Maintained — demo data, not the client's holdings or managers</a:t>
+            </a:r>
+          </a:p>
+        </p:txBody>
+      </p:sp>
+      <p:sp>
+        <p:nvSpPr>
+          <p:cNvPr id="5" name="TextBox 4"/>
+          <p:cNvSpPr txBox="1"/>
+          <p:nvPr/>
+        </p:nvSpPr>
+        <p:spPr>
+          <a:xfrm>
             <a:off x="640080" y="566928"/>
             <a:ext cx="10058400" cy="530352"/>
           </a:xfrm>
@@ -8966,7 +9167,7 @@
       </p:sp>
       <p:sp>
         <p:nvSpPr>
-          <p:cNvPr id="5" name="Rectangle 4"/>
+          <p:cNvPr id="6" name="Rectangle 5"/>
           <p:cNvSpPr/>
           <p:nvPr/>
         </p:nvSpPr>
@@ -9015,7 +9216,7 @@
       </p:sp>
       <p:sp>
         <p:nvSpPr>
-          <p:cNvPr id="6" name="Rectangle 5"/>
+          <p:cNvPr id="7" name="Rectangle 6"/>
           <p:cNvSpPr/>
           <p:nvPr/>
         </p:nvSpPr>
@@ -9064,7 +9265,7 @@
       </p:sp>
       <p:sp>
         <p:nvSpPr>
-          <p:cNvPr id="7" name="TextBox 6"/>
+          <p:cNvPr id="8" name="TextBox 7"/>
           <p:cNvSpPr txBox="1"/>
           <p:nvPr/>
         </p:nvSpPr>
@@ -9106,7 +9307,7 @@
       </p:sp>
       <p:sp>
         <p:nvSpPr>
-          <p:cNvPr id="8" name="TextBox 7"/>
+          <p:cNvPr id="9" name="TextBox 8"/>
           <p:cNvSpPr txBox="1"/>
           <p:nvPr/>
         </p:nvSpPr>
@@ -9148,7 +9349,7 @@
       </p:sp>
       <p:graphicFrame>
         <p:nvGraphicFramePr>
-          <p:cNvPr id="9" name="Table 8"/>
+          <p:cNvPr id="10" name="Table 9"/>
           <p:cNvGraphicFramePr>
             <a:graphicFrameLocks noGrp="1"/>
           </p:cNvGraphicFramePr>
@@ -9418,7 +9619,7 @@
       </p:graphicFrame>
       <p:sp>
         <p:nvSpPr>
-          <p:cNvPr id="10" name="Rectangle 9"/>
+          <p:cNvPr id="11" name="Rectangle 10"/>
           <p:cNvSpPr/>
           <p:nvPr/>
         </p:nvSpPr>
@@ -9467,7 +9668,7 @@
       </p:sp>
       <p:sp>
         <p:nvSpPr>
-          <p:cNvPr id="11" name="TextBox 10"/>
+          <p:cNvPr id="12" name="TextBox 11"/>
           <p:cNvSpPr txBox="1"/>
           <p:nvPr/>
         </p:nvSpPr>
@@ -9509,7 +9710,7 @@
       </p:sp>
       <p:sp>
         <p:nvSpPr>
-          <p:cNvPr id="12" name="TextBox 11"/>
+          <p:cNvPr id="13" name="TextBox 12"/>
           <p:cNvSpPr txBox="1"/>
           <p:nvPr/>
         </p:nvSpPr>
@@ -9544,14 +9745,14 @@
               <a:rPr>
                 <a:latin typeface="Inter"/>
               </a:rPr>
-              <a:t>RENDER TEST — fictional managers, not a real comparison · Data as of 2026-10-01 (Form ADV); 2026-06-30 (Form 13F)</a:t>
+              <a:t>Confidential — manager diligence review · Data as of 2026-10-01 (Form ADV); 2026-06-30 (Form 13F)</a:t>
             </a:r>
           </a:p>
         </p:txBody>
       </p:sp>
       <p:sp>
         <p:nvSpPr>
-          <p:cNvPr id="13" name="TextBox 12"/>
+          <p:cNvPr id="14" name="TextBox 13"/>
           <p:cNvSpPr txBox="1"/>
           <p:nvPr/>
         </p:nvSpPr>
@@ -9667,7 +9868,7 @@
         <p:spPr>
           <a:xfrm>
             <a:off x="640080" y="329184"/>
-            <a:ext cx="9875520" cy="182880"/>
+            <a:ext cx="5303520" cy="182880"/>
           </a:xfrm>
           <a:prstGeom prst="rect">
             <a:avLst/>
@@ -9708,6 +9909,48 @@
         </p:nvSpPr>
         <p:spPr>
           <a:xfrm>
+            <a:off x="5897880" y="310896"/>
+            <a:ext cx="4800600" cy="256032"/>
+          </a:xfrm>
+          <a:prstGeom prst="rect">
+            <a:avLst/>
+          </a:prstGeom>
+          <a:noFill/>
+        </p:spPr>
+        <p:txBody>
+          <a:bodyPr wrap="none" lIns="9144" rIns="9144" tIns="9144" bIns="9144" anchor="t">
+            <a:spAutoFit/>
+          </a:bodyPr>
+          <a:lstStyle/>
+          <a:p>
+            <a:pPr algn="r">
+              <a:spcAft>
+                <a:spcPts val="0"/>
+              </a:spcAft>
+              <a:defRPr sz="680" b="1">
+                <a:solidFill>
+                  <a:srgbClr val="4F6B00"/>
+                </a:solidFill>
+                <a:latin typeface="Inter"/>
+              </a:defRPr>
+            </a:pPr>
+            <a:r>
+              <a:rPr>
+                <a:latin typeface="Inter"/>
+              </a:rPr>
+              <a:t>Illustrative, Gradient Maintained — demo data, not the client's holdings or managers</a:t>
+            </a:r>
+          </a:p>
+        </p:txBody>
+      </p:sp>
+      <p:sp>
+        <p:nvSpPr>
+          <p:cNvPr id="5" name="TextBox 4"/>
+          <p:cNvSpPr txBox="1"/>
+          <p:nvPr/>
+        </p:nvSpPr>
+        <p:spPr>
+          <a:xfrm>
             <a:off x="640080" y="566928"/>
             <a:ext cx="10058400" cy="530352"/>
           </a:xfrm>
@@ -9744,7 +9987,7 @@
       </p:sp>
       <p:sp>
         <p:nvSpPr>
-          <p:cNvPr id="5" name="Rectangle 4"/>
+          <p:cNvPr id="6" name="Rectangle 5"/>
           <p:cNvSpPr/>
           <p:nvPr/>
         </p:nvSpPr>
@@ -9793,7 +10036,7 @@
       </p:sp>
       <p:sp>
         <p:nvSpPr>
-          <p:cNvPr id="6" name="Rectangle 5"/>
+          <p:cNvPr id="7" name="Rectangle 6"/>
           <p:cNvSpPr/>
           <p:nvPr/>
         </p:nvSpPr>
@@ -9842,7 +10085,7 @@
       </p:sp>
       <p:sp>
         <p:nvSpPr>
-          <p:cNvPr id="7" name="TextBox 6"/>
+          <p:cNvPr id="8" name="TextBox 7"/>
           <p:cNvSpPr txBox="1"/>
           <p:nvPr/>
         </p:nvSpPr>
@@ -9884,7 +10127,7 @@
       </p:sp>
       <p:sp>
         <p:nvSpPr>
-          <p:cNvPr id="8" name="TextBox 7"/>
+          <p:cNvPr id="9" name="TextBox 8"/>
           <p:cNvSpPr txBox="1"/>
           <p:nvPr/>
         </p:nvSpPr>
@@ -9926,7 +10169,7 @@
       </p:sp>
       <p:graphicFrame>
         <p:nvGraphicFramePr>
-          <p:cNvPr id="9" name="Table 8"/>
+          <p:cNvPr id="10" name="Table 9"/>
           <p:cNvGraphicFramePr>
             <a:graphicFrameLocks noGrp="1"/>
           </p:cNvGraphicFramePr>
@@ -9987,7 +10230,7 @@
                         <a:rPr>
                           <a:latin typeface="Inter"/>
                         </a:rPr>
-                        <a:t>Ridgeview (TEST)</a:t>
+                        <a:t>Ridgeview</a:t>
                       </a:r>
                     </a:p>
                   </a:txBody>
@@ -10014,7 +10257,7 @@
                         <a:rPr>
                           <a:latin typeface="Inter"/>
                         </a:rPr>
-                        <a:t>Harbor (TEST)</a:t>
+                        <a:t>Harbor</a:t>
                       </a:r>
                     </a:p>
                   </a:txBody>
@@ -10041,7 +10284,7 @@
                         <a:rPr>
                           <a:latin typeface="Inter"/>
                         </a:rPr>
-                        <a:t>Northfield (TEST)</a:t>
+                        <a:t>Northfield</a:t>
                       </a:r>
                     </a:p>
                   </a:txBody>
@@ -10070,7 +10313,7 @@
                         <a:rPr>
                           <a:latin typeface="Inter"/>
                         </a:rPr>
-                        <a:t>Ridgeview (TEST)</a:t>
+                        <a:t>Ridgeview</a:t>
                       </a:r>
                     </a:p>
                   </a:txBody>
@@ -10093,12 +10336,6 @@
                           <a:latin typeface="Inter"/>
                         </a:defRPr>
                       </a:pPr>
-                      <a:r>
-                        <a:rPr>
-                          <a:latin typeface="Inter"/>
-                        </a:rPr>
-                        <a:t>—</a:t>
-                      </a:r>
                     </a:p>
                   </a:txBody>
                   <a:tcPr marL="54864" marR="54864" marT="27432" marB="27432" anchor="ctr">
@@ -10180,7 +10417,7 @@
                         <a:rPr>
                           <a:latin typeface="Inter"/>
                         </a:rPr>
-                        <a:t>Harbor (TEST)</a:t>
+                        <a:t>Harbor</a:t>
                       </a:r>
                     </a:p>
                   </a:txBody>
@@ -10230,12 +10467,6 @@
                           <a:latin typeface="Inter"/>
                         </a:defRPr>
                       </a:pPr>
-                      <a:r>
-                        <a:rPr>
-                          <a:latin typeface="Inter"/>
-                        </a:rPr>
-                        <a:t>—</a:t>
-                      </a:r>
                     </a:p>
                   </a:txBody>
                   <a:tcPr marL="54864" marR="54864" marT="27432" marB="27432" anchor="ctr">
@@ -10290,7 +10521,7 @@
                         <a:rPr>
                           <a:latin typeface="Inter"/>
                         </a:rPr>
-                        <a:t>Northfield (TEST)</a:t>
+                        <a:t>Northfield</a:t>
                       </a:r>
                     </a:p>
                   </a:txBody>
@@ -10367,12 +10598,6 @@
                           <a:latin typeface="Inter"/>
                         </a:defRPr>
                       </a:pPr>
-                      <a:r>
-                        <a:rPr>
-                          <a:latin typeface="Inter"/>
-                        </a:rPr>
-                        <a:t>—</a:t>
-                      </a:r>
                     </a:p>
                   </a:txBody>
                   <a:tcPr marL="54864" marR="54864" marT="27432" marB="27432" anchor="ctr">
@@ -10388,7 +10613,7 @@
       </p:graphicFrame>
       <p:sp>
         <p:nvSpPr>
-          <p:cNvPr id="10" name="TextBox 9"/>
+          <p:cNvPr id="11" name="TextBox 10"/>
           <p:cNvSpPr txBox="1"/>
           <p:nvPr/>
         </p:nvSpPr>
@@ -10430,7 +10655,7 @@
       </p:sp>
       <p:sp>
         <p:nvSpPr>
-          <p:cNvPr id="11" name="TextBox 10"/>
+          <p:cNvPr id="12" name="TextBox 11"/>
           <p:cNvSpPr txBox="1"/>
           <p:nvPr/>
         </p:nvSpPr>
@@ -10472,7 +10697,7 @@
       </p:sp>
       <p:graphicFrame>
         <p:nvGraphicFramePr>
-          <p:cNvPr id="12" name="Table 11"/>
+          <p:cNvPr id="13" name="Table 12"/>
           <p:cNvGraphicFramePr>
             <a:graphicFrameLocks noGrp="1"/>
           </p:cNvGraphicFramePr>
@@ -10622,7 +10847,7 @@
                         <a:rPr>
                           <a:latin typeface="Inter"/>
                         </a:rPr>
-                        <a:t>Example Index ETF (TEST)</a:t>
+                        <a:t>Example Index ETF</a:t>
                       </a:r>
                     </a:p>
                   </a:txBody>
@@ -10732,7 +10957,7 @@
                         <a:rPr>
                           <a:latin typeface="Inter"/>
                         </a:rPr>
-                        <a:t>Example Semiconductor Corp (TEST)</a:t>
+                        <a:t>Example Semiconductor Corp</a:t>
                       </a:r>
                     </a:p>
                   </a:txBody>
@@ -10842,7 +11067,7 @@
                         <a:rPr>
                           <a:latin typeface="Inter"/>
                         </a:rPr>
-                        <a:t>Example Software Inc (TEST)</a:t>
+                        <a:t>Example Software Inc</a:t>
                       </a:r>
                     </a:p>
                   </a:txBody>
@@ -10940,7 +11165,7 @@
       </p:graphicFrame>
       <p:sp>
         <p:nvSpPr>
-          <p:cNvPr id="13" name="Rectangle 12"/>
+          <p:cNvPr id="14" name="Rectangle 13"/>
           <p:cNvSpPr/>
           <p:nvPr/>
         </p:nvSpPr>
@@ -10989,7 +11214,7 @@
       </p:sp>
       <p:sp>
         <p:nvSpPr>
-          <p:cNvPr id="14" name="Rectangle 13"/>
+          <p:cNvPr id="15" name="Rectangle 14"/>
           <p:cNvSpPr/>
           <p:nvPr/>
         </p:nvSpPr>
@@ -11038,7 +11263,7 @@
       </p:sp>
       <p:sp>
         <p:nvSpPr>
-          <p:cNvPr id="15" name="TextBox 14"/>
+          <p:cNvPr id="16" name="TextBox 15"/>
           <p:cNvSpPr txBox="1"/>
           <p:nvPr/>
         </p:nvSpPr>
@@ -11080,7 +11305,7 @@
       </p:sp>
       <p:sp>
         <p:nvSpPr>
-          <p:cNvPr id="16" name="TextBox 15"/>
+          <p:cNvPr id="17" name="TextBox 16"/>
           <p:cNvSpPr txBox="1"/>
           <p:nvPr/>
         </p:nvSpPr>
@@ -11122,7 +11347,7 @@
       </p:sp>
       <p:sp>
         <p:nvSpPr>
-          <p:cNvPr id="17" name="Rectangle 16"/>
+          <p:cNvPr id="18" name="Rectangle 17"/>
           <p:cNvSpPr/>
           <p:nvPr/>
         </p:nvSpPr>
@@ -11171,7 +11396,7 @@
       </p:sp>
       <p:sp>
         <p:nvSpPr>
-          <p:cNvPr id="18" name="TextBox 17"/>
+          <p:cNvPr id="19" name="TextBox 18"/>
           <p:cNvSpPr txBox="1"/>
           <p:nvPr/>
         </p:nvSpPr>
@@ -11206,14 +11431,14 @@
               <a:rPr>
                 <a:latin typeface="Inter"/>
               </a:rPr>
-              <a:t>Sources: S6</a:t>
+              <a:t>Sources: S1 · S6</a:t>
             </a:r>
           </a:p>
         </p:txBody>
       </p:sp>
       <p:sp>
         <p:nvSpPr>
-          <p:cNvPr id="19" name="TextBox 18"/>
+          <p:cNvPr id="20" name="TextBox 19"/>
           <p:cNvSpPr txBox="1"/>
           <p:nvPr/>
         </p:nvSpPr>
@@ -11248,14 +11473,14 @@
               <a:rPr>
                 <a:latin typeface="Inter"/>
               </a:rPr>
-              <a:t>RENDER TEST — fictional managers, not a real comparison · Data as of 2026-10-01 (Form ADV); 2026-06-30 (Form 13F)</a:t>
+              <a:t>Confidential — manager diligence review · Data as of 2026-10-01 (Form ADV); 2026-06-30 (Form 13F)</a:t>
             </a:r>
           </a:p>
         </p:txBody>
       </p:sp>
       <p:sp>
         <p:nvSpPr>
-          <p:cNvPr id="20" name="TextBox 19"/>
+          <p:cNvPr id="21" name="TextBox 20"/>
           <p:cNvSpPr txBox="1"/>
           <p:nvPr/>
         </p:nvSpPr>
@@ -11371,7 +11596,7 @@
         <p:spPr>
           <a:xfrm>
             <a:off x="640080" y="329184"/>
-            <a:ext cx="9875520" cy="182880"/>
+            <a:ext cx="5303520" cy="182880"/>
           </a:xfrm>
           <a:prstGeom prst="rect">
             <a:avLst/>
@@ -11412,6 +11637,48 @@
         </p:nvSpPr>
         <p:spPr>
           <a:xfrm>
+            <a:off x="5897880" y="310896"/>
+            <a:ext cx="4800600" cy="256032"/>
+          </a:xfrm>
+          <a:prstGeom prst="rect">
+            <a:avLst/>
+          </a:prstGeom>
+          <a:noFill/>
+        </p:spPr>
+        <p:txBody>
+          <a:bodyPr wrap="none" lIns="9144" rIns="9144" tIns="9144" bIns="9144" anchor="t">
+            <a:spAutoFit/>
+          </a:bodyPr>
+          <a:lstStyle/>
+          <a:p>
+            <a:pPr algn="r">
+              <a:spcAft>
+                <a:spcPts val="0"/>
+              </a:spcAft>
+              <a:defRPr sz="680" b="1">
+                <a:solidFill>
+                  <a:srgbClr val="4F6B00"/>
+                </a:solidFill>
+                <a:latin typeface="Inter"/>
+              </a:defRPr>
+            </a:pPr>
+            <a:r>
+              <a:rPr>
+                <a:latin typeface="Inter"/>
+              </a:rPr>
+              <a:t>Illustrative, Gradient Maintained — demo data, not the client's holdings or managers</a:t>
+            </a:r>
+          </a:p>
+        </p:txBody>
+      </p:sp>
+      <p:sp>
+        <p:nvSpPr>
+          <p:cNvPr id="5" name="TextBox 4"/>
+          <p:cNvSpPr txBox="1"/>
+          <p:nvPr/>
+        </p:nvSpPr>
+        <p:spPr>
+          <a:xfrm>
             <a:off x="640080" y="566928"/>
             <a:ext cx="10058400" cy="530352"/>
           </a:xfrm>
@@ -11448,7 +11715,7 @@
       </p:sp>
       <p:sp>
         <p:nvSpPr>
-          <p:cNvPr id="5" name="Rectangle 4"/>
+          <p:cNvPr id="6" name="Rectangle 5"/>
           <p:cNvSpPr/>
           <p:nvPr/>
         </p:nvSpPr>
@@ -11497,7 +11764,7 @@
       </p:sp>
       <p:sp>
         <p:nvSpPr>
-          <p:cNvPr id="6" name="Rectangle 5"/>
+          <p:cNvPr id="7" name="Rectangle 6"/>
           <p:cNvSpPr/>
           <p:nvPr/>
         </p:nvSpPr>
@@ -11546,7 +11813,7 @@
       </p:sp>
       <p:sp>
         <p:nvSpPr>
-          <p:cNvPr id="7" name="TextBox 6"/>
+          <p:cNvPr id="8" name="TextBox 7"/>
           <p:cNvSpPr txBox="1"/>
           <p:nvPr/>
         </p:nvSpPr>
@@ -11588,7 +11855,7 @@
       </p:sp>
       <p:sp>
         <p:nvSpPr>
-          <p:cNvPr id="8" name="Rectangle 7"/>
+          <p:cNvPr id="9" name="Rectangle 8"/>
           <p:cNvSpPr/>
           <p:nvPr/>
         </p:nvSpPr>
@@ -11637,7 +11904,7 @@
       </p:sp>
       <p:sp>
         <p:nvSpPr>
-          <p:cNvPr id="9" name="Rectangle 8"/>
+          <p:cNvPr id="10" name="Rectangle 9"/>
           <p:cNvSpPr/>
           <p:nvPr/>
         </p:nvSpPr>
@@ -11686,7 +11953,7 @@
       </p:sp>
       <p:sp>
         <p:nvSpPr>
-          <p:cNvPr id="10" name="TextBox 9"/>
+          <p:cNvPr id="11" name="TextBox 10"/>
           <p:cNvSpPr txBox="1"/>
           <p:nvPr/>
         </p:nvSpPr>
@@ -11728,7 +11995,7 @@
       </p:sp>
       <p:sp>
         <p:nvSpPr>
-          <p:cNvPr id="11" name="TextBox 10"/>
+          <p:cNvPr id="12" name="TextBox 11"/>
           <p:cNvSpPr txBox="1"/>
           <p:nvPr/>
         </p:nvSpPr>
@@ -11770,7 +12037,7 @@
       </p:sp>
       <p:sp>
         <p:nvSpPr>
-          <p:cNvPr id="12" name="Rectangle 11"/>
+          <p:cNvPr id="13" name="Rectangle 12"/>
           <p:cNvSpPr/>
           <p:nvPr/>
         </p:nvSpPr>
@@ -11819,7 +12086,7 @@
       </p:sp>
       <p:sp>
         <p:nvSpPr>
-          <p:cNvPr id="13" name="TextBox 12"/>
+          <p:cNvPr id="14" name="TextBox 13"/>
           <p:cNvSpPr txBox="1"/>
           <p:nvPr/>
         </p:nvSpPr>
@@ -11861,7 +12128,7 @@
       </p:sp>
       <p:sp>
         <p:nvSpPr>
-          <p:cNvPr id="14" name="TextBox 13"/>
+          <p:cNvPr id="15" name="TextBox 14"/>
           <p:cNvSpPr txBox="1"/>
           <p:nvPr/>
         </p:nvSpPr>
@@ -11896,14 +12163,14 @@
               <a:rPr>
                 <a:latin typeface="Inter"/>
               </a:rPr>
-              <a:t>RENDER TEST — fictional managers, not a real comparison · Data as of 2026-10-01 (Form ADV); 2026-06-30 (Form 13F)</a:t>
+              <a:t>Confidential — manager diligence review · Data as of 2026-10-01 (Form ADV); 2026-06-30 (Form 13F)</a:t>
             </a:r>
           </a:p>
         </p:txBody>
       </p:sp>
       <p:sp>
         <p:nvSpPr>
-          <p:cNvPr id="15" name="TextBox 14"/>
+          <p:cNvPr id="16" name="TextBox 15"/>
           <p:cNvSpPr txBox="1"/>
           <p:nvPr/>
         </p:nvSpPr>
@@ -12019,7 +12286,7 @@
         <p:spPr>
           <a:xfrm>
             <a:off x="640080" y="329184"/>
-            <a:ext cx="9875520" cy="182880"/>
+            <a:ext cx="5303520" cy="182880"/>
           </a:xfrm>
           <a:prstGeom prst="rect">
             <a:avLst/>
@@ -12060,6 +12327,48 @@
         </p:nvSpPr>
         <p:spPr>
           <a:xfrm>
+            <a:off x="5897880" y="310896"/>
+            <a:ext cx="4800600" cy="256032"/>
+          </a:xfrm>
+          <a:prstGeom prst="rect">
+            <a:avLst/>
+          </a:prstGeom>
+          <a:noFill/>
+        </p:spPr>
+        <p:txBody>
+          <a:bodyPr wrap="none" lIns="9144" rIns="9144" tIns="9144" bIns="9144" anchor="t">
+            <a:spAutoFit/>
+          </a:bodyPr>
+          <a:lstStyle/>
+          <a:p>
+            <a:pPr algn="r">
+              <a:spcAft>
+                <a:spcPts val="0"/>
+              </a:spcAft>
+              <a:defRPr sz="680" b="1">
+                <a:solidFill>
+                  <a:srgbClr val="4F6B00"/>
+                </a:solidFill>
+                <a:latin typeface="Inter"/>
+              </a:defRPr>
+            </a:pPr>
+            <a:r>
+              <a:rPr>
+                <a:latin typeface="Inter"/>
+              </a:rPr>
+              <a:t>Illustrative, Gradient Maintained — demo data, not the client's holdings or managers</a:t>
+            </a:r>
+          </a:p>
+        </p:txBody>
+      </p:sp>
+      <p:sp>
+        <p:nvSpPr>
+          <p:cNvPr id="5" name="TextBox 4"/>
+          <p:cNvSpPr txBox="1"/>
+          <p:nvPr/>
+        </p:nvSpPr>
+        <p:spPr>
+          <a:xfrm>
             <a:off x="640080" y="566928"/>
             <a:ext cx="10058400" cy="530352"/>
           </a:xfrm>
@@ -12096,7 +12405,7 @@
       </p:sp>
       <p:sp>
         <p:nvSpPr>
-          <p:cNvPr id="5" name="Rectangle 4"/>
+          <p:cNvPr id="6" name="Rectangle 5"/>
           <p:cNvSpPr/>
           <p:nvPr/>
         </p:nvSpPr>
@@ -12145,7 +12454,7 @@
       </p:sp>
       <p:sp>
         <p:nvSpPr>
-          <p:cNvPr id="6" name="Rectangle 5"/>
+          <p:cNvPr id="7" name="Rectangle 6"/>
           <p:cNvSpPr/>
           <p:nvPr/>
         </p:nvSpPr>
@@ -12194,7 +12503,7 @@
       </p:sp>
       <p:sp>
         <p:nvSpPr>
-          <p:cNvPr id="7" name="TextBox 6"/>
+          <p:cNvPr id="8" name="TextBox 7"/>
           <p:cNvSpPr txBox="1"/>
           <p:nvPr/>
         </p:nvSpPr>
@@ -12236,7 +12545,7 @@
       </p:sp>
       <p:sp>
         <p:nvSpPr>
-          <p:cNvPr id="8" name="Rectangle 7"/>
+          <p:cNvPr id="9" name="Rectangle 8"/>
           <p:cNvSpPr/>
           <p:nvPr/>
         </p:nvSpPr>
@@ -12285,7 +12594,7 @@
       </p:sp>
       <p:sp>
         <p:nvSpPr>
-          <p:cNvPr id="9" name="Rectangle 8"/>
+          <p:cNvPr id="10" name="Rectangle 9"/>
           <p:cNvSpPr/>
           <p:nvPr/>
         </p:nvSpPr>
@@ -12334,7 +12643,7 @@
       </p:sp>
       <p:sp>
         <p:nvSpPr>
-          <p:cNvPr id="10" name="TextBox 9"/>
+          <p:cNvPr id="11" name="TextBox 10"/>
           <p:cNvSpPr txBox="1"/>
           <p:nvPr/>
         </p:nvSpPr>
@@ -12376,7 +12685,7 @@
       </p:sp>
       <p:sp>
         <p:nvSpPr>
-          <p:cNvPr id="11" name="TextBox 10"/>
+          <p:cNvPr id="12" name="TextBox 11"/>
           <p:cNvSpPr txBox="1"/>
           <p:nvPr/>
         </p:nvSpPr>
@@ -12418,7 +12727,7 @@
       </p:sp>
       <p:graphicFrame>
         <p:nvGraphicFramePr>
-          <p:cNvPr id="12" name="Table 11"/>
+          <p:cNvPr id="13" name="Table 12"/>
           <p:cNvGraphicFramePr>
             <a:graphicFrameLocks noGrp="1"/>
           </p:cNvGraphicFramePr>
@@ -12652,7 +12961,7 @@
                         <a:rPr>
                           <a:latin typeface="Inter"/>
                         </a:rPr>
-                        <a:t>Ridgeview (TEST)</a:t>
+                        <a:t>Ridgeview</a:t>
                       </a:r>
                     </a:p>
                   </a:txBody>
@@ -12843,7 +13152,7 @@
                         <a:rPr>
                           <a:latin typeface="Inter"/>
                         </a:rPr>
-                        <a:t>Harbor (TEST)</a:t>
+                        <a:t>Harbor</a:t>
                       </a:r>
                     </a:p>
                   </a:txBody>
@@ -13034,7 +13343,7 @@
                         <a:rPr>
                           <a:latin typeface="Inter"/>
                         </a:rPr>
-                        <a:t>Northfield (TEST)</a:t>
+                        <a:t>Northfield</a:t>
                       </a:r>
                     </a:p>
                   </a:txBody>
@@ -13213,7 +13522,7 @@
       </p:graphicFrame>
       <p:sp>
         <p:nvSpPr>
-          <p:cNvPr id="13" name="Rectangle 12"/>
+          <p:cNvPr id="14" name="Rectangle 13"/>
           <p:cNvSpPr/>
           <p:nvPr/>
         </p:nvSpPr>
@@ -13262,7 +13571,7 @@
       </p:sp>
       <p:sp>
         <p:nvSpPr>
-          <p:cNvPr id="14" name="Rectangle 13"/>
+          <p:cNvPr id="15" name="Rectangle 14"/>
           <p:cNvSpPr/>
           <p:nvPr/>
         </p:nvSpPr>
@@ -13311,7 +13620,7 @@
       </p:sp>
       <p:sp>
         <p:nvSpPr>
-          <p:cNvPr id="15" name="TextBox 14"/>
+          <p:cNvPr id="16" name="TextBox 15"/>
           <p:cNvSpPr txBox="1"/>
           <p:nvPr/>
         </p:nvSpPr>
@@ -13353,7 +13662,7 @@
       </p:sp>
       <p:sp>
         <p:nvSpPr>
-          <p:cNvPr id="16" name="TextBox 15"/>
+          <p:cNvPr id="17" name="TextBox 16"/>
           <p:cNvSpPr txBox="1"/>
           <p:nvPr/>
         </p:nvSpPr>
@@ -13395,7 +13704,7 @@
       </p:sp>
       <p:sp>
         <p:nvSpPr>
-          <p:cNvPr id="17" name="Rectangle 16"/>
+          <p:cNvPr id="18" name="Rectangle 17"/>
           <p:cNvSpPr/>
           <p:nvPr/>
         </p:nvSpPr>
@@ -13444,7 +13753,7 @@
       </p:sp>
       <p:sp>
         <p:nvSpPr>
-          <p:cNvPr id="18" name="TextBox 17"/>
+          <p:cNvPr id="19" name="TextBox 18"/>
           <p:cNvSpPr txBox="1"/>
           <p:nvPr/>
         </p:nvSpPr>
@@ -13486,7 +13795,7 @@
       </p:sp>
       <p:sp>
         <p:nvSpPr>
-          <p:cNvPr id="19" name="TextBox 18"/>
+          <p:cNvPr id="20" name="TextBox 19"/>
           <p:cNvSpPr txBox="1"/>
           <p:nvPr/>
         </p:nvSpPr>
@@ -13521,14 +13830,14 @@
               <a:rPr>
                 <a:latin typeface="Inter"/>
               </a:rPr>
-              <a:t>RENDER TEST — fictional managers, not a real comparison · Data as of 2026-10-01 (Form ADV); 2026-06-30 (Form 13F)</a:t>
+              <a:t>Confidential — manager diligence review · Data as of 2026-10-01 (Form ADV); 2026-06-30 (Form 13F)</a:t>
             </a:r>
           </a:p>
         </p:txBody>
       </p:sp>
       <p:sp>
         <p:nvSpPr>
-          <p:cNvPr id="20" name="TextBox 19"/>
+          <p:cNvPr id="21" name="TextBox 20"/>
           <p:cNvSpPr txBox="1"/>
           <p:nvPr/>
         </p:nvSpPr>
@@ -13644,7 +13953,7 @@
         <p:spPr>
           <a:xfrm>
             <a:off x="640080" y="329184"/>
-            <a:ext cx="9875520" cy="182880"/>
+            <a:ext cx="5303520" cy="182880"/>
           </a:xfrm>
           <a:prstGeom prst="rect">
             <a:avLst/>
@@ -13685,6 +13994,48 @@
         </p:nvSpPr>
         <p:spPr>
           <a:xfrm>
+            <a:off x="5897880" y="310896"/>
+            <a:ext cx="4800600" cy="256032"/>
+          </a:xfrm>
+          <a:prstGeom prst="rect">
+            <a:avLst/>
+          </a:prstGeom>
+          <a:noFill/>
+        </p:spPr>
+        <p:txBody>
+          <a:bodyPr wrap="none" lIns="9144" rIns="9144" tIns="9144" bIns="9144" anchor="t">
+            <a:spAutoFit/>
+          </a:bodyPr>
+          <a:lstStyle/>
+          <a:p>
+            <a:pPr algn="r">
+              <a:spcAft>
+                <a:spcPts val="0"/>
+              </a:spcAft>
+              <a:defRPr sz="680" b="1">
+                <a:solidFill>
+                  <a:srgbClr val="4F6B00"/>
+                </a:solidFill>
+                <a:latin typeface="Inter"/>
+              </a:defRPr>
+            </a:pPr>
+            <a:r>
+              <a:rPr>
+                <a:latin typeface="Inter"/>
+              </a:rPr>
+              <a:t>Illustrative, Gradient Maintained — demo data, not the client's holdings or managers</a:t>
+            </a:r>
+          </a:p>
+        </p:txBody>
+      </p:sp>
+      <p:sp>
+        <p:nvSpPr>
+          <p:cNvPr id="5" name="TextBox 4"/>
+          <p:cNvSpPr txBox="1"/>
+          <p:nvPr/>
+        </p:nvSpPr>
+        <p:spPr>
+          <a:xfrm>
             <a:off x="640080" y="566928"/>
             <a:ext cx="10058400" cy="530352"/>
           </a:xfrm>
@@ -13721,7 +14072,7 @@
       </p:sp>
       <p:sp>
         <p:nvSpPr>
-          <p:cNvPr id="5" name="Rectangle 4"/>
+          <p:cNvPr id="6" name="Rectangle 5"/>
           <p:cNvSpPr/>
           <p:nvPr/>
         </p:nvSpPr>
@@ -13770,7 +14121,7 @@
       </p:sp>
       <p:sp>
         <p:nvSpPr>
-          <p:cNvPr id="6" name="Rectangle 5"/>
+          <p:cNvPr id="7" name="Rectangle 6"/>
           <p:cNvSpPr/>
           <p:nvPr/>
         </p:nvSpPr>
@@ -13819,7 +14170,7 @@
       </p:sp>
       <p:sp>
         <p:nvSpPr>
-          <p:cNvPr id="7" name="TextBox 6"/>
+          <p:cNvPr id="8" name="TextBox 7"/>
           <p:cNvSpPr txBox="1"/>
           <p:nvPr/>
         </p:nvSpPr>
@@ -13861,7 +14212,7 @@
       </p:sp>
       <p:sp>
         <p:nvSpPr>
-          <p:cNvPr id="8" name="TextBox 7"/>
+          <p:cNvPr id="9" name="TextBox 8"/>
           <p:cNvSpPr txBox="1"/>
           <p:nvPr/>
         </p:nvSpPr>
@@ -13903,7 +14254,7 @@
       </p:sp>
       <p:graphicFrame>
         <p:nvGraphicFramePr>
-          <p:cNvPr id="9" name="Table 8"/>
+          <p:cNvPr id="10" name="Table 9"/>
           <p:cNvGraphicFramePr>
             <a:graphicFrameLocks noGrp="1"/>
           </p:cNvGraphicFramePr>
@@ -14594,7 +14945,7 @@
       </p:graphicFrame>
       <p:sp>
         <p:nvSpPr>
-          <p:cNvPr id="10" name="TextBox 9"/>
+          <p:cNvPr id="11" name="TextBox 10"/>
           <p:cNvSpPr txBox="1"/>
           <p:nvPr/>
         </p:nvSpPr>
@@ -14636,7 +14987,7 @@
       </p:sp>
       <p:sp>
         <p:nvSpPr>
-          <p:cNvPr id="11" name="Rectangle 10"/>
+          <p:cNvPr id="12" name="Rectangle 11"/>
           <p:cNvSpPr/>
           <p:nvPr/>
         </p:nvSpPr>
@@ -14685,7 +15036,7 @@
       </p:sp>
       <p:sp>
         <p:nvSpPr>
-          <p:cNvPr id="12" name="TextBox 11"/>
+          <p:cNvPr id="13" name="TextBox 12"/>
           <p:cNvSpPr txBox="1"/>
           <p:nvPr/>
         </p:nvSpPr>
@@ -14727,7 +15078,7 @@
       </p:sp>
       <p:graphicFrame>
         <p:nvGraphicFramePr>
-          <p:cNvPr id="13" name="Table 12"/>
+          <p:cNvPr id="14" name="Table 13"/>
           <p:cNvGraphicFramePr>
             <a:graphicFrameLocks noGrp="1"/>
           </p:cNvGraphicFramePr>
@@ -14849,7 +15200,7 @@
                         <a:rPr>
                           <a:latin typeface="Inter"/>
                         </a:rPr>
-                        <a:t>Ridgeview (TEST)</a:t>
+                        <a:t>Ridgeview</a:t>
                       </a:r>
                     </a:p>
                   </a:txBody>
@@ -14932,7 +15283,7 @@
                         <a:rPr>
                           <a:latin typeface="Inter"/>
                         </a:rPr>
-                        <a:t>Harbor (TEST)</a:t>
+                        <a:t>Harbor</a:t>
                       </a:r>
                     </a:p>
                   </a:txBody>
@@ -15015,7 +15366,7 @@
                         <a:rPr>
                           <a:latin typeface="Inter"/>
                         </a:rPr>
-                        <a:t>Northfield (TEST)</a:t>
+                        <a:t>Northfield</a:t>
                       </a:r>
                     </a:p>
                   </a:txBody>
@@ -15086,7 +15437,7 @@
       </p:graphicFrame>
       <p:sp>
         <p:nvSpPr>
-          <p:cNvPr id="14" name="TextBox 13"/>
+          <p:cNvPr id="15" name="TextBox 14"/>
           <p:cNvSpPr txBox="1"/>
           <p:nvPr/>
         </p:nvSpPr>
@@ -15128,7 +15479,7 @@
       </p:sp>
       <p:sp>
         <p:nvSpPr>
-          <p:cNvPr id="15" name="TextBox 14"/>
+          <p:cNvPr id="16" name="TextBox 15"/>
           <p:cNvSpPr txBox="1"/>
           <p:nvPr/>
         </p:nvSpPr>
@@ -15170,7 +15521,7 @@
       </p:sp>
       <p:sp>
         <p:nvSpPr>
-          <p:cNvPr id="16" name="Rectangle 15"/>
+          <p:cNvPr id="17" name="Rectangle 16"/>
           <p:cNvSpPr/>
           <p:nvPr/>
         </p:nvSpPr>
@@ -15219,7 +15570,7 @@
       </p:sp>
       <p:sp>
         <p:nvSpPr>
-          <p:cNvPr id="17" name="TextBox 16"/>
+          <p:cNvPr id="18" name="TextBox 17"/>
           <p:cNvSpPr txBox="1"/>
           <p:nvPr/>
         </p:nvSpPr>
@@ -15261,7 +15612,7 @@
       </p:sp>
       <p:sp>
         <p:nvSpPr>
-          <p:cNvPr id="18" name="TextBox 17"/>
+          <p:cNvPr id="19" name="TextBox 18"/>
           <p:cNvSpPr txBox="1"/>
           <p:nvPr/>
         </p:nvSpPr>
@@ -15296,14 +15647,14 @@
               <a:rPr>
                 <a:latin typeface="Inter"/>
               </a:rPr>
-              <a:t>RENDER TEST — fictional managers, not a real comparison · Data as of 2026-10-01 (Form ADV); 2026-06-30 (Form 13F)</a:t>
+              <a:t>Confidential — manager diligence review · Data as of 2026-10-01 (Form ADV); 2026-06-30 (Form 13F)</a:t>
             </a:r>
           </a:p>
         </p:txBody>
       </p:sp>
       <p:sp>
         <p:nvSpPr>
-          <p:cNvPr id="19" name="TextBox 18"/>
+          <p:cNvPr id="20" name="TextBox 19"/>
           <p:cNvSpPr txBox="1"/>
           <p:nvPr/>
         </p:nvSpPr>
@@ -15418,6 +15769,48 @@
         </p:nvSpPr>
         <p:spPr>
           <a:xfrm>
+            <a:off x="5897880" y="310896"/>
+            <a:ext cx="4800600" cy="256032"/>
+          </a:xfrm>
+          <a:prstGeom prst="rect">
+            <a:avLst/>
+          </a:prstGeom>
+          <a:noFill/>
+        </p:spPr>
+        <p:txBody>
+          <a:bodyPr wrap="none" lIns="9144" rIns="9144" tIns="9144" bIns="9144" anchor="t">
+            <a:spAutoFit/>
+          </a:bodyPr>
+          <a:lstStyle/>
+          <a:p>
+            <a:pPr algn="r">
+              <a:spcAft>
+                <a:spcPts val="0"/>
+              </a:spcAft>
+              <a:defRPr sz="680" b="1">
+                <a:solidFill>
+                  <a:srgbClr val="4F6B00"/>
+                </a:solidFill>
+                <a:latin typeface="Inter"/>
+              </a:defRPr>
+            </a:pPr>
+            <a:r>
+              <a:rPr>
+                <a:latin typeface="Inter"/>
+              </a:rPr>
+              <a:t>Illustrative, Gradient Maintained — demo data, not the client's holdings or managers</a:t>
+            </a:r>
+          </a:p>
+        </p:txBody>
+      </p:sp>
+      <p:sp>
+        <p:nvSpPr>
+          <p:cNvPr id="4" name="TextBox 3"/>
+          <p:cNvSpPr txBox="1"/>
+          <p:nvPr/>
+        </p:nvSpPr>
+        <p:spPr>
+          <a:xfrm>
             <a:off x="640080" y="566928"/>
             <a:ext cx="10058400" cy="530352"/>
           </a:xfrm>
@@ -15447,14 +15840,14 @@
               <a:rPr>
                 <a:latin typeface="Inter"/>
               </a:rPr>
-              <a:t>Appendix A — Sources and method</a:t>
+              <a:t>Appendix — Sources and methods</a:t>
             </a:r>
           </a:p>
         </p:txBody>
       </p:sp>
       <p:sp>
         <p:nvSpPr>
-          <p:cNvPr id="4" name="Rectangle 3"/>
+          <p:cNvPr id="5" name="Rectangle 4"/>
           <p:cNvSpPr/>
           <p:nvPr/>
         </p:nvSpPr>
@@ -15503,7 +15896,7 @@
       </p:sp>
       <p:sp>
         <p:nvSpPr>
-          <p:cNvPr id="5" name="Rectangle 4"/>
+          <p:cNvPr id="6" name="Rectangle 5"/>
           <p:cNvSpPr/>
           <p:nvPr/>
         </p:nvSpPr>
@@ -15552,7 +15945,7 @@
       </p:sp>
       <p:sp>
         <p:nvSpPr>
-          <p:cNvPr id="6" name="TextBox 5"/>
+          <p:cNvPr id="7" name="TextBox 6"/>
           <p:cNvSpPr txBox="1"/>
           <p:nvPr/>
         </p:nvSpPr>
@@ -15594,7 +15987,7 @@
       </p:sp>
       <p:sp>
         <p:nvSpPr>
-          <p:cNvPr id="7" name="TextBox 6"/>
+          <p:cNvPr id="8" name="TextBox 7"/>
           <p:cNvSpPr txBox="1"/>
           <p:nvPr/>
         </p:nvSpPr>
@@ -15636,7 +16029,7 @@
       </p:sp>
       <p:graphicFrame>
         <p:nvGraphicFramePr>
-          <p:cNvPr id="8" name="Table 7"/>
+          <p:cNvPr id="9" name="Table 8"/>
           <p:cNvGraphicFramePr>
             <a:graphicFrameLocks noGrp="1"/>
           </p:cNvGraphicFramePr>
@@ -15644,7 +16037,7 @@
         </p:nvGraphicFramePr>
         <p:xfrm>
           <a:off x="640080" y="1600200"/>
-          <a:ext cx="10908790" cy="4617720"/>
+          <a:ext cx="10908792" cy="4416552"/>
         </p:xfrm>
         <a:graphic>
           <a:graphicData uri="http://schemas.openxmlformats.org/drawingml/2006/table">
@@ -15654,13 +16047,16 @@
               </a:tblPr>
               <a:tblGrid>
                 <a:gridCol w="2011680"/>
-                <a:gridCol w="1779422"/>
-                <a:gridCol w="1779422"/>
-                <a:gridCol w="1779422"/>
-                <a:gridCol w="1779422"/>
-                <a:gridCol w="1779422"/>
+                <a:gridCol w="1112139"/>
+                <a:gridCol w="1112139"/>
+                <a:gridCol w="1112139"/>
+                <a:gridCol w="1112139"/>
+                <a:gridCol w="1112139"/>
+                <a:gridCol w="1112139"/>
+                <a:gridCol w="1112139"/>
+                <a:gridCol w="1112139"/>
               </a:tblGrid>
-              <a:tr h="384810">
+              <a:tr h="368046">
                 <a:tc>
                   <a:txBody>
                     <a:bodyPr/>
@@ -15732,6 +16128,33 @@
                         <a:rPr>
                           <a:latin typeface="Inter"/>
                         </a:rPr>
+                        <a:t>Basis</a:t>
+                      </a:r>
+                    </a:p>
+                  </a:txBody>
+                  <a:tcPr marL="54864" marR="54864" marT="27432" marB="27432" anchor="ctr">
+                    <a:solidFill>
+                      <a:srgbClr val="0D1117"/>
+                    </a:solidFill>
+                  </a:tcPr>
+                </a:tc>
+                <a:tc>
+                  <a:txBody>
+                    <a:bodyPr/>
+                    <a:lstStyle/>
+                    <a:p>
+                      <a:pPr>
+                        <a:defRPr sz="750" b="1">
+                          <a:solidFill>
+                            <a:srgbClr val="FFFFFF"/>
+                          </a:solidFill>
+                          <a:latin typeface="Inter"/>
+                        </a:defRPr>
+                      </a:pPr>
+                      <a:r>
+                        <a:rPr>
+                          <a:latin typeface="Inter"/>
+                        </a:rPr>
                         <a:t>Tool / view</a:t>
                       </a:r>
                     </a:p>
@@ -15759,6 +16182,33 @@
                         <a:rPr>
                           <a:latin typeface="Inter"/>
                         </a:rPr>
+                        <a:t>Key parameters</a:t>
+                      </a:r>
+                    </a:p>
+                  </a:txBody>
+                  <a:tcPr marL="54864" marR="54864" marT="27432" marB="27432" anchor="ctr">
+                    <a:solidFill>
+                      <a:srgbClr val="0D1117"/>
+                    </a:solidFill>
+                  </a:tcPr>
+                </a:tc>
+                <a:tc>
+                  <a:txBody>
+                    <a:bodyPr/>
+                    <a:lstStyle/>
+                    <a:p>
+                      <a:pPr>
+                        <a:defRPr sz="750" b="1">
+                          <a:solidFill>
+                            <a:srgbClr val="FFFFFF"/>
+                          </a:solidFill>
+                          <a:latin typeface="Inter"/>
+                        </a:defRPr>
+                      </a:pPr>
+                      <a:r>
+                        <a:rPr>
+                          <a:latin typeface="Inter"/>
+                        </a:rPr>
                         <a:t>As of</a:t>
                       </a:r>
                     </a:p>
@@ -15786,6 +16236,33 @@
                         <a:rPr>
                           <a:latin typeface="Inter"/>
                         </a:rPr>
+                        <a:t>Data scope</a:t>
+                      </a:r>
+                    </a:p>
+                  </a:txBody>
+                  <a:tcPr marL="54864" marR="54864" marT="27432" marB="27432" anchor="ctr">
+                    <a:solidFill>
+                      <a:srgbClr val="0D1117"/>
+                    </a:solidFill>
+                  </a:tcPr>
+                </a:tc>
+                <a:tc>
+                  <a:txBody>
+                    <a:bodyPr/>
+                    <a:lstStyle/>
+                    <a:p>
+                      <a:pPr>
+                        <a:defRPr sz="750" b="1">
+                          <a:solidFill>
+                            <a:srgbClr val="FFFFFF"/>
+                          </a:solidFill>
+                          <a:latin typeface="Inter"/>
+                        </a:defRPr>
+                      </a:pPr>
+                      <a:r>
+                        <a:rPr>
+                          <a:latin typeface="Inter"/>
+                        </a:rPr>
                         <a:t>Validation</a:t>
                       </a:r>
                     </a:p>
@@ -15824,7 +16301,7 @@
                   </a:tcPr>
                 </a:tc>
               </a:tr>
-              <a:tr h="384810">
+              <a:tr h="368046">
                 <a:tc>
                   <a:txBody>
                     <a:bodyPr/>
@@ -15869,7 +16346,7 @@
                         <a:rPr>
                           <a:latin typeface="Inter"/>
                         </a:rPr>
-                        <a:t>Form ADV profile — Ridgeview (TEST)</a:t>
+                        <a:t>Form ADV profile — Ridgeview</a:t>
                       </a:r>
                     </a:p>
                   </a:txBody>
@@ -15896,6 +16373,33 @@
                         <a:rPr>
                           <a:latin typeface="Inter"/>
                         </a:rPr>
+                        <a:t>gradient_tool</a:t>
+                      </a:r>
+                    </a:p>
+                  </a:txBody>
+                  <a:tcPr marL="54864" marR="54864" marT="27432" marB="27432" anchor="ctr">
+                    <a:solidFill>
+                      <a:srgbClr val="FFFFFF"/>
+                    </a:solidFill>
+                  </a:tcPr>
+                </a:tc>
+                <a:tc>
+                  <a:txBody>
+                    <a:bodyPr/>
+                    <a:lstStyle/>
+                    <a:p>
+                      <a:pPr>
+                        <a:defRPr sz="650" b="0">
+                          <a:solidFill>
+                            <a:srgbClr val="0D1117"/>
+                          </a:solidFill>
+                          <a:latin typeface="Inter"/>
+                        </a:defRPr>
+                      </a:pPr>
+                      <a:r>
+                        <a:rPr>
+                          <a:latin typeface="Inter"/>
+                        </a:rPr>
                         <a:t>get_manager_odd_profile</a:t>
                       </a:r>
                     </a:p>
@@ -15923,6 +16427,33 @@
                         <a:rPr>
                           <a:latin typeface="Inter"/>
                         </a:rPr>
+                        <a:t>illustrative sample</a:t>
+                      </a:r>
+                    </a:p>
+                  </a:txBody>
+                  <a:tcPr marL="54864" marR="54864" marT="27432" marB="27432" anchor="ctr">
+                    <a:solidFill>
+                      <a:srgbClr val="FFFFFF"/>
+                    </a:solidFill>
+                  </a:tcPr>
+                </a:tc>
+                <a:tc>
+                  <a:txBody>
+                    <a:bodyPr/>
+                    <a:lstStyle/>
+                    <a:p>
+                      <a:pPr>
+                        <a:defRPr sz="650" b="0">
+                          <a:solidFill>
+                            <a:srgbClr val="0D1117"/>
+                          </a:solidFill>
+                          <a:latin typeface="Inter"/>
+                        </a:defRPr>
+                      </a:pPr>
+                      <a:r>
+                        <a:rPr>
+                          <a:latin typeface="Inter"/>
+                        </a:rPr>
                         <a:t>2026-10-01</a:t>
                       </a:r>
                     </a:p>
@@ -15939,18 +16470,101 @@
                     <a:lstStyle/>
                     <a:p>
                       <a:pPr>
+                        <a:defRPr sz="650" b="0">
+                          <a:solidFill>
+                            <a:srgbClr val="0D1117"/>
+                          </a:solidFill>
+                          <a:latin typeface="Inter"/>
+                        </a:defRPr>
+                      </a:pPr>
+                      <a:r>
+                        <a:rPr>
+                          <a:latin typeface="Inter"/>
+                        </a:rPr>
+                        <a:t>Gradient-governed review evidence</a:t>
+                      </a:r>
+                    </a:p>
+                  </a:txBody>
+                  <a:tcPr marL="54864" marR="54864" marT="27432" marB="27432" anchor="ctr">
+                    <a:solidFill>
+                      <a:srgbClr val="FFFFFF"/>
+                    </a:solidFill>
+                  </a:tcPr>
+                </a:tc>
+                <a:tc>
+                  <a:txBody>
+                    <a:bodyPr/>
+                    <a:lstStyle/>
+                    <a:p>
+                      <a:pPr>
+                        <a:defRPr sz="650" b="0">
+                          <a:solidFill>
+                            <a:srgbClr val="0D1117"/>
+                          </a:solidFill>
+                          <a:latin typeface="Inter"/>
+                        </a:defRPr>
+                      </a:pPr>
+                      <a:r>
+                        <a:rPr>
+                          <a:latin typeface="Inter"/>
+                        </a:rPr>
+                        <a:t>{'chip': 'not_run', 'status': 'not_run'}</a:t>
+                      </a:r>
+                    </a:p>
+                  </a:txBody>
+                  <a:tcPr marL="54864" marR="54864" marT="27432" marB="27432" anchor="ctr">
+                    <a:solidFill>
+                      <a:srgbClr val="FFFFFF"/>
+                    </a:solidFill>
+                  </a:tcPr>
+                </a:tc>
+                <a:tc>
+                  <a:txBody>
+                    <a:bodyPr/>
+                    <a:lstStyle/>
+                    <a:p>
+                      <a:pPr>
+                        <a:defRPr sz="650" b="0">
+                          <a:solidFill>
+                            <a:srgbClr val="0D1117"/>
+                          </a:solidFill>
+                          <a:latin typeface="Inter"/>
+                        </a:defRPr>
+                      </a:pPr>
+                      <a:r>
+                        <a:rPr>
+                          <a:latin typeface="Inter"/>
+                        </a:rPr>
+                        <a:t>sha256:9364230b9895a9186656f1afaa4fdd9ff25a070143a72a1b504df9822dbd0c2c</a:t>
+                      </a:r>
+                    </a:p>
+                  </a:txBody>
+                  <a:tcPr marL="54864" marR="54864" marT="27432" marB="27432" anchor="ctr">
+                    <a:solidFill>
+                      <a:srgbClr val="FFFFFF"/>
+                    </a:solidFill>
+                  </a:tcPr>
+                </a:tc>
+              </a:tr>
+              <a:tr h="368046">
+                <a:tc>
+                  <a:txBody>
+                    <a:bodyPr/>
+                    <a:lstStyle/>
+                    <a:p>
+                      <a:pPr>
                         <a:defRPr sz="650" b="1">
                           <a:solidFill>
-                            <a:srgbClr val="9AA5B1"/>
-                          </a:solidFill>
-                          <a:latin typeface="Inter"/>
-                        </a:defRPr>
-                      </a:pPr>
-                      <a:r>
-                        <a:rPr>
-                          <a:latin typeface="Inter"/>
-                        </a:rPr>
-                        <a:t>● not_run</a:t>
+                            <a:srgbClr val="0D1117"/>
+                          </a:solidFill>
+                          <a:latin typeface="Inter"/>
+                        </a:defRPr>
+                      </a:pPr>
+                      <a:r>
+                        <a:rPr>
+                          <a:latin typeface="Inter"/>
+                        </a:rPr>
+                        <a:t>S2</a:t>
                       </a:r>
                     </a:p>
                   </a:txBody>
@@ -15977,7 +16591,225 @@
                         <a:rPr>
                           <a:latin typeface="Inter"/>
                         </a:rPr>
-                        <a:t>a1b2c3d4</a:t>
+                        <a:t>Form ADV profile — Harbor</a:t>
+                      </a:r>
+                    </a:p>
+                  </a:txBody>
+                  <a:tcPr marL="54864" marR="54864" marT="27432" marB="27432" anchor="ctr">
+                    <a:solidFill>
+                      <a:srgbClr val="F5F7F9"/>
+                    </a:solidFill>
+                  </a:tcPr>
+                </a:tc>
+                <a:tc>
+                  <a:txBody>
+                    <a:bodyPr/>
+                    <a:lstStyle/>
+                    <a:p>
+                      <a:pPr>
+                        <a:defRPr sz="650" b="0">
+                          <a:solidFill>
+                            <a:srgbClr val="0D1117"/>
+                          </a:solidFill>
+                          <a:latin typeface="Inter"/>
+                        </a:defRPr>
+                      </a:pPr>
+                      <a:r>
+                        <a:rPr>
+                          <a:latin typeface="Inter"/>
+                        </a:rPr>
+                        <a:t>gradient_tool</a:t>
+                      </a:r>
+                    </a:p>
+                  </a:txBody>
+                  <a:tcPr marL="54864" marR="54864" marT="27432" marB="27432" anchor="ctr">
+                    <a:solidFill>
+                      <a:srgbClr val="F5F7F9"/>
+                    </a:solidFill>
+                  </a:tcPr>
+                </a:tc>
+                <a:tc>
+                  <a:txBody>
+                    <a:bodyPr/>
+                    <a:lstStyle/>
+                    <a:p>
+                      <a:pPr>
+                        <a:defRPr sz="650" b="0">
+                          <a:solidFill>
+                            <a:srgbClr val="0D1117"/>
+                          </a:solidFill>
+                          <a:latin typeface="Inter"/>
+                        </a:defRPr>
+                      </a:pPr>
+                      <a:r>
+                        <a:rPr>
+                          <a:latin typeface="Inter"/>
+                        </a:rPr>
+                        <a:t>get_manager_odd_profile</a:t>
+                      </a:r>
+                    </a:p>
+                  </a:txBody>
+                  <a:tcPr marL="54864" marR="54864" marT="27432" marB="27432" anchor="ctr">
+                    <a:solidFill>
+                      <a:srgbClr val="F5F7F9"/>
+                    </a:solidFill>
+                  </a:tcPr>
+                </a:tc>
+                <a:tc>
+                  <a:txBody>
+                    <a:bodyPr/>
+                    <a:lstStyle/>
+                    <a:p>
+                      <a:pPr>
+                        <a:defRPr sz="650" b="0">
+                          <a:solidFill>
+                            <a:srgbClr val="0D1117"/>
+                          </a:solidFill>
+                          <a:latin typeface="Inter"/>
+                        </a:defRPr>
+                      </a:pPr>
+                      <a:r>
+                        <a:rPr>
+                          <a:latin typeface="Inter"/>
+                        </a:rPr>
+                        <a:t>illustrative sample</a:t>
+                      </a:r>
+                    </a:p>
+                  </a:txBody>
+                  <a:tcPr marL="54864" marR="54864" marT="27432" marB="27432" anchor="ctr">
+                    <a:solidFill>
+                      <a:srgbClr val="F5F7F9"/>
+                    </a:solidFill>
+                  </a:tcPr>
+                </a:tc>
+                <a:tc>
+                  <a:txBody>
+                    <a:bodyPr/>
+                    <a:lstStyle/>
+                    <a:p>
+                      <a:pPr>
+                        <a:defRPr sz="650" b="0">
+                          <a:solidFill>
+                            <a:srgbClr val="0D1117"/>
+                          </a:solidFill>
+                          <a:latin typeface="Inter"/>
+                        </a:defRPr>
+                      </a:pPr>
+                      <a:r>
+                        <a:rPr>
+                          <a:latin typeface="Inter"/>
+                        </a:rPr>
+                        <a:t>2026-10-01</a:t>
+                      </a:r>
+                    </a:p>
+                  </a:txBody>
+                  <a:tcPr marL="54864" marR="54864" marT="27432" marB="27432" anchor="ctr">
+                    <a:solidFill>
+                      <a:srgbClr val="F5F7F9"/>
+                    </a:solidFill>
+                  </a:tcPr>
+                </a:tc>
+                <a:tc>
+                  <a:txBody>
+                    <a:bodyPr/>
+                    <a:lstStyle/>
+                    <a:p>
+                      <a:pPr>
+                        <a:defRPr sz="650" b="0">
+                          <a:solidFill>
+                            <a:srgbClr val="0D1117"/>
+                          </a:solidFill>
+                          <a:latin typeface="Inter"/>
+                        </a:defRPr>
+                      </a:pPr>
+                      <a:r>
+                        <a:rPr>
+                          <a:latin typeface="Inter"/>
+                        </a:rPr>
+                        <a:t>Gradient-governed review evidence</a:t>
+                      </a:r>
+                    </a:p>
+                  </a:txBody>
+                  <a:tcPr marL="54864" marR="54864" marT="27432" marB="27432" anchor="ctr">
+                    <a:solidFill>
+                      <a:srgbClr val="F5F7F9"/>
+                    </a:solidFill>
+                  </a:tcPr>
+                </a:tc>
+                <a:tc>
+                  <a:txBody>
+                    <a:bodyPr/>
+                    <a:lstStyle/>
+                    <a:p>
+                      <a:pPr>
+                        <a:defRPr sz="650" b="0">
+                          <a:solidFill>
+                            <a:srgbClr val="0D1117"/>
+                          </a:solidFill>
+                          <a:latin typeface="Inter"/>
+                        </a:defRPr>
+                      </a:pPr>
+                      <a:r>
+                        <a:rPr>
+                          <a:latin typeface="Inter"/>
+                        </a:rPr>
+                        <a:t>{'chip': 'advisory', 'status': 'advisory'}</a:t>
+                      </a:r>
+                    </a:p>
+                  </a:txBody>
+                  <a:tcPr marL="54864" marR="54864" marT="27432" marB="27432" anchor="ctr">
+                    <a:solidFill>
+                      <a:srgbClr val="F5F7F9"/>
+                    </a:solidFill>
+                  </a:tcPr>
+                </a:tc>
+                <a:tc>
+                  <a:txBody>
+                    <a:bodyPr/>
+                    <a:lstStyle/>
+                    <a:p>
+                      <a:pPr>
+                        <a:defRPr sz="650" b="0">
+                          <a:solidFill>
+                            <a:srgbClr val="0D1117"/>
+                          </a:solidFill>
+                          <a:latin typeface="Inter"/>
+                        </a:defRPr>
+                      </a:pPr>
+                      <a:r>
+                        <a:rPr>
+                          <a:latin typeface="Inter"/>
+                        </a:rPr>
+                        <a:t>sha256:0ba26a4bbb2e102faee753294979c1138f605a155f985ac94efe3e887fdc52f7</a:t>
+                      </a:r>
+                    </a:p>
+                  </a:txBody>
+                  <a:tcPr marL="54864" marR="54864" marT="27432" marB="27432" anchor="ctr">
+                    <a:solidFill>
+                      <a:srgbClr val="F5F7F9"/>
+                    </a:solidFill>
+                  </a:tcPr>
+                </a:tc>
+              </a:tr>
+              <a:tr h="368046">
+                <a:tc>
+                  <a:txBody>
+                    <a:bodyPr/>
+                    <a:lstStyle/>
+                    <a:p>
+                      <a:pPr>
+                        <a:defRPr sz="650" b="1">
+                          <a:solidFill>
+                            <a:srgbClr val="0D1117"/>
+                          </a:solidFill>
+                          <a:latin typeface="Inter"/>
+                        </a:defRPr>
+                      </a:pPr>
+                      <a:r>
+                        <a:rPr>
+                          <a:latin typeface="Inter"/>
+                        </a:rPr>
+                        <a:t>S3</a:t>
                       </a:r>
                     </a:p>
                   </a:txBody>
@@ -15987,8 +16819,224 @@
                     </a:solidFill>
                   </a:tcPr>
                 </a:tc>
+                <a:tc>
+                  <a:txBody>
+                    <a:bodyPr/>
+                    <a:lstStyle/>
+                    <a:p>
+                      <a:pPr>
+                        <a:defRPr sz="650" b="0">
+                          <a:solidFill>
+                            <a:srgbClr val="0D1117"/>
+                          </a:solidFill>
+                          <a:latin typeface="Inter"/>
+                        </a:defRPr>
+                      </a:pPr>
+                      <a:r>
+                        <a:rPr>
+                          <a:latin typeface="Inter"/>
+                        </a:rPr>
+                        <a:t>Form ADV profile — Northfield</a:t>
+                      </a:r>
+                    </a:p>
+                  </a:txBody>
+                  <a:tcPr marL="54864" marR="54864" marT="27432" marB="27432" anchor="ctr">
+                    <a:solidFill>
+                      <a:srgbClr val="FFFFFF"/>
+                    </a:solidFill>
+                  </a:tcPr>
+                </a:tc>
+                <a:tc>
+                  <a:txBody>
+                    <a:bodyPr/>
+                    <a:lstStyle/>
+                    <a:p>
+                      <a:pPr>
+                        <a:defRPr sz="650" b="0">
+                          <a:solidFill>
+                            <a:srgbClr val="0D1117"/>
+                          </a:solidFill>
+                          <a:latin typeface="Inter"/>
+                        </a:defRPr>
+                      </a:pPr>
+                      <a:r>
+                        <a:rPr>
+                          <a:latin typeface="Inter"/>
+                        </a:rPr>
+                        <a:t>gradient_tool</a:t>
+                      </a:r>
+                    </a:p>
+                  </a:txBody>
+                  <a:tcPr marL="54864" marR="54864" marT="27432" marB="27432" anchor="ctr">
+                    <a:solidFill>
+                      <a:srgbClr val="FFFFFF"/>
+                    </a:solidFill>
+                  </a:tcPr>
+                </a:tc>
+                <a:tc>
+                  <a:txBody>
+                    <a:bodyPr/>
+                    <a:lstStyle/>
+                    <a:p>
+                      <a:pPr>
+                        <a:defRPr sz="650" b="0">
+                          <a:solidFill>
+                            <a:srgbClr val="0D1117"/>
+                          </a:solidFill>
+                          <a:latin typeface="Inter"/>
+                        </a:defRPr>
+                      </a:pPr>
+                      <a:r>
+                        <a:rPr>
+                          <a:latin typeface="Inter"/>
+                        </a:rPr>
+                        <a:t>get_manager_odd_profile</a:t>
+                      </a:r>
+                    </a:p>
+                  </a:txBody>
+                  <a:tcPr marL="54864" marR="54864" marT="27432" marB="27432" anchor="ctr">
+                    <a:solidFill>
+                      <a:srgbClr val="FFFFFF"/>
+                    </a:solidFill>
+                  </a:tcPr>
+                </a:tc>
+                <a:tc>
+                  <a:txBody>
+                    <a:bodyPr/>
+                    <a:lstStyle/>
+                    <a:p>
+                      <a:pPr>
+                        <a:defRPr sz="650" b="0">
+                          <a:solidFill>
+                            <a:srgbClr val="0D1117"/>
+                          </a:solidFill>
+                          <a:latin typeface="Inter"/>
+                        </a:defRPr>
+                      </a:pPr>
+                      <a:r>
+                        <a:rPr>
+                          <a:latin typeface="Inter"/>
+                        </a:rPr>
+                        <a:t>illustrative sample</a:t>
+                      </a:r>
+                    </a:p>
+                  </a:txBody>
+                  <a:tcPr marL="54864" marR="54864" marT="27432" marB="27432" anchor="ctr">
+                    <a:solidFill>
+                      <a:srgbClr val="FFFFFF"/>
+                    </a:solidFill>
+                  </a:tcPr>
+                </a:tc>
+                <a:tc>
+                  <a:txBody>
+                    <a:bodyPr/>
+                    <a:lstStyle/>
+                    <a:p>
+                      <a:pPr>
+                        <a:defRPr sz="650" b="0">
+                          <a:solidFill>
+                            <a:srgbClr val="0D1117"/>
+                          </a:solidFill>
+                          <a:latin typeface="Inter"/>
+                        </a:defRPr>
+                      </a:pPr>
+                      <a:r>
+                        <a:rPr>
+                          <a:latin typeface="Inter"/>
+                        </a:rPr>
+                        <a:t>2026-10-01</a:t>
+                      </a:r>
+                    </a:p>
+                  </a:txBody>
+                  <a:tcPr marL="54864" marR="54864" marT="27432" marB="27432" anchor="ctr">
+                    <a:solidFill>
+                      <a:srgbClr val="FFFFFF"/>
+                    </a:solidFill>
+                  </a:tcPr>
+                </a:tc>
+                <a:tc>
+                  <a:txBody>
+                    <a:bodyPr/>
+                    <a:lstStyle/>
+                    <a:p>
+                      <a:pPr>
+                        <a:defRPr sz="650" b="0">
+                          <a:solidFill>
+                            <a:srgbClr val="0D1117"/>
+                          </a:solidFill>
+                          <a:latin typeface="Inter"/>
+                        </a:defRPr>
+                      </a:pPr>
+                      <a:r>
+                        <a:rPr>
+                          <a:latin typeface="Inter"/>
+                        </a:rPr>
+                        <a:t>Gradient-governed review evidence</a:t>
+                      </a:r>
+                    </a:p>
+                  </a:txBody>
+                  <a:tcPr marL="54864" marR="54864" marT="27432" marB="27432" anchor="ctr">
+                    <a:solidFill>
+                      <a:srgbClr val="FFFFFF"/>
+                    </a:solidFill>
+                  </a:tcPr>
+                </a:tc>
+                <a:tc>
+                  <a:txBody>
+                    <a:bodyPr/>
+                    <a:lstStyle/>
+                    <a:p>
+                      <a:pPr>
+                        <a:defRPr sz="650" b="0">
+                          <a:solidFill>
+                            <a:srgbClr val="0D1117"/>
+                          </a:solidFill>
+                          <a:latin typeface="Inter"/>
+                        </a:defRPr>
+                      </a:pPr>
+                      <a:r>
+                        <a:rPr>
+                          <a:latin typeface="Inter"/>
+                        </a:rPr>
+                        <a:t>{'chip': 'not_run', 'status': 'not_run'}</a:t>
+                      </a:r>
+                    </a:p>
+                  </a:txBody>
+                  <a:tcPr marL="54864" marR="54864" marT="27432" marB="27432" anchor="ctr">
+                    <a:solidFill>
+                      <a:srgbClr val="FFFFFF"/>
+                    </a:solidFill>
+                  </a:tcPr>
+                </a:tc>
+                <a:tc>
+                  <a:txBody>
+                    <a:bodyPr/>
+                    <a:lstStyle/>
+                    <a:p>
+                      <a:pPr>
+                        <a:defRPr sz="650" b="0">
+                          <a:solidFill>
+                            <a:srgbClr val="0D1117"/>
+                          </a:solidFill>
+                          <a:latin typeface="Inter"/>
+                        </a:defRPr>
+                      </a:pPr>
+                      <a:r>
+                        <a:rPr>
+                          <a:latin typeface="Inter"/>
+                        </a:rPr>
+                        <a:t>sha256:079104f42a886920dde0e602181eea3c7622408e953d392d251e822c3d4c40fc</a:t>
+                      </a:r>
+                    </a:p>
+                  </a:txBody>
+                  <a:tcPr marL="54864" marR="54864" marT="27432" marB="27432" anchor="ctr">
+                    <a:solidFill>
+                      <a:srgbClr val="FFFFFF"/>
+                    </a:solidFill>
+                  </a:tcPr>
+                </a:tc>
               </a:tr>
-              <a:tr h="384810">
+              <a:tr h="368046">
                 <a:tc>
                   <a:txBody>
                     <a:bodyPr/>
@@ -16006,7 +17054,7 @@
                         <a:rPr>
                           <a:latin typeface="Inter"/>
                         </a:rPr>
-                        <a:t>S2</a:t>
+                        <a:t>S4</a:t>
                       </a:r>
                     </a:p>
                   </a:txBody>
@@ -16033,7 +17081,7 @@
                         <a:rPr>
                           <a:latin typeface="Inter"/>
                         </a:rPr>
-                        <a:t>Form ADV profile — Harbor (TEST)</a:t>
+                        <a:t>13F snapshot — Ridgeview</a:t>
                       </a:r>
                     </a:p>
                   </a:txBody>
@@ -16060,12 +17108,938 @@
                         <a:rPr>
                           <a:latin typeface="Inter"/>
                         </a:rPr>
+                        <a:t>gradient_tool</a:t>
+                      </a:r>
+                    </a:p>
+                  </a:txBody>
+                  <a:tcPr marL="54864" marR="54864" marT="27432" marB="27432" anchor="ctr">
+                    <a:solidFill>
+                      <a:srgbClr val="F5F7F9"/>
+                    </a:solidFill>
+                  </a:tcPr>
+                </a:tc>
+                <a:tc>
+                  <a:txBody>
+                    <a:bodyPr/>
+                    <a:lstStyle/>
+                    <a:p>
+                      <a:pPr>
+                        <a:defRPr sz="650" b="0">
+                          <a:solidFill>
+                            <a:srgbClr val="0D1117"/>
+                          </a:solidFill>
+                          <a:latin typeface="Inter"/>
+                        </a:defRPr>
+                      </a:pPr>
+                      <a:r>
+                        <a:rPr>
+                          <a:latin typeface="Inter"/>
+                        </a:rPr>
+                        <a:t>get_firm_13f_portfolio_review</a:t>
+                      </a:r>
+                    </a:p>
+                  </a:txBody>
+                  <a:tcPr marL="54864" marR="54864" marT="27432" marB="27432" anchor="ctr">
+                    <a:solidFill>
+                      <a:srgbClr val="F5F7F9"/>
+                    </a:solidFill>
+                  </a:tcPr>
+                </a:tc>
+                <a:tc>
+                  <a:txBody>
+                    <a:bodyPr/>
+                    <a:lstStyle/>
+                    <a:p>
+                      <a:pPr>
+                        <a:defRPr sz="650" b="0">
+                          <a:solidFill>
+                            <a:srgbClr val="0D1117"/>
+                          </a:solidFill>
+                          <a:latin typeface="Inter"/>
+                        </a:defRPr>
+                      </a:pPr>
+                      <a:r>
+                        <a:rPr>
+                          <a:latin typeface="Inter"/>
+                        </a:rPr>
+                        <a:t>illustrative sample</a:t>
+                      </a:r>
+                    </a:p>
+                  </a:txBody>
+                  <a:tcPr marL="54864" marR="54864" marT="27432" marB="27432" anchor="ctr">
+                    <a:solidFill>
+                      <a:srgbClr val="F5F7F9"/>
+                    </a:solidFill>
+                  </a:tcPr>
+                </a:tc>
+                <a:tc>
+                  <a:txBody>
+                    <a:bodyPr/>
+                    <a:lstStyle/>
+                    <a:p>
+                      <a:pPr>
+                        <a:defRPr sz="650" b="0">
+                          <a:solidFill>
+                            <a:srgbClr val="0D1117"/>
+                          </a:solidFill>
+                          <a:latin typeface="Inter"/>
+                        </a:defRPr>
+                      </a:pPr>
+                      <a:r>
+                        <a:rPr>
+                          <a:latin typeface="Inter"/>
+                        </a:rPr>
+                        <a:t>2026-08-14</a:t>
+                      </a:r>
+                    </a:p>
+                  </a:txBody>
+                  <a:tcPr marL="54864" marR="54864" marT="27432" marB="27432" anchor="ctr">
+                    <a:solidFill>
+                      <a:srgbClr val="F5F7F9"/>
+                    </a:solidFill>
+                  </a:tcPr>
+                </a:tc>
+                <a:tc>
+                  <a:txBody>
+                    <a:bodyPr/>
+                    <a:lstStyle/>
+                    <a:p>
+                      <a:pPr>
+                        <a:defRPr sz="650" b="0">
+                          <a:solidFill>
+                            <a:srgbClr val="0D1117"/>
+                          </a:solidFill>
+                          <a:latin typeface="Inter"/>
+                        </a:defRPr>
+                      </a:pPr>
+                      <a:r>
+                        <a:rPr>
+                          <a:latin typeface="Inter"/>
+                        </a:rPr>
+                        <a:t>Gradient-governed review evidence</a:t>
+                      </a:r>
+                    </a:p>
+                  </a:txBody>
+                  <a:tcPr marL="54864" marR="54864" marT="27432" marB="27432" anchor="ctr">
+                    <a:solidFill>
+                      <a:srgbClr val="F5F7F9"/>
+                    </a:solidFill>
+                  </a:tcPr>
+                </a:tc>
+                <a:tc>
+                  <a:txBody>
+                    <a:bodyPr/>
+                    <a:lstStyle/>
+                    <a:p>
+                      <a:pPr>
+                        <a:defRPr sz="650" b="0">
+                          <a:solidFill>
+                            <a:srgbClr val="0D1117"/>
+                          </a:solidFill>
+                          <a:latin typeface="Inter"/>
+                        </a:defRPr>
+                      </a:pPr>
+                      <a:r>
+                        <a:rPr>
+                          <a:latin typeface="Inter"/>
+                        </a:rPr>
+                        <a:t>{'chip': 'passed', 'status': 'passed'}</a:t>
+                      </a:r>
+                    </a:p>
+                  </a:txBody>
+                  <a:tcPr marL="54864" marR="54864" marT="27432" marB="27432" anchor="ctr">
+                    <a:solidFill>
+                      <a:srgbClr val="F5F7F9"/>
+                    </a:solidFill>
+                  </a:tcPr>
+                </a:tc>
+                <a:tc>
+                  <a:txBody>
+                    <a:bodyPr/>
+                    <a:lstStyle/>
+                    <a:p>
+                      <a:pPr>
+                        <a:defRPr sz="650" b="0">
+                          <a:solidFill>
+                            <a:srgbClr val="0D1117"/>
+                          </a:solidFill>
+                          <a:latin typeface="Inter"/>
+                        </a:defRPr>
+                      </a:pPr>
+                      <a:r>
+                        <a:rPr>
+                          <a:latin typeface="Inter"/>
+                        </a:rPr>
+                        <a:t>sha256:02bde3555a826680ac703dc2f2b89fbb093036a42c537ffa067590dde6b99d98</a:t>
+                      </a:r>
+                    </a:p>
+                  </a:txBody>
+                  <a:tcPr marL="54864" marR="54864" marT="27432" marB="27432" anchor="ctr">
+                    <a:solidFill>
+                      <a:srgbClr val="F5F7F9"/>
+                    </a:solidFill>
+                  </a:tcPr>
+                </a:tc>
+              </a:tr>
+              <a:tr h="368046">
+                <a:tc>
+                  <a:txBody>
+                    <a:bodyPr/>
+                    <a:lstStyle/>
+                    <a:p>
+                      <a:pPr>
+                        <a:defRPr sz="650" b="1">
+                          <a:solidFill>
+                            <a:srgbClr val="0D1117"/>
+                          </a:solidFill>
+                          <a:latin typeface="Inter"/>
+                        </a:defRPr>
+                      </a:pPr>
+                      <a:r>
+                        <a:rPr>
+                          <a:latin typeface="Inter"/>
+                        </a:rPr>
+                        <a:t>S5</a:t>
+                      </a:r>
+                    </a:p>
+                  </a:txBody>
+                  <a:tcPr marL="54864" marR="54864" marT="27432" marB="27432" anchor="ctr">
+                    <a:solidFill>
+                      <a:srgbClr val="FFFFFF"/>
+                    </a:solidFill>
+                  </a:tcPr>
+                </a:tc>
+                <a:tc>
+                  <a:txBody>
+                    <a:bodyPr/>
+                    <a:lstStyle/>
+                    <a:p>
+                      <a:pPr>
+                        <a:defRPr sz="650" b="0">
+                          <a:solidFill>
+                            <a:srgbClr val="0D1117"/>
+                          </a:solidFill>
+                          <a:latin typeface="Inter"/>
+                        </a:defRPr>
+                      </a:pPr>
+                      <a:r>
+                        <a:rPr>
+                          <a:latin typeface="Inter"/>
+                        </a:rPr>
+                        <a:t>13F snapshot — Harbor</a:t>
+                      </a:r>
+                    </a:p>
+                  </a:txBody>
+                  <a:tcPr marL="54864" marR="54864" marT="27432" marB="27432" anchor="ctr">
+                    <a:solidFill>
+                      <a:srgbClr val="FFFFFF"/>
+                    </a:solidFill>
+                  </a:tcPr>
+                </a:tc>
+                <a:tc>
+                  <a:txBody>
+                    <a:bodyPr/>
+                    <a:lstStyle/>
+                    <a:p>
+                      <a:pPr>
+                        <a:defRPr sz="650" b="0">
+                          <a:solidFill>
+                            <a:srgbClr val="0D1117"/>
+                          </a:solidFill>
+                          <a:latin typeface="Inter"/>
+                        </a:defRPr>
+                      </a:pPr>
+                      <a:r>
+                        <a:rPr>
+                          <a:latin typeface="Inter"/>
+                        </a:rPr>
+                        <a:t>gradient_tool</a:t>
+                      </a:r>
+                    </a:p>
+                  </a:txBody>
+                  <a:tcPr marL="54864" marR="54864" marT="27432" marB="27432" anchor="ctr">
+                    <a:solidFill>
+                      <a:srgbClr val="FFFFFF"/>
+                    </a:solidFill>
+                  </a:tcPr>
+                </a:tc>
+                <a:tc>
+                  <a:txBody>
+                    <a:bodyPr/>
+                    <a:lstStyle/>
+                    <a:p>
+                      <a:pPr>
+                        <a:defRPr sz="650" b="0">
+                          <a:solidFill>
+                            <a:srgbClr val="0D1117"/>
+                          </a:solidFill>
+                          <a:latin typeface="Inter"/>
+                        </a:defRPr>
+                      </a:pPr>
+                      <a:r>
+                        <a:rPr>
+                          <a:latin typeface="Inter"/>
+                        </a:rPr>
+                        <a:t>get_firm_13f_portfolio_review</a:t>
+                      </a:r>
+                    </a:p>
+                  </a:txBody>
+                  <a:tcPr marL="54864" marR="54864" marT="27432" marB="27432" anchor="ctr">
+                    <a:solidFill>
+                      <a:srgbClr val="FFFFFF"/>
+                    </a:solidFill>
+                  </a:tcPr>
+                </a:tc>
+                <a:tc>
+                  <a:txBody>
+                    <a:bodyPr/>
+                    <a:lstStyle/>
+                    <a:p>
+                      <a:pPr>
+                        <a:defRPr sz="650" b="0">
+                          <a:solidFill>
+                            <a:srgbClr val="0D1117"/>
+                          </a:solidFill>
+                          <a:latin typeface="Inter"/>
+                        </a:defRPr>
+                      </a:pPr>
+                      <a:r>
+                        <a:rPr>
+                          <a:latin typeface="Inter"/>
+                        </a:rPr>
+                        <a:t>illustrative sample</a:t>
+                      </a:r>
+                    </a:p>
+                  </a:txBody>
+                  <a:tcPr marL="54864" marR="54864" marT="27432" marB="27432" anchor="ctr">
+                    <a:solidFill>
+                      <a:srgbClr val="FFFFFF"/>
+                    </a:solidFill>
+                  </a:tcPr>
+                </a:tc>
+                <a:tc>
+                  <a:txBody>
+                    <a:bodyPr/>
+                    <a:lstStyle/>
+                    <a:p>
+                      <a:pPr>
+                        <a:defRPr sz="650" b="0">
+                          <a:solidFill>
+                            <a:srgbClr val="0D1117"/>
+                          </a:solidFill>
+                          <a:latin typeface="Inter"/>
+                        </a:defRPr>
+                      </a:pPr>
+                      <a:r>
+                        <a:rPr>
+                          <a:latin typeface="Inter"/>
+                        </a:rPr>
+                        <a:t>2026-08-13</a:t>
+                      </a:r>
+                    </a:p>
+                  </a:txBody>
+                  <a:tcPr marL="54864" marR="54864" marT="27432" marB="27432" anchor="ctr">
+                    <a:solidFill>
+                      <a:srgbClr val="FFFFFF"/>
+                    </a:solidFill>
+                  </a:tcPr>
+                </a:tc>
+                <a:tc>
+                  <a:txBody>
+                    <a:bodyPr/>
+                    <a:lstStyle/>
+                    <a:p>
+                      <a:pPr>
+                        <a:defRPr sz="650" b="0">
+                          <a:solidFill>
+                            <a:srgbClr val="0D1117"/>
+                          </a:solidFill>
+                          <a:latin typeface="Inter"/>
+                        </a:defRPr>
+                      </a:pPr>
+                      <a:r>
+                        <a:rPr>
+                          <a:latin typeface="Inter"/>
+                        </a:rPr>
+                        <a:t>Gradient-governed review evidence</a:t>
+                      </a:r>
+                    </a:p>
+                  </a:txBody>
+                  <a:tcPr marL="54864" marR="54864" marT="27432" marB="27432" anchor="ctr">
+                    <a:solidFill>
+                      <a:srgbClr val="FFFFFF"/>
+                    </a:solidFill>
+                  </a:tcPr>
+                </a:tc>
+                <a:tc>
+                  <a:txBody>
+                    <a:bodyPr/>
+                    <a:lstStyle/>
+                    <a:p>
+                      <a:pPr>
+                        <a:defRPr sz="650" b="0">
+                          <a:solidFill>
+                            <a:srgbClr val="0D1117"/>
+                          </a:solidFill>
+                          <a:latin typeface="Inter"/>
+                        </a:defRPr>
+                      </a:pPr>
+                      <a:r>
+                        <a:rPr>
+                          <a:latin typeface="Inter"/>
+                        </a:rPr>
+                        <a:t>{'chip': 'passed', 'status': 'passed'}</a:t>
+                      </a:r>
+                    </a:p>
+                  </a:txBody>
+                  <a:tcPr marL="54864" marR="54864" marT="27432" marB="27432" anchor="ctr">
+                    <a:solidFill>
+                      <a:srgbClr val="FFFFFF"/>
+                    </a:solidFill>
+                  </a:tcPr>
+                </a:tc>
+                <a:tc>
+                  <a:txBody>
+                    <a:bodyPr/>
+                    <a:lstStyle/>
+                    <a:p>
+                      <a:pPr>
+                        <a:defRPr sz="650" b="0">
+                          <a:solidFill>
+                            <a:srgbClr val="0D1117"/>
+                          </a:solidFill>
+                          <a:latin typeface="Inter"/>
+                        </a:defRPr>
+                      </a:pPr>
+                      <a:r>
+                        <a:rPr>
+                          <a:latin typeface="Inter"/>
+                        </a:rPr>
+                        <a:t>sha256:ac6a4099593588f1ff12b41d56187683d45a4860c1d6b076ea601db88f9a9544</a:t>
+                      </a:r>
+                    </a:p>
+                  </a:txBody>
+                  <a:tcPr marL="54864" marR="54864" marT="27432" marB="27432" anchor="ctr">
+                    <a:solidFill>
+                      <a:srgbClr val="FFFFFF"/>
+                    </a:solidFill>
+                  </a:tcPr>
+                </a:tc>
+              </a:tr>
+              <a:tr h="368046">
+                <a:tc>
+                  <a:txBody>
+                    <a:bodyPr/>
+                    <a:lstStyle/>
+                    <a:p>
+                      <a:pPr>
+                        <a:defRPr sz="650" b="1">
+                          <a:solidFill>
+                            <a:srgbClr val="0D1117"/>
+                          </a:solidFill>
+                          <a:latin typeface="Inter"/>
+                        </a:defRPr>
+                      </a:pPr>
+                      <a:r>
+                        <a:rPr>
+                          <a:latin typeface="Inter"/>
+                        </a:rPr>
+                        <a:t>S6</a:t>
+                      </a:r>
+                    </a:p>
+                  </a:txBody>
+                  <a:tcPr marL="54864" marR="54864" marT="27432" marB="27432" anchor="ctr">
+                    <a:solidFill>
+                      <a:srgbClr val="F5F7F9"/>
+                    </a:solidFill>
+                  </a:tcPr>
+                </a:tc>
+                <a:tc>
+                  <a:txBody>
+                    <a:bodyPr/>
+                    <a:lstStyle/>
+                    <a:p>
+                      <a:pPr>
+                        <a:defRPr sz="650" b="0">
+                          <a:solidFill>
+                            <a:srgbClr val="0D1117"/>
+                          </a:solidFill>
+                          <a:latin typeface="Inter"/>
+                        </a:defRPr>
+                      </a:pPr>
+                      <a:r>
+                        <a:rPr>
+                          <a:latin typeface="Inter"/>
+                        </a:rPr>
+                        <a:t>13F overlap</a:t>
+                      </a:r>
+                    </a:p>
+                  </a:txBody>
+                  <a:tcPr marL="54864" marR="54864" marT="27432" marB="27432" anchor="ctr">
+                    <a:solidFill>
+                      <a:srgbClr val="F5F7F9"/>
+                    </a:solidFill>
+                  </a:tcPr>
+                </a:tc>
+                <a:tc>
+                  <a:txBody>
+                    <a:bodyPr/>
+                    <a:lstStyle/>
+                    <a:p>
+                      <a:pPr>
+                        <a:defRPr sz="650" b="0">
+                          <a:solidFill>
+                            <a:srgbClr val="0D1117"/>
+                          </a:solidFill>
+                          <a:latin typeface="Inter"/>
+                        </a:defRPr>
+                      </a:pPr>
+                      <a:r>
+                        <a:rPr>
+                          <a:latin typeface="Inter"/>
+                        </a:rPr>
+                        <a:t>gradient_tool</a:t>
+                      </a:r>
+                    </a:p>
+                  </a:txBody>
+                  <a:tcPr marL="54864" marR="54864" marT="27432" marB="27432" anchor="ctr">
+                    <a:solidFill>
+                      <a:srgbClr val="F5F7F9"/>
+                    </a:solidFill>
+                  </a:tcPr>
+                </a:tc>
+                <a:tc>
+                  <a:txBody>
+                    <a:bodyPr/>
+                    <a:lstStyle/>
+                    <a:p>
+                      <a:pPr>
+                        <a:defRPr sz="650" b="0">
+                          <a:solidFill>
+                            <a:srgbClr val="0D1117"/>
+                          </a:solidFill>
+                          <a:latin typeface="Inter"/>
+                        </a:defRPr>
+                      </a:pPr>
+                      <a:r>
+                        <a:rPr>
+                          <a:latin typeface="Inter"/>
+                        </a:rPr>
+                        <a:t>get_multi_manager_13f_overlap</a:t>
+                      </a:r>
+                    </a:p>
+                  </a:txBody>
+                  <a:tcPr marL="54864" marR="54864" marT="27432" marB="27432" anchor="ctr">
+                    <a:solidFill>
+                      <a:srgbClr val="F5F7F9"/>
+                    </a:solidFill>
+                  </a:tcPr>
+                </a:tc>
+                <a:tc>
+                  <a:txBody>
+                    <a:bodyPr/>
+                    <a:lstStyle/>
+                    <a:p>
+                      <a:pPr>
+                        <a:defRPr sz="650" b="0">
+                          <a:solidFill>
+                            <a:srgbClr val="0D1117"/>
+                          </a:solidFill>
+                          <a:latin typeface="Inter"/>
+                        </a:defRPr>
+                      </a:pPr>
+                      <a:r>
+                        <a:rPr>
+                          <a:latin typeface="Inter"/>
+                        </a:rPr>
+                        <a:t>illustrative sample</a:t>
+                      </a:r>
+                    </a:p>
+                  </a:txBody>
+                  <a:tcPr marL="54864" marR="54864" marT="27432" marB="27432" anchor="ctr">
+                    <a:solidFill>
+                      <a:srgbClr val="F5F7F9"/>
+                    </a:solidFill>
+                  </a:tcPr>
+                </a:tc>
+                <a:tc>
+                  <a:txBody>
+                    <a:bodyPr/>
+                    <a:lstStyle/>
+                    <a:p>
+                      <a:pPr>
+                        <a:defRPr sz="650" b="0">
+                          <a:solidFill>
+                            <a:srgbClr val="0D1117"/>
+                          </a:solidFill>
+                          <a:latin typeface="Inter"/>
+                        </a:defRPr>
+                      </a:pPr>
+                      <a:r>
+                        <a:rPr>
+                          <a:latin typeface="Inter"/>
+                        </a:rPr>
+                        <a:t>2026-08-14</a:t>
+                      </a:r>
+                    </a:p>
+                  </a:txBody>
+                  <a:tcPr marL="54864" marR="54864" marT="27432" marB="27432" anchor="ctr">
+                    <a:solidFill>
+                      <a:srgbClr val="F5F7F9"/>
+                    </a:solidFill>
+                  </a:tcPr>
+                </a:tc>
+                <a:tc>
+                  <a:txBody>
+                    <a:bodyPr/>
+                    <a:lstStyle/>
+                    <a:p>
+                      <a:pPr>
+                        <a:defRPr sz="650" b="0">
+                          <a:solidFill>
+                            <a:srgbClr val="0D1117"/>
+                          </a:solidFill>
+                          <a:latin typeface="Inter"/>
+                        </a:defRPr>
+                      </a:pPr>
+                      <a:r>
+                        <a:rPr>
+                          <a:latin typeface="Inter"/>
+                        </a:rPr>
+                        <a:t>Gradient-governed review evidence</a:t>
+                      </a:r>
+                    </a:p>
+                  </a:txBody>
+                  <a:tcPr marL="54864" marR="54864" marT="27432" marB="27432" anchor="ctr">
+                    <a:solidFill>
+                      <a:srgbClr val="F5F7F9"/>
+                    </a:solidFill>
+                  </a:tcPr>
+                </a:tc>
+                <a:tc>
+                  <a:txBody>
+                    <a:bodyPr/>
+                    <a:lstStyle/>
+                    <a:p>
+                      <a:pPr>
+                        <a:defRPr sz="650" b="0">
+                          <a:solidFill>
+                            <a:srgbClr val="0D1117"/>
+                          </a:solidFill>
+                          <a:latin typeface="Inter"/>
+                        </a:defRPr>
+                      </a:pPr>
+                      <a:r>
+                        <a:rPr>
+                          <a:latin typeface="Inter"/>
+                        </a:rPr>
+                        <a:t>{'chip': 'passed', 'status': 'passed'}</a:t>
+                      </a:r>
+                    </a:p>
+                  </a:txBody>
+                  <a:tcPr marL="54864" marR="54864" marT="27432" marB="27432" anchor="ctr">
+                    <a:solidFill>
+                      <a:srgbClr val="F5F7F9"/>
+                    </a:solidFill>
+                  </a:tcPr>
+                </a:tc>
+                <a:tc>
+                  <a:txBody>
+                    <a:bodyPr/>
+                    <a:lstStyle/>
+                    <a:p>
+                      <a:pPr>
+                        <a:defRPr sz="650" b="0">
+                          <a:solidFill>
+                            <a:srgbClr val="0D1117"/>
+                          </a:solidFill>
+                          <a:latin typeface="Inter"/>
+                        </a:defRPr>
+                      </a:pPr>
+                      <a:r>
+                        <a:rPr>
+                          <a:latin typeface="Inter"/>
+                        </a:rPr>
+                        <a:t>sha256:92cdf7540064d7e561fae2a2b9b1cb371e49a0421b9ca8ccaf8d5ef73a6ed907</a:t>
+                      </a:r>
+                    </a:p>
+                  </a:txBody>
+                  <a:tcPr marL="54864" marR="54864" marT="27432" marB="27432" anchor="ctr">
+                    <a:solidFill>
+                      <a:srgbClr val="F5F7F9"/>
+                    </a:solidFill>
+                  </a:tcPr>
+                </a:tc>
+              </a:tr>
+              <a:tr h="368046">
+                <a:tc>
+                  <a:txBody>
+                    <a:bodyPr/>
+                    <a:lstStyle/>
+                    <a:p>
+                      <a:pPr>
+                        <a:defRPr sz="650" b="1">
+                          <a:solidFill>
+                            <a:srgbClr val="0D1117"/>
+                          </a:solidFill>
+                          <a:latin typeface="Inter"/>
+                        </a:defRPr>
+                      </a:pPr>
+                      <a:r>
+                        <a:rPr>
+                          <a:latin typeface="Inter"/>
+                        </a:rPr>
+                        <a:t>S7</a:t>
+                      </a:r>
+                    </a:p>
+                  </a:txBody>
+                  <a:tcPr marL="54864" marR="54864" marT="27432" marB="27432" anchor="ctr">
+                    <a:solidFill>
+                      <a:srgbClr val="FFFFFF"/>
+                    </a:solidFill>
+                  </a:tcPr>
+                </a:tc>
+                <a:tc>
+                  <a:txBody>
+                    <a:bodyPr/>
+                    <a:lstStyle/>
+                    <a:p>
+                      <a:pPr>
+                        <a:defRPr sz="650" b="0">
+                          <a:solidFill>
+                            <a:srgbClr val="0D1117"/>
+                          </a:solidFill>
+                          <a:latin typeface="Inter"/>
+                        </a:defRPr>
+                      </a:pPr>
+                      <a:r>
+                        <a:rPr>
+                          <a:latin typeface="Inter"/>
+                        </a:rPr>
+                        <a:t>Cohort comparison</a:t>
+                      </a:r>
+                    </a:p>
+                  </a:txBody>
+                  <a:tcPr marL="54864" marR="54864" marT="27432" marB="27432" anchor="ctr">
+                    <a:solidFill>
+                      <a:srgbClr val="FFFFFF"/>
+                    </a:solidFill>
+                  </a:tcPr>
+                </a:tc>
+                <a:tc>
+                  <a:txBody>
+                    <a:bodyPr/>
+                    <a:lstStyle/>
+                    <a:p>
+                      <a:pPr>
+                        <a:defRPr sz="650" b="0">
+                          <a:solidFill>
+                            <a:srgbClr val="0D1117"/>
+                          </a:solidFill>
+                          <a:latin typeface="Inter"/>
+                        </a:defRPr>
+                      </a:pPr>
+                      <a:r>
+                        <a:rPr>
+                          <a:latin typeface="Inter"/>
+                        </a:rPr>
+                        <a:t>gradient_tool</a:t>
+                      </a:r>
+                    </a:p>
+                  </a:txBody>
+                  <a:tcPr marL="54864" marR="54864" marT="27432" marB="27432" anchor="ctr">
+                    <a:solidFill>
+                      <a:srgbClr val="FFFFFF"/>
+                    </a:solidFill>
+                  </a:tcPr>
+                </a:tc>
+                <a:tc>
+                  <a:txBody>
+                    <a:bodyPr/>
+                    <a:lstStyle/>
+                    <a:p>
+                      <a:pPr>
+                        <a:defRPr sz="650" b="0">
+                          <a:solidFill>
+                            <a:srgbClr val="0D1117"/>
+                          </a:solidFill>
+                          <a:latin typeface="Inter"/>
+                        </a:defRPr>
+                      </a:pPr>
+                      <a:r>
+                        <a:rPr>
+                          <a:latin typeface="Inter"/>
+                        </a:rPr>
                         <a:t>get_manager_odd_profile</a:t>
                       </a:r>
                     </a:p>
                   </a:txBody>
                   <a:tcPr marL="54864" marR="54864" marT="27432" marB="27432" anchor="ctr">
                     <a:solidFill>
+                      <a:srgbClr val="FFFFFF"/>
+                    </a:solidFill>
+                  </a:tcPr>
+                </a:tc>
+                <a:tc>
+                  <a:txBody>
+                    <a:bodyPr/>
+                    <a:lstStyle/>
+                    <a:p>
+                      <a:pPr>
+                        <a:defRPr sz="650" b="0">
+                          <a:solidFill>
+                            <a:srgbClr val="0D1117"/>
+                          </a:solidFill>
+                          <a:latin typeface="Inter"/>
+                        </a:defRPr>
+                      </a:pPr>
+                      <a:r>
+                        <a:rPr>
+                          <a:latin typeface="Inter"/>
+                        </a:rPr>
+                        <a:t>illustrative sample</a:t>
+                      </a:r>
+                    </a:p>
+                  </a:txBody>
+                  <a:tcPr marL="54864" marR="54864" marT="27432" marB="27432" anchor="ctr">
+                    <a:solidFill>
+                      <a:srgbClr val="FFFFFF"/>
+                    </a:solidFill>
+                  </a:tcPr>
+                </a:tc>
+                <a:tc>
+                  <a:txBody>
+                    <a:bodyPr/>
+                    <a:lstStyle/>
+                    <a:p>
+                      <a:pPr>
+                        <a:defRPr sz="650" b="0">
+                          <a:solidFill>
+                            <a:srgbClr val="0D1117"/>
+                          </a:solidFill>
+                          <a:latin typeface="Inter"/>
+                        </a:defRPr>
+                      </a:pPr>
+                      <a:r>
+                        <a:rPr>
+                          <a:latin typeface="Inter"/>
+                        </a:rPr>
+                        <a:t>2026-10-01</a:t>
+                      </a:r>
+                    </a:p>
+                  </a:txBody>
+                  <a:tcPr marL="54864" marR="54864" marT="27432" marB="27432" anchor="ctr">
+                    <a:solidFill>
+                      <a:srgbClr val="FFFFFF"/>
+                    </a:solidFill>
+                  </a:tcPr>
+                </a:tc>
+                <a:tc>
+                  <a:txBody>
+                    <a:bodyPr/>
+                    <a:lstStyle/>
+                    <a:p>
+                      <a:pPr>
+                        <a:defRPr sz="650" b="0">
+                          <a:solidFill>
+                            <a:srgbClr val="0D1117"/>
+                          </a:solidFill>
+                          <a:latin typeface="Inter"/>
+                        </a:defRPr>
+                      </a:pPr>
+                      <a:r>
+                        <a:rPr>
+                          <a:latin typeface="Inter"/>
+                        </a:rPr>
+                        <a:t>Gradient-governed review evidence</a:t>
+                      </a:r>
+                    </a:p>
+                  </a:txBody>
+                  <a:tcPr marL="54864" marR="54864" marT="27432" marB="27432" anchor="ctr">
+                    <a:solidFill>
+                      <a:srgbClr val="FFFFFF"/>
+                    </a:solidFill>
+                  </a:tcPr>
+                </a:tc>
+                <a:tc>
+                  <a:txBody>
+                    <a:bodyPr/>
+                    <a:lstStyle/>
+                    <a:p>
+                      <a:pPr>
+                        <a:defRPr sz="650" b="0">
+                          <a:solidFill>
+                            <a:srgbClr val="0D1117"/>
+                          </a:solidFill>
+                          <a:latin typeface="Inter"/>
+                        </a:defRPr>
+                      </a:pPr>
+                      <a:r>
+                        <a:rPr>
+                          <a:latin typeface="Inter"/>
+                        </a:rPr>
+                        <a:t>{'chip': 'not_run', 'status': 'not_run'}</a:t>
+                      </a:r>
+                    </a:p>
+                  </a:txBody>
+                  <a:tcPr marL="54864" marR="54864" marT="27432" marB="27432" anchor="ctr">
+                    <a:solidFill>
+                      <a:srgbClr val="FFFFFF"/>
+                    </a:solidFill>
+                  </a:tcPr>
+                </a:tc>
+                <a:tc>
+                  <a:txBody>
+                    <a:bodyPr/>
+                    <a:lstStyle/>
+                    <a:p>
+                      <a:pPr>
+                        <a:defRPr sz="650" b="0">
+                          <a:solidFill>
+                            <a:srgbClr val="0D1117"/>
+                          </a:solidFill>
+                          <a:latin typeface="Inter"/>
+                        </a:defRPr>
+                      </a:pPr>
+                      <a:r>
+                        <a:rPr>
+                          <a:latin typeface="Inter"/>
+                        </a:rPr>
+                        <a:t>sha256:3cb10846a6ea6eae69552d0fdba086d996c6b674c6e6c2c707ffd556f51bf50d</a:t>
+                      </a:r>
+                    </a:p>
+                  </a:txBody>
+                  <a:tcPr marL="54864" marR="54864" marT="27432" marB="27432" anchor="ctr">
+                    <a:solidFill>
+                      <a:srgbClr val="FFFFFF"/>
+                    </a:solidFill>
+                  </a:tcPr>
+                </a:tc>
+              </a:tr>
+              <a:tr h="368046">
+                <a:tc>
+                  <a:txBody>
+                    <a:bodyPr/>
+                    <a:lstStyle/>
+                    <a:p>
+                      <a:pPr>
+                        <a:defRPr sz="650" b="1">
+                          <a:solidFill>
+                            <a:srgbClr val="0D1117"/>
+                          </a:solidFill>
+                          <a:latin typeface="Inter"/>
+                        </a:defRPr>
+                      </a:pPr>
+                      <a:r>
+                        <a:rPr>
+                          <a:latin typeface="Inter"/>
+                        </a:rPr>
+                        <a:t>S8</a:t>
+                      </a:r>
+                    </a:p>
+                  </a:txBody>
+                  <a:tcPr marL="54864" marR="54864" marT="27432" marB="27432" anchor="ctr">
+                    <a:solidFill>
                       <a:srgbClr val="F5F7F9"/>
                     </a:solidFill>
                   </a:tcPr>
@@ -16087,6 +18061,114 @@
                         <a:rPr>
                           <a:latin typeface="Inter"/>
                         </a:rPr>
+                        <a:t>ADV–13F consistency — Ridgeview</a:t>
+                      </a:r>
+                    </a:p>
+                  </a:txBody>
+                  <a:tcPr marL="54864" marR="54864" marT="27432" marB="27432" anchor="ctr">
+                    <a:solidFill>
+                      <a:srgbClr val="F5F7F9"/>
+                    </a:solidFill>
+                  </a:tcPr>
+                </a:tc>
+                <a:tc>
+                  <a:txBody>
+                    <a:bodyPr/>
+                    <a:lstStyle/>
+                    <a:p>
+                      <a:pPr>
+                        <a:defRPr sz="650" b="0">
+                          <a:solidFill>
+                            <a:srgbClr val="0D1117"/>
+                          </a:solidFill>
+                          <a:latin typeface="Inter"/>
+                        </a:defRPr>
+                      </a:pPr>
+                      <a:r>
+                        <a:rPr>
+                          <a:latin typeface="Inter"/>
+                        </a:rPr>
+                        <a:t>gradient_tool</a:t>
+                      </a:r>
+                    </a:p>
+                  </a:txBody>
+                  <a:tcPr marL="54864" marR="54864" marT="27432" marB="27432" anchor="ctr">
+                    <a:solidFill>
+                      <a:srgbClr val="F5F7F9"/>
+                    </a:solidFill>
+                  </a:tcPr>
+                </a:tc>
+                <a:tc>
+                  <a:txBody>
+                    <a:bodyPr/>
+                    <a:lstStyle/>
+                    <a:p>
+                      <a:pPr>
+                        <a:defRPr sz="650" b="0">
+                          <a:solidFill>
+                            <a:srgbClr val="0D1117"/>
+                          </a:solidFill>
+                          <a:latin typeface="Inter"/>
+                        </a:defRPr>
+                      </a:pPr>
+                      <a:r>
+                        <a:rPr>
+                          <a:latin typeface="Inter"/>
+                        </a:rPr>
+                        <a:t>get_cross_domain_research</a:t>
+                      </a:r>
+                    </a:p>
+                  </a:txBody>
+                  <a:tcPr marL="54864" marR="54864" marT="27432" marB="27432" anchor="ctr">
+                    <a:solidFill>
+                      <a:srgbClr val="F5F7F9"/>
+                    </a:solidFill>
+                  </a:tcPr>
+                </a:tc>
+                <a:tc>
+                  <a:txBody>
+                    <a:bodyPr/>
+                    <a:lstStyle/>
+                    <a:p>
+                      <a:pPr>
+                        <a:defRPr sz="650" b="0">
+                          <a:solidFill>
+                            <a:srgbClr val="0D1117"/>
+                          </a:solidFill>
+                          <a:latin typeface="Inter"/>
+                        </a:defRPr>
+                      </a:pPr>
+                      <a:r>
+                        <a:rPr>
+                          <a:latin typeface="Inter"/>
+                        </a:rPr>
+                        <a:t>illustrative sample</a:t>
+                      </a:r>
+                    </a:p>
+                  </a:txBody>
+                  <a:tcPr marL="54864" marR="54864" marT="27432" marB="27432" anchor="ctr">
+                    <a:solidFill>
+                      <a:srgbClr val="F5F7F9"/>
+                    </a:solidFill>
+                  </a:tcPr>
+                </a:tc>
+                <a:tc>
+                  <a:txBody>
+                    <a:bodyPr/>
+                    <a:lstStyle/>
+                    <a:p>
+                      <a:pPr>
+                        <a:defRPr sz="650" b="0">
+                          <a:solidFill>
+                            <a:srgbClr val="0D1117"/>
+                          </a:solidFill>
+                          <a:latin typeface="Inter"/>
+                        </a:defRPr>
+                      </a:pPr>
+                      <a:r>
+                        <a:rPr>
+                          <a:latin typeface="Inter"/>
+                        </a:rPr>
                         <a:t>2026-10-01</a:t>
                       </a:r>
                     </a:p>
@@ -16103,18 +18185,346 @@
                     <a:lstStyle/>
                     <a:p>
                       <a:pPr>
+                        <a:defRPr sz="650" b="0">
+                          <a:solidFill>
+                            <a:srgbClr val="0D1117"/>
+                          </a:solidFill>
+                          <a:latin typeface="Inter"/>
+                        </a:defRPr>
+                      </a:pPr>
+                      <a:r>
+                        <a:rPr>
+                          <a:latin typeface="Inter"/>
+                        </a:rPr>
+                        <a:t>Gradient-governed review evidence</a:t>
+                      </a:r>
+                    </a:p>
+                  </a:txBody>
+                  <a:tcPr marL="54864" marR="54864" marT="27432" marB="27432" anchor="ctr">
+                    <a:solidFill>
+                      <a:srgbClr val="F5F7F9"/>
+                    </a:solidFill>
+                  </a:tcPr>
+                </a:tc>
+                <a:tc>
+                  <a:txBody>
+                    <a:bodyPr/>
+                    <a:lstStyle/>
+                    <a:p>
+                      <a:pPr>
+                        <a:defRPr sz="650" b="0">
+                          <a:solidFill>
+                            <a:srgbClr val="0D1117"/>
+                          </a:solidFill>
+                          <a:latin typeface="Inter"/>
+                        </a:defRPr>
+                      </a:pPr>
+                      <a:r>
+                        <a:rPr>
+                          <a:latin typeface="Inter"/>
+                        </a:rPr>
+                        <a:t>{'chip': 'passed', 'status': 'passed'}</a:t>
+                      </a:r>
+                    </a:p>
+                  </a:txBody>
+                  <a:tcPr marL="54864" marR="54864" marT="27432" marB="27432" anchor="ctr">
+                    <a:solidFill>
+                      <a:srgbClr val="F5F7F9"/>
+                    </a:solidFill>
+                  </a:tcPr>
+                </a:tc>
+                <a:tc>
+                  <a:txBody>
+                    <a:bodyPr/>
+                    <a:lstStyle/>
+                    <a:p>
+                      <a:pPr>
+                        <a:defRPr sz="650" b="0">
+                          <a:solidFill>
+                            <a:srgbClr val="0D1117"/>
+                          </a:solidFill>
+                          <a:latin typeface="Inter"/>
+                        </a:defRPr>
+                      </a:pPr>
+                      <a:r>
+                        <a:rPr>
+                          <a:latin typeface="Inter"/>
+                        </a:rPr>
+                        <a:t>sha256:052330f5bbf0bf07ded0648cdacf9f452a9be7aef933b86130551d39c5cd9236</a:t>
+                      </a:r>
+                    </a:p>
+                  </a:txBody>
+                  <a:tcPr marL="54864" marR="54864" marT="27432" marB="27432" anchor="ctr">
+                    <a:solidFill>
+                      <a:srgbClr val="F5F7F9"/>
+                    </a:solidFill>
+                  </a:tcPr>
+                </a:tc>
+              </a:tr>
+              <a:tr h="368046">
+                <a:tc>
+                  <a:txBody>
+                    <a:bodyPr/>
+                    <a:lstStyle/>
+                    <a:p>
+                      <a:pPr>
                         <a:defRPr sz="650" b="1">
                           <a:solidFill>
-                            <a:srgbClr val="F2A93B"/>
-                          </a:solidFill>
-                          <a:latin typeface="Inter"/>
-                        </a:defRPr>
-                      </a:pPr>
-                      <a:r>
-                        <a:rPr>
-                          <a:latin typeface="Inter"/>
-                        </a:rPr>
-                        <a:t>● advisory</a:t>
+                            <a:srgbClr val="0D1117"/>
+                          </a:solidFill>
+                          <a:latin typeface="Inter"/>
+                        </a:defRPr>
+                      </a:pPr>
+                      <a:r>
+                        <a:rPr>
+                          <a:latin typeface="Inter"/>
+                        </a:rPr>
+                        <a:t>S9</a:t>
+                      </a:r>
+                    </a:p>
+                  </a:txBody>
+                  <a:tcPr marL="54864" marR="54864" marT="27432" marB="27432" anchor="ctr">
+                    <a:solidFill>
+                      <a:srgbClr val="FFFFFF"/>
+                    </a:solidFill>
+                  </a:tcPr>
+                </a:tc>
+                <a:tc>
+                  <a:txBody>
+                    <a:bodyPr/>
+                    <a:lstStyle/>
+                    <a:p>
+                      <a:pPr>
+                        <a:defRPr sz="650" b="0">
+                          <a:solidFill>
+                            <a:srgbClr val="0D1117"/>
+                          </a:solidFill>
+                          <a:latin typeface="Inter"/>
+                        </a:defRPr>
+                      </a:pPr>
+                      <a:r>
+                        <a:rPr>
+                          <a:latin typeface="Inter"/>
+                        </a:rPr>
+                        <a:t>Open findings — Ridgeview</a:t>
+                      </a:r>
+                    </a:p>
+                  </a:txBody>
+                  <a:tcPr marL="54864" marR="54864" marT="27432" marB="27432" anchor="ctr">
+                    <a:solidFill>
+                      <a:srgbClr val="FFFFFF"/>
+                    </a:solidFill>
+                  </a:tcPr>
+                </a:tc>
+                <a:tc>
+                  <a:txBody>
+                    <a:bodyPr/>
+                    <a:lstStyle/>
+                    <a:p>
+                      <a:pPr>
+                        <a:defRPr sz="650" b="0">
+                          <a:solidFill>
+                            <a:srgbClr val="0D1117"/>
+                          </a:solidFill>
+                          <a:latin typeface="Inter"/>
+                        </a:defRPr>
+                      </a:pPr>
+                      <a:r>
+                        <a:rPr>
+                          <a:latin typeface="Inter"/>
+                        </a:rPr>
+                        <a:t>gradient_tool</a:t>
+                      </a:r>
+                    </a:p>
+                  </a:txBody>
+                  <a:tcPr marL="54864" marR="54864" marT="27432" marB="27432" anchor="ctr">
+                    <a:solidFill>
+                      <a:srgbClr val="FFFFFF"/>
+                    </a:solidFill>
+                  </a:tcPr>
+                </a:tc>
+                <a:tc>
+                  <a:txBody>
+                    <a:bodyPr/>
+                    <a:lstStyle/>
+                    <a:p>
+                      <a:pPr>
+                        <a:defRPr sz="650" b="0">
+                          <a:solidFill>
+                            <a:srgbClr val="0D1117"/>
+                          </a:solidFill>
+                          <a:latin typeface="Inter"/>
+                        </a:defRPr>
+                      </a:pPr>
+                      <a:r>
+                        <a:rPr>
+                          <a:latin typeface="Inter"/>
+                        </a:rPr>
+                        <a:t>get_manager_diligence_findings</a:t>
+                      </a:r>
+                    </a:p>
+                  </a:txBody>
+                  <a:tcPr marL="54864" marR="54864" marT="27432" marB="27432" anchor="ctr">
+                    <a:solidFill>
+                      <a:srgbClr val="FFFFFF"/>
+                    </a:solidFill>
+                  </a:tcPr>
+                </a:tc>
+                <a:tc>
+                  <a:txBody>
+                    <a:bodyPr/>
+                    <a:lstStyle/>
+                    <a:p>
+                      <a:pPr>
+                        <a:defRPr sz="650" b="0">
+                          <a:solidFill>
+                            <a:srgbClr val="0D1117"/>
+                          </a:solidFill>
+                          <a:latin typeface="Inter"/>
+                        </a:defRPr>
+                      </a:pPr>
+                      <a:r>
+                        <a:rPr>
+                          <a:latin typeface="Inter"/>
+                        </a:rPr>
+                        <a:t>illustrative sample</a:t>
+                      </a:r>
+                    </a:p>
+                  </a:txBody>
+                  <a:tcPr marL="54864" marR="54864" marT="27432" marB="27432" anchor="ctr">
+                    <a:solidFill>
+                      <a:srgbClr val="FFFFFF"/>
+                    </a:solidFill>
+                  </a:tcPr>
+                </a:tc>
+                <a:tc>
+                  <a:txBody>
+                    <a:bodyPr/>
+                    <a:lstStyle/>
+                    <a:p>
+                      <a:pPr>
+                        <a:defRPr sz="650" b="0">
+                          <a:solidFill>
+                            <a:srgbClr val="0D1117"/>
+                          </a:solidFill>
+                          <a:latin typeface="Inter"/>
+                        </a:defRPr>
+                      </a:pPr>
+                      <a:r>
+                        <a:rPr>
+                          <a:latin typeface="Inter"/>
+                        </a:rPr>
+                        <a:t>2026-10-04</a:t>
+                      </a:r>
+                    </a:p>
+                  </a:txBody>
+                  <a:tcPr marL="54864" marR="54864" marT="27432" marB="27432" anchor="ctr">
+                    <a:solidFill>
+                      <a:srgbClr val="FFFFFF"/>
+                    </a:solidFill>
+                  </a:tcPr>
+                </a:tc>
+                <a:tc>
+                  <a:txBody>
+                    <a:bodyPr/>
+                    <a:lstStyle/>
+                    <a:p>
+                      <a:pPr>
+                        <a:defRPr sz="650" b="0">
+                          <a:solidFill>
+                            <a:srgbClr val="0D1117"/>
+                          </a:solidFill>
+                          <a:latin typeface="Inter"/>
+                        </a:defRPr>
+                      </a:pPr>
+                      <a:r>
+                        <a:rPr>
+                          <a:latin typeface="Inter"/>
+                        </a:rPr>
+                        <a:t>Gradient-governed review evidence</a:t>
+                      </a:r>
+                    </a:p>
+                  </a:txBody>
+                  <a:tcPr marL="54864" marR="54864" marT="27432" marB="27432" anchor="ctr">
+                    <a:solidFill>
+                      <a:srgbClr val="FFFFFF"/>
+                    </a:solidFill>
+                  </a:tcPr>
+                </a:tc>
+                <a:tc>
+                  <a:txBody>
+                    <a:bodyPr/>
+                    <a:lstStyle/>
+                    <a:p>
+                      <a:pPr>
+                        <a:defRPr sz="650" b="0">
+                          <a:solidFill>
+                            <a:srgbClr val="0D1117"/>
+                          </a:solidFill>
+                          <a:latin typeface="Inter"/>
+                        </a:defRPr>
+                      </a:pPr>
+                      <a:r>
+                        <a:rPr>
+                          <a:latin typeface="Inter"/>
+                        </a:rPr>
+                        <a:t>{'chip': 'advisory', 'status': 'advisory'}</a:t>
+                      </a:r>
+                    </a:p>
+                  </a:txBody>
+                  <a:tcPr marL="54864" marR="54864" marT="27432" marB="27432" anchor="ctr">
+                    <a:solidFill>
+                      <a:srgbClr val="FFFFFF"/>
+                    </a:solidFill>
+                  </a:tcPr>
+                </a:tc>
+                <a:tc>
+                  <a:txBody>
+                    <a:bodyPr/>
+                    <a:lstStyle/>
+                    <a:p>
+                      <a:pPr>
+                        <a:defRPr sz="650" b="0">
+                          <a:solidFill>
+                            <a:srgbClr val="0D1117"/>
+                          </a:solidFill>
+                          <a:latin typeface="Inter"/>
+                        </a:defRPr>
+                      </a:pPr>
+                      <a:r>
+                        <a:rPr>
+                          <a:latin typeface="Inter"/>
+                        </a:rPr>
+                        <a:t>sha256:c5b2df526a01725ac3e9171b38b2b72687d5f5faa1864768ec4c3bc85ceeb816</a:t>
+                      </a:r>
+                    </a:p>
+                  </a:txBody>
+                  <a:tcPr marL="54864" marR="54864" marT="27432" marB="27432" anchor="ctr">
+                    <a:solidFill>
+                      <a:srgbClr val="FFFFFF"/>
+                    </a:solidFill>
+                  </a:tcPr>
+                </a:tc>
+              </a:tr>
+              <a:tr h="368046">
+                <a:tc>
+                  <a:txBody>
+                    <a:bodyPr/>
+                    <a:lstStyle/>
+                    <a:p>
+                      <a:pPr>
+                        <a:defRPr sz="650" b="1">
+                          <a:solidFill>
+                            <a:srgbClr val="0D1117"/>
+                          </a:solidFill>
+                          <a:latin typeface="Inter"/>
+                        </a:defRPr>
+                      </a:pPr>
+                      <a:r>
+                        <a:rPr>
+                          <a:latin typeface="Inter"/>
+                        </a:rPr>
+                        <a:t>S10</a:t>
                       </a:r>
                     </a:p>
                   </a:txBody>
@@ -16141,7 +18551,7 @@
                         <a:rPr>
                           <a:latin typeface="Inter"/>
                         </a:rPr>
-                        <a:t>b2c3d4e5</a:t>
+                        <a:t>Firm events</a:t>
                       </a:r>
                     </a:p>
                   </a:txBody>
@@ -16151,8 +18561,197 @@
                     </a:solidFill>
                   </a:tcPr>
                 </a:tc>
+                <a:tc>
+                  <a:txBody>
+                    <a:bodyPr/>
+                    <a:lstStyle/>
+                    <a:p>
+                      <a:pPr>
+                        <a:defRPr sz="650" b="0">
+                          <a:solidFill>
+                            <a:srgbClr val="0D1117"/>
+                          </a:solidFill>
+                          <a:latin typeface="Inter"/>
+                        </a:defRPr>
+                      </a:pPr>
+                      <a:r>
+                        <a:rPr>
+                          <a:latin typeface="Inter"/>
+                        </a:rPr>
+                        <a:t>gradient_tool</a:t>
+                      </a:r>
+                    </a:p>
+                  </a:txBody>
+                  <a:tcPr marL="54864" marR="54864" marT="27432" marB="27432" anchor="ctr">
+                    <a:solidFill>
+                      <a:srgbClr val="F5F7F9"/>
+                    </a:solidFill>
+                  </a:tcPr>
+                </a:tc>
+                <a:tc>
+                  <a:txBody>
+                    <a:bodyPr/>
+                    <a:lstStyle/>
+                    <a:p>
+                      <a:pPr>
+                        <a:defRPr sz="650" b="0">
+                          <a:solidFill>
+                            <a:srgbClr val="0D1117"/>
+                          </a:solidFill>
+                          <a:latin typeface="Inter"/>
+                        </a:defRPr>
+                      </a:pPr>
+                      <a:r>
+                        <a:rPr>
+                          <a:latin typeface="Inter"/>
+                        </a:rPr>
+                        <a:t>get_firm_fund_events</a:t>
+                      </a:r>
+                    </a:p>
+                  </a:txBody>
+                  <a:tcPr marL="54864" marR="54864" marT="27432" marB="27432" anchor="ctr">
+                    <a:solidFill>
+                      <a:srgbClr val="F5F7F9"/>
+                    </a:solidFill>
+                  </a:tcPr>
+                </a:tc>
+                <a:tc>
+                  <a:txBody>
+                    <a:bodyPr/>
+                    <a:lstStyle/>
+                    <a:p>
+                      <a:pPr>
+                        <a:defRPr sz="650" b="0">
+                          <a:solidFill>
+                            <a:srgbClr val="0D1117"/>
+                          </a:solidFill>
+                          <a:latin typeface="Inter"/>
+                        </a:defRPr>
+                      </a:pPr>
+                      <a:r>
+                        <a:rPr>
+                          <a:latin typeface="Inter"/>
+                        </a:rPr>
+                        <a:t>illustrative sample</a:t>
+                      </a:r>
+                    </a:p>
+                  </a:txBody>
+                  <a:tcPr marL="54864" marR="54864" marT="27432" marB="27432" anchor="ctr">
+                    <a:solidFill>
+                      <a:srgbClr val="F5F7F9"/>
+                    </a:solidFill>
+                  </a:tcPr>
+                </a:tc>
+                <a:tc>
+                  <a:txBody>
+                    <a:bodyPr/>
+                    <a:lstStyle/>
+                    <a:p>
+                      <a:pPr>
+                        <a:defRPr sz="650" b="0">
+                          <a:solidFill>
+                            <a:srgbClr val="0D1117"/>
+                          </a:solidFill>
+                          <a:latin typeface="Inter"/>
+                        </a:defRPr>
+                      </a:pPr>
+                      <a:r>
+                        <a:rPr>
+                          <a:latin typeface="Inter"/>
+                        </a:rPr>
+                        <a:t>2026-10-04</a:t>
+                      </a:r>
+                    </a:p>
+                  </a:txBody>
+                  <a:tcPr marL="54864" marR="54864" marT="27432" marB="27432" anchor="ctr">
+                    <a:solidFill>
+                      <a:srgbClr val="F5F7F9"/>
+                    </a:solidFill>
+                  </a:tcPr>
+                </a:tc>
+                <a:tc>
+                  <a:txBody>
+                    <a:bodyPr/>
+                    <a:lstStyle/>
+                    <a:p>
+                      <a:pPr>
+                        <a:defRPr sz="650" b="0">
+                          <a:solidFill>
+                            <a:srgbClr val="0D1117"/>
+                          </a:solidFill>
+                          <a:latin typeface="Inter"/>
+                        </a:defRPr>
+                      </a:pPr>
+                      <a:r>
+                        <a:rPr>
+                          <a:latin typeface="Inter"/>
+                        </a:rPr>
+                        <a:t>Gradient-governed review evidence</a:t>
+                      </a:r>
+                    </a:p>
+                  </a:txBody>
+                  <a:tcPr marL="54864" marR="54864" marT="27432" marB="27432" anchor="ctr">
+                    <a:solidFill>
+                      <a:srgbClr val="F5F7F9"/>
+                    </a:solidFill>
+                  </a:tcPr>
+                </a:tc>
+                <a:tc>
+                  <a:txBody>
+                    <a:bodyPr/>
+                    <a:lstStyle/>
+                    <a:p>
+                      <a:pPr>
+                        <a:defRPr sz="650" b="0">
+                          <a:solidFill>
+                            <a:srgbClr val="0D1117"/>
+                          </a:solidFill>
+                          <a:latin typeface="Inter"/>
+                        </a:defRPr>
+                      </a:pPr>
+                      <a:r>
+                        <a:rPr>
+                          <a:latin typeface="Inter"/>
+                        </a:rPr>
+                        <a:t>{'chip': 'passed', 'status': 'passed'}</a:t>
+                      </a:r>
+                    </a:p>
+                  </a:txBody>
+                  <a:tcPr marL="54864" marR="54864" marT="27432" marB="27432" anchor="ctr">
+                    <a:solidFill>
+                      <a:srgbClr val="F5F7F9"/>
+                    </a:solidFill>
+                  </a:tcPr>
+                </a:tc>
+                <a:tc>
+                  <a:txBody>
+                    <a:bodyPr/>
+                    <a:lstStyle/>
+                    <a:p>
+                      <a:pPr>
+                        <a:defRPr sz="650" b="0">
+                          <a:solidFill>
+                            <a:srgbClr val="0D1117"/>
+                          </a:solidFill>
+                          <a:latin typeface="Inter"/>
+                        </a:defRPr>
+                      </a:pPr>
+                      <a:r>
+                        <a:rPr>
+                          <a:latin typeface="Inter"/>
+                        </a:rPr>
+                        <a:t>sha256:50e4d573d06639839dc345c94ef1e122c0380d0a1c5e1c5c7477c6e8715cb44f</a:t>
+                      </a:r>
+                    </a:p>
+                  </a:txBody>
+                  <a:tcPr marL="54864" marR="54864" marT="27432" marB="27432" anchor="ctr">
+                    <a:solidFill>
+                      <a:srgbClr val="F5F7F9"/>
+                    </a:solidFill>
+                  </a:tcPr>
+                </a:tc>
               </a:tr>
-              <a:tr h="384810">
+              <a:tr h="368046">
                 <a:tc>
                   <a:txBody>
                     <a:bodyPr/>
@@ -16170,7 +18769,7 @@
                         <a:rPr>
                           <a:latin typeface="Inter"/>
                         </a:rPr>
-                        <a:t>S3</a:t>
+                        <a:t>S11</a:t>
                       </a:r>
                     </a:p>
                   </a:txBody>
@@ -16197,7 +18796,7 @@
                         <a:rPr>
                           <a:latin typeface="Inter"/>
                         </a:rPr>
-                        <a:t>Form ADV profile — Northfield (TEST)</a:t>
+                        <a:t>ADV–13F consistency — Harbor</a:t>
                       </a:r>
                     </a:p>
                   </a:txBody>
@@ -16224,7 +18823,7 @@
                         <a:rPr>
                           <a:latin typeface="Inter"/>
                         </a:rPr>
-                        <a:t>get_manager_odd_profile</a:t>
+                        <a:t>gradient_tool</a:t>
                       </a:r>
                     </a:p>
                   </a:txBody>
@@ -16251,6 +18850,60 @@
                         <a:rPr>
                           <a:latin typeface="Inter"/>
                         </a:rPr>
+                        <a:t>get_cross_domain_research</a:t>
+                      </a:r>
+                    </a:p>
+                  </a:txBody>
+                  <a:tcPr marL="54864" marR="54864" marT="27432" marB="27432" anchor="ctr">
+                    <a:solidFill>
+                      <a:srgbClr val="FFFFFF"/>
+                    </a:solidFill>
+                  </a:tcPr>
+                </a:tc>
+                <a:tc>
+                  <a:txBody>
+                    <a:bodyPr/>
+                    <a:lstStyle/>
+                    <a:p>
+                      <a:pPr>
+                        <a:defRPr sz="650" b="0">
+                          <a:solidFill>
+                            <a:srgbClr val="0D1117"/>
+                          </a:solidFill>
+                          <a:latin typeface="Inter"/>
+                        </a:defRPr>
+                      </a:pPr>
+                      <a:r>
+                        <a:rPr>
+                          <a:latin typeface="Inter"/>
+                        </a:rPr>
+                        <a:t>illustrative sample</a:t>
+                      </a:r>
+                    </a:p>
+                  </a:txBody>
+                  <a:tcPr marL="54864" marR="54864" marT="27432" marB="27432" anchor="ctr">
+                    <a:solidFill>
+                      <a:srgbClr val="FFFFFF"/>
+                    </a:solidFill>
+                  </a:tcPr>
+                </a:tc>
+                <a:tc>
+                  <a:txBody>
+                    <a:bodyPr/>
+                    <a:lstStyle/>
+                    <a:p>
+                      <a:pPr>
+                        <a:defRPr sz="650" b="0">
+                          <a:solidFill>
+                            <a:srgbClr val="0D1117"/>
+                          </a:solidFill>
+                          <a:latin typeface="Inter"/>
+                        </a:defRPr>
+                      </a:pPr>
+                      <a:r>
+                        <a:rPr>
+                          <a:latin typeface="Inter"/>
+                        </a:rPr>
                         <a:t>2026-10-01</a:t>
                       </a:r>
                     </a:p>
@@ -16267,33 +18920,6 @@
                     <a:lstStyle/>
                     <a:p>
                       <a:pPr>
-                        <a:defRPr sz="650" b="1">
-                          <a:solidFill>
-                            <a:srgbClr val="9AA5B1"/>
-                          </a:solidFill>
-                          <a:latin typeface="Inter"/>
-                        </a:defRPr>
-                      </a:pPr>
-                      <a:r>
-                        <a:rPr>
-                          <a:latin typeface="Inter"/>
-                        </a:rPr>
-                        <a:t>● not_run</a:t>
-                      </a:r>
-                    </a:p>
-                  </a:txBody>
-                  <a:tcPr marL="54864" marR="54864" marT="27432" marB="27432" anchor="ctr">
-                    <a:solidFill>
-                      <a:srgbClr val="F5F7F9"/>
-                    </a:solidFill>
-                  </a:tcPr>
-                </a:tc>
-                <a:tc>
-                  <a:txBody>
-                    <a:bodyPr/>
-                    <a:lstStyle/>
-                    <a:p>
-                      <a:pPr>
                         <a:defRPr sz="650" b="0">
                           <a:solidFill>
                             <a:srgbClr val="0D1117"/>
@@ -16305,7 +18931,7 @@
                         <a:rPr>
                           <a:latin typeface="Inter"/>
                         </a:rPr>
-                        <a:t>c3d4e5f6</a:t>
+                        <a:t>Gradient-governed review evidence</a:t>
                       </a:r>
                     </a:p>
                   </a:txBody>
@@ -16315,15 +18941,13 @@
                     </a:solidFill>
                   </a:tcPr>
                 </a:tc>
-              </a:tr>
-              <a:tr h="384810">
-                <a:tc>
-                  <a:txBody>
-                    <a:bodyPr/>
-                    <a:lstStyle/>
-                    <a:p>
-                      <a:pPr>
-                        <a:defRPr sz="650" b="1">
+                <a:tc>
+                  <a:txBody>
+                    <a:bodyPr/>
+                    <a:lstStyle/>
+                    <a:p>
+                      <a:pPr>
+                        <a:defRPr sz="650" b="0">
                           <a:solidFill>
                             <a:srgbClr val="0D1117"/>
                           </a:solidFill>
@@ -16334,13 +18958,13 @@
                         <a:rPr>
                           <a:latin typeface="Inter"/>
                         </a:rPr>
-                        <a:t>S4</a:t>
-                      </a:r>
-                    </a:p>
-                  </a:txBody>
-                  <a:tcPr marL="54864" marR="54864" marT="27432" marB="27432" anchor="ctr">
-                    <a:solidFill>
-                      <a:srgbClr val="F5F7F9"/>
+                        <a:t>{'chip': 'passed', 'status': 'passed'}</a:t>
+                      </a:r>
+                    </a:p>
+                  </a:txBody>
+                  <a:tcPr marL="54864" marR="54864" marT="27432" marB="27432" anchor="ctr">
+                    <a:solidFill>
+                      <a:srgbClr val="FFFFFF"/>
                     </a:solidFill>
                   </a:tcPr>
                 </a:tc>
@@ -16361,1263 +18985,7 @@
                         <a:rPr>
                           <a:latin typeface="Inter"/>
                         </a:rPr>
-                        <a:t>13F snapshot — Ridgeview (TEST)</a:t>
-                      </a:r>
-                    </a:p>
-                  </a:txBody>
-                  <a:tcPr marL="54864" marR="54864" marT="27432" marB="27432" anchor="ctr">
-                    <a:solidFill>
-                      <a:srgbClr val="F5F7F9"/>
-                    </a:solidFill>
-                  </a:tcPr>
-                </a:tc>
-                <a:tc>
-                  <a:txBody>
-                    <a:bodyPr/>
-                    <a:lstStyle/>
-                    <a:p>
-                      <a:pPr>
-                        <a:defRPr sz="650" b="0">
-                          <a:solidFill>
-                            <a:srgbClr val="0D1117"/>
-                          </a:solidFill>
-                          <a:latin typeface="Inter"/>
-                        </a:defRPr>
-                      </a:pPr>
-                      <a:r>
-                        <a:rPr>
-                          <a:latin typeface="Inter"/>
-                        </a:rPr>
-                        <a:t>get_firm_13f_portfolio_review</a:t>
-                      </a:r>
-                    </a:p>
-                  </a:txBody>
-                  <a:tcPr marL="54864" marR="54864" marT="27432" marB="27432" anchor="ctr">
-                    <a:solidFill>
-                      <a:srgbClr val="F5F7F9"/>
-                    </a:solidFill>
-                  </a:tcPr>
-                </a:tc>
-                <a:tc>
-                  <a:txBody>
-                    <a:bodyPr/>
-                    <a:lstStyle/>
-                    <a:p>
-                      <a:pPr>
-                        <a:defRPr sz="650" b="0">
-                          <a:solidFill>
-                            <a:srgbClr val="0D1117"/>
-                          </a:solidFill>
-                          <a:latin typeface="Inter"/>
-                        </a:defRPr>
-                      </a:pPr>
-                      <a:r>
-                        <a:rPr>
-                          <a:latin typeface="Inter"/>
-                        </a:rPr>
-                        <a:t>2026-08-14</a:t>
-                      </a:r>
-                    </a:p>
-                  </a:txBody>
-                  <a:tcPr marL="54864" marR="54864" marT="27432" marB="27432" anchor="ctr">
-                    <a:solidFill>
-                      <a:srgbClr val="F5F7F9"/>
-                    </a:solidFill>
-                  </a:tcPr>
-                </a:tc>
-                <a:tc>
-                  <a:txBody>
-                    <a:bodyPr/>
-                    <a:lstStyle/>
-                    <a:p>
-                      <a:pPr>
-                        <a:defRPr sz="650" b="1">
-                          <a:solidFill>
-                            <a:srgbClr val="C6F432"/>
-                          </a:solidFill>
-                          <a:latin typeface="Inter"/>
-                        </a:defRPr>
-                      </a:pPr>
-                      <a:r>
-                        <a:rPr>
-                          <a:latin typeface="Inter"/>
-                        </a:rPr>
-                        <a:t>● passed</a:t>
-                      </a:r>
-                    </a:p>
-                  </a:txBody>
-                  <a:tcPr marL="54864" marR="54864" marT="27432" marB="27432" anchor="ctr">
-                    <a:solidFill>
-                      <a:srgbClr val="F5F7F9"/>
-                    </a:solidFill>
-                  </a:tcPr>
-                </a:tc>
-                <a:tc>
-                  <a:txBody>
-                    <a:bodyPr/>
-                    <a:lstStyle/>
-                    <a:p>
-                      <a:pPr>
-                        <a:defRPr sz="650" b="0">
-                          <a:solidFill>
-                            <a:srgbClr val="0D1117"/>
-                          </a:solidFill>
-                          <a:latin typeface="Inter"/>
-                        </a:defRPr>
-                      </a:pPr>
-                      <a:r>
-                        <a:rPr>
-                          <a:latin typeface="Inter"/>
-                        </a:rPr>
-                        <a:t>d4e5f6a7</a:t>
-                      </a:r>
-                    </a:p>
-                  </a:txBody>
-                  <a:tcPr marL="54864" marR="54864" marT="27432" marB="27432" anchor="ctr">
-                    <a:solidFill>
-                      <a:srgbClr val="F5F7F9"/>
-                    </a:solidFill>
-                  </a:tcPr>
-                </a:tc>
-              </a:tr>
-              <a:tr h="384810">
-                <a:tc>
-                  <a:txBody>
-                    <a:bodyPr/>
-                    <a:lstStyle/>
-                    <a:p>
-                      <a:pPr>
-                        <a:defRPr sz="650" b="1">
-                          <a:solidFill>
-                            <a:srgbClr val="0D1117"/>
-                          </a:solidFill>
-                          <a:latin typeface="Inter"/>
-                        </a:defRPr>
-                      </a:pPr>
-                      <a:r>
-                        <a:rPr>
-                          <a:latin typeface="Inter"/>
-                        </a:rPr>
-                        <a:t>S5</a:t>
-                      </a:r>
-                    </a:p>
-                  </a:txBody>
-                  <a:tcPr marL="54864" marR="54864" marT="27432" marB="27432" anchor="ctr">
-                    <a:solidFill>
-                      <a:srgbClr val="FFFFFF"/>
-                    </a:solidFill>
-                  </a:tcPr>
-                </a:tc>
-                <a:tc>
-                  <a:txBody>
-                    <a:bodyPr/>
-                    <a:lstStyle/>
-                    <a:p>
-                      <a:pPr>
-                        <a:defRPr sz="650" b="0">
-                          <a:solidFill>
-                            <a:srgbClr val="0D1117"/>
-                          </a:solidFill>
-                          <a:latin typeface="Inter"/>
-                        </a:defRPr>
-                      </a:pPr>
-                      <a:r>
-                        <a:rPr>
-                          <a:latin typeface="Inter"/>
-                        </a:rPr>
-                        <a:t>13F snapshot — Harbor (TEST)</a:t>
-                      </a:r>
-                    </a:p>
-                  </a:txBody>
-                  <a:tcPr marL="54864" marR="54864" marT="27432" marB="27432" anchor="ctr">
-                    <a:solidFill>
-                      <a:srgbClr val="FFFFFF"/>
-                    </a:solidFill>
-                  </a:tcPr>
-                </a:tc>
-                <a:tc>
-                  <a:txBody>
-                    <a:bodyPr/>
-                    <a:lstStyle/>
-                    <a:p>
-                      <a:pPr>
-                        <a:defRPr sz="650" b="0">
-                          <a:solidFill>
-                            <a:srgbClr val="0D1117"/>
-                          </a:solidFill>
-                          <a:latin typeface="Inter"/>
-                        </a:defRPr>
-                      </a:pPr>
-                      <a:r>
-                        <a:rPr>
-                          <a:latin typeface="Inter"/>
-                        </a:rPr>
-                        <a:t>get_firm_13f_portfolio_review</a:t>
-                      </a:r>
-                    </a:p>
-                  </a:txBody>
-                  <a:tcPr marL="54864" marR="54864" marT="27432" marB="27432" anchor="ctr">
-                    <a:solidFill>
-                      <a:srgbClr val="FFFFFF"/>
-                    </a:solidFill>
-                  </a:tcPr>
-                </a:tc>
-                <a:tc>
-                  <a:txBody>
-                    <a:bodyPr/>
-                    <a:lstStyle/>
-                    <a:p>
-                      <a:pPr>
-                        <a:defRPr sz="650" b="0">
-                          <a:solidFill>
-                            <a:srgbClr val="0D1117"/>
-                          </a:solidFill>
-                          <a:latin typeface="Inter"/>
-                        </a:defRPr>
-                      </a:pPr>
-                      <a:r>
-                        <a:rPr>
-                          <a:latin typeface="Inter"/>
-                        </a:rPr>
-                        <a:t>2026-08-13</a:t>
-                      </a:r>
-                    </a:p>
-                  </a:txBody>
-                  <a:tcPr marL="54864" marR="54864" marT="27432" marB="27432" anchor="ctr">
-                    <a:solidFill>
-                      <a:srgbClr val="FFFFFF"/>
-                    </a:solidFill>
-                  </a:tcPr>
-                </a:tc>
-                <a:tc>
-                  <a:txBody>
-                    <a:bodyPr/>
-                    <a:lstStyle/>
-                    <a:p>
-                      <a:pPr>
-                        <a:defRPr sz="650" b="1">
-                          <a:solidFill>
-                            <a:srgbClr val="C6F432"/>
-                          </a:solidFill>
-                          <a:latin typeface="Inter"/>
-                        </a:defRPr>
-                      </a:pPr>
-                      <a:r>
-                        <a:rPr>
-                          <a:latin typeface="Inter"/>
-                        </a:rPr>
-                        <a:t>● passed</a:t>
-                      </a:r>
-                    </a:p>
-                  </a:txBody>
-                  <a:tcPr marL="54864" marR="54864" marT="27432" marB="27432" anchor="ctr">
-                    <a:solidFill>
-                      <a:srgbClr val="F5F7F9"/>
-                    </a:solidFill>
-                  </a:tcPr>
-                </a:tc>
-                <a:tc>
-                  <a:txBody>
-                    <a:bodyPr/>
-                    <a:lstStyle/>
-                    <a:p>
-                      <a:pPr>
-                        <a:defRPr sz="650" b="0">
-                          <a:solidFill>
-                            <a:srgbClr val="0D1117"/>
-                          </a:solidFill>
-                          <a:latin typeface="Inter"/>
-                        </a:defRPr>
-                      </a:pPr>
-                      <a:r>
-                        <a:rPr>
-                          <a:latin typeface="Inter"/>
-                        </a:rPr>
-                        <a:t>e5f6a7b8</a:t>
-                      </a:r>
-                    </a:p>
-                  </a:txBody>
-                  <a:tcPr marL="54864" marR="54864" marT="27432" marB="27432" anchor="ctr">
-                    <a:solidFill>
-                      <a:srgbClr val="FFFFFF"/>
-                    </a:solidFill>
-                  </a:tcPr>
-                </a:tc>
-              </a:tr>
-              <a:tr h="384810">
-                <a:tc>
-                  <a:txBody>
-                    <a:bodyPr/>
-                    <a:lstStyle/>
-                    <a:p>
-                      <a:pPr>
-                        <a:defRPr sz="650" b="1">
-                          <a:solidFill>
-                            <a:srgbClr val="0D1117"/>
-                          </a:solidFill>
-                          <a:latin typeface="Inter"/>
-                        </a:defRPr>
-                      </a:pPr>
-                      <a:r>
-                        <a:rPr>
-                          <a:latin typeface="Inter"/>
-                        </a:rPr>
-                        <a:t>S6</a:t>
-                      </a:r>
-                    </a:p>
-                  </a:txBody>
-                  <a:tcPr marL="54864" marR="54864" marT="27432" marB="27432" anchor="ctr">
-                    <a:solidFill>
-                      <a:srgbClr val="F5F7F9"/>
-                    </a:solidFill>
-                  </a:tcPr>
-                </a:tc>
-                <a:tc>
-                  <a:txBody>
-                    <a:bodyPr/>
-                    <a:lstStyle/>
-                    <a:p>
-                      <a:pPr>
-                        <a:defRPr sz="650" b="0">
-                          <a:solidFill>
-                            <a:srgbClr val="0D1117"/>
-                          </a:solidFill>
-                          <a:latin typeface="Inter"/>
-                        </a:defRPr>
-                      </a:pPr>
-                      <a:r>
-                        <a:rPr>
-                          <a:latin typeface="Inter"/>
-                        </a:rPr>
-                        <a:t>13F overlap</a:t>
-                      </a:r>
-                    </a:p>
-                  </a:txBody>
-                  <a:tcPr marL="54864" marR="54864" marT="27432" marB="27432" anchor="ctr">
-                    <a:solidFill>
-                      <a:srgbClr val="F5F7F9"/>
-                    </a:solidFill>
-                  </a:tcPr>
-                </a:tc>
-                <a:tc>
-                  <a:txBody>
-                    <a:bodyPr/>
-                    <a:lstStyle/>
-                    <a:p>
-                      <a:pPr>
-                        <a:defRPr sz="650" b="0">
-                          <a:solidFill>
-                            <a:srgbClr val="0D1117"/>
-                          </a:solidFill>
-                          <a:latin typeface="Inter"/>
-                        </a:defRPr>
-                      </a:pPr>
-                      <a:r>
-                        <a:rPr>
-                          <a:latin typeface="Inter"/>
-                        </a:rPr>
-                        <a:t>get_multi_manager_13f_overlap</a:t>
-                      </a:r>
-                    </a:p>
-                  </a:txBody>
-                  <a:tcPr marL="54864" marR="54864" marT="27432" marB="27432" anchor="ctr">
-                    <a:solidFill>
-                      <a:srgbClr val="F5F7F9"/>
-                    </a:solidFill>
-                  </a:tcPr>
-                </a:tc>
-                <a:tc>
-                  <a:txBody>
-                    <a:bodyPr/>
-                    <a:lstStyle/>
-                    <a:p>
-                      <a:pPr>
-                        <a:defRPr sz="650" b="0">
-                          <a:solidFill>
-                            <a:srgbClr val="0D1117"/>
-                          </a:solidFill>
-                          <a:latin typeface="Inter"/>
-                        </a:defRPr>
-                      </a:pPr>
-                      <a:r>
-                        <a:rPr>
-                          <a:latin typeface="Inter"/>
-                        </a:rPr>
-                        <a:t>2026-08-14</a:t>
-                      </a:r>
-                    </a:p>
-                  </a:txBody>
-                  <a:tcPr marL="54864" marR="54864" marT="27432" marB="27432" anchor="ctr">
-                    <a:solidFill>
-                      <a:srgbClr val="F5F7F9"/>
-                    </a:solidFill>
-                  </a:tcPr>
-                </a:tc>
-                <a:tc>
-                  <a:txBody>
-                    <a:bodyPr/>
-                    <a:lstStyle/>
-                    <a:p>
-                      <a:pPr>
-                        <a:defRPr sz="650" b="1">
-                          <a:solidFill>
-                            <a:srgbClr val="C6F432"/>
-                          </a:solidFill>
-                          <a:latin typeface="Inter"/>
-                        </a:defRPr>
-                      </a:pPr>
-                      <a:r>
-                        <a:rPr>
-                          <a:latin typeface="Inter"/>
-                        </a:rPr>
-                        <a:t>● passed</a:t>
-                      </a:r>
-                    </a:p>
-                  </a:txBody>
-                  <a:tcPr marL="54864" marR="54864" marT="27432" marB="27432" anchor="ctr">
-                    <a:solidFill>
-                      <a:srgbClr val="F5F7F9"/>
-                    </a:solidFill>
-                  </a:tcPr>
-                </a:tc>
-                <a:tc>
-                  <a:txBody>
-                    <a:bodyPr/>
-                    <a:lstStyle/>
-                    <a:p>
-                      <a:pPr>
-                        <a:defRPr sz="650" b="0">
-                          <a:solidFill>
-                            <a:srgbClr val="0D1117"/>
-                          </a:solidFill>
-                          <a:latin typeface="Inter"/>
-                        </a:defRPr>
-                      </a:pPr>
-                      <a:r>
-                        <a:rPr>
-                          <a:latin typeface="Inter"/>
-                        </a:rPr>
-                        <a:t>f6a7b8c9</a:t>
-                      </a:r>
-                    </a:p>
-                  </a:txBody>
-                  <a:tcPr marL="54864" marR="54864" marT="27432" marB="27432" anchor="ctr">
-                    <a:solidFill>
-                      <a:srgbClr val="F5F7F9"/>
-                    </a:solidFill>
-                  </a:tcPr>
-                </a:tc>
-              </a:tr>
-              <a:tr h="384810">
-                <a:tc>
-                  <a:txBody>
-                    <a:bodyPr/>
-                    <a:lstStyle/>
-                    <a:p>
-                      <a:pPr>
-                        <a:defRPr sz="650" b="1">
-                          <a:solidFill>
-                            <a:srgbClr val="0D1117"/>
-                          </a:solidFill>
-                          <a:latin typeface="Inter"/>
-                        </a:defRPr>
-                      </a:pPr>
-                      <a:r>
-                        <a:rPr>
-                          <a:latin typeface="Inter"/>
-                        </a:rPr>
-                        <a:t>S7</a:t>
-                      </a:r>
-                    </a:p>
-                  </a:txBody>
-                  <a:tcPr marL="54864" marR="54864" marT="27432" marB="27432" anchor="ctr">
-                    <a:solidFill>
-                      <a:srgbClr val="FFFFFF"/>
-                    </a:solidFill>
-                  </a:tcPr>
-                </a:tc>
-                <a:tc>
-                  <a:txBody>
-                    <a:bodyPr/>
-                    <a:lstStyle/>
-                    <a:p>
-                      <a:pPr>
-                        <a:defRPr sz="650" b="0">
-                          <a:solidFill>
-                            <a:srgbClr val="0D1117"/>
-                          </a:solidFill>
-                          <a:latin typeface="Inter"/>
-                        </a:defRPr>
-                      </a:pPr>
-                      <a:r>
-                        <a:rPr>
-                          <a:latin typeface="Inter"/>
-                        </a:rPr>
-                        <a:t>Cohort comparison</a:t>
-                      </a:r>
-                    </a:p>
-                  </a:txBody>
-                  <a:tcPr marL="54864" marR="54864" marT="27432" marB="27432" anchor="ctr">
-                    <a:solidFill>
-                      <a:srgbClr val="FFFFFF"/>
-                    </a:solidFill>
-                  </a:tcPr>
-                </a:tc>
-                <a:tc>
-                  <a:txBody>
-                    <a:bodyPr/>
-                    <a:lstStyle/>
-                    <a:p>
-                      <a:pPr>
-                        <a:defRPr sz="650" b="0">
-                          <a:solidFill>
-                            <a:srgbClr val="0D1117"/>
-                          </a:solidFill>
-                          <a:latin typeface="Inter"/>
-                        </a:defRPr>
-                      </a:pPr>
-                      <a:r>
-                        <a:rPr>
-                          <a:latin typeface="Inter"/>
-                        </a:rPr>
-                        <a:t>get_manager_odd_profile (comparison)</a:t>
-                      </a:r>
-                    </a:p>
-                  </a:txBody>
-                  <a:tcPr marL="54864" marR="54864" marT="27432" marB="27432" anchor="ctr">
-                    <a:solidFill>
-                      <a:srgbClr val="FFFFFF"/>
-                    </a:solidFill>
-                  </a:tcPr>
-                </a:tc>
-                <a:tc>
-                  <a:txBody>
-                    <a:bodyPr/>
-                    <a:lstStyle/>
-                    <a:p>
-                      <a:pPr>
-                        <a:defRPr sz="650" b="0">
-                          <a:solidFill>
-                            <a:srgbClr val="0D1117"/>
-                          </a:solidFill>
-                          <a:latin typeface="Inter"/>
-                        </a:defRPr>
-                      </a:pPr>
-                      <a:r>
-                        <a:rPr>
-                          <a:latin typeface="Inter"/>
-                        </a:rPr>
-                        <a:t>2026-10-01</a:t>
-                      </a:r>
-                    </a:p>
-                  </a:txBody>
-                  <a:tcPr marL="54864" marR="54864" marT="27432" marB="27432" anchor="ctr">
-                    <a:solidFill>
-                      <a:srgbClr val="FFFFFF"/>
-                    </a:solidFill>
-                  </a:tcPr>
-                </a:tc>
-                <a:tc>
-                  <a:txBody>
-                    <a:bodyPr/>
-                    <a:lstStyle/>
-                    <a:p>
-                      <a:pPr>
-                        <a:defRPr sz="650" b="1">
-                          <a:solidFill>
-                            <a:srgbClr val="9AA5B1"/>
-                          </a:solidFill>
-                          <a:latin typeface="Inter"/>
-                        </a:defRPr>
-                      </a:pPr>
-                      <a:r>
-                        <a:rPr>
-                          <a:latin typeface="Inter"/>
-                        </a:rPr>
-                        <a:t>● not_run</a:t>
-                      </a:r>
-                    </a:p>
-                  </a:txBody>
-                  <a:tcPr marL="54864" marR="54864" marT="27432" marB="27432" anchor="ctr">
-                    <a:solidFill>
-                      <a:srgbClr val="F5F7F9"/>
-                    </a:solidFill>
-                  </a:tcPr>
-                </a:tc>
-                <a:tc>
-                  <a:txBody>
-                    <a:bodyPr/>
-                    <a:lstStyle/>
-                    <a:p>
-                      <a:pPr>
-                        <a:defRPr sz="650" b="0">
-                          <a:solidFill>
-                            <a:srgbClr val="0D1117"/>
-                          </a:solidFill>
-                          <a:latin typeface="Inter"/>
-                        </a:defRPr>
-                      </a:pPr>
-                      <a:r>
-                        <a:rPr>
-                          <a:latin typeface="Inter"/>
-                        </a:rPr>
-                        <a:t>a7b8c9d0</a:t>
-                      </a:r>
-                    </a:p>
-                  </a:txBody>
-                  <a:tcPr marL="54864" marR="54864" marT="27432" marB="27432" anchor="ctr">
-                    <a:solidFill>
-                      <a:srgbClr val="FFFFFF"/>
-                    </a:solidFill>
-                  </a:tcPr>
-                </a:tc>
-              </a:tr>
-              <a:tr h="384810">
-                <a:tc>
-                  <a:txBody>
-                    <a:bodyPr/>
-                    <a:lstStyle/>
-                    <a:p>
-                      <a:pPr>
-                        <a:defRPr sz="650" b="1">
-                          <a:solidFill>
-                            <a:srgbClr val="0D1117"/>
-                          </a:solidFill>
-                          <a:latin typeface="Inter"/>
-                        </a:defRPr>
-                      </a:pPr>
-                      <a:r>
-                        <a:rPr>
-                          <a:latin typeface="Inter"/>
-                        </a:rPr>
-                        <a:t>S8</a:t>
-                      </a:r>
-                    </a:p>
-                  </a:txBody>
-                  <a:tcPr marL="54864" marR="54864" marT="27432" marB="27432" anchor="ctr">
-                    <a:solidFill>
-                      <a:srgbClr val="F5F7F9"/>
-                    </a:solidFill>
-                  </a:tcPr>
-                </a:tc>
-                <a:tc>
-                  <a:txBody>
-                    <a:bodyPr/>
-                    <a:lstStyle/>
-                    <a:p>
-                      <a:pPr>
-                        <a:defRPr sz="650" b="0">
-                          <a:solidFill>
-                            <a:srgbClr val="0D1117"/>
-                          </a:solidFill>
-                          <a:latin typeface="Inter"/>
-                        </a:defRPr>
-                      </a:pPr>
-                      <a:r>
-                        <a:rPr>
-                          <a:latin typeface="Inter"/>
-                        </a:rPr>
-                        <a:t>ADV–13F consistency — Ridgeview</a:t>
-                      </a:r>
-                    </a:p>
-                  </a:txBody>
-                  <a:tcPr marL="54864" marR="54864" marT="27432" marB="27432" anchor="ctr">
-                    <a:solidFill>
-                      <a:srgbClr val="F5F7F9"/>
-                    </a:solidFill>
-                  </a:tcPr>
-                </a:tc>
-                <a:tc>
-                  <a:txBody>
-                    <a:bodyPr/>
-                    <a:lstStyle/>
-                    <a:p>
-                      <a:pPr>
-                        <a:defRPr sz="650" b="0">
-                          <a:solidFill>
-                            <a:srgbClr val="0D1117"/>
-                          </a:solidFill>
-                          <a:latin typeface="Inter"/>
-                        </a:defRPr>
-                      </a:pPr>
-                      <a:r>
-                        <a:rPr>
-                          <a:latin typeface="Inter"/>
-                        </a:rPr>
-                        <a:t>get_cross_domain_research</a:t>
-                      </a:r>
-                    </a:p>
-                  </a:txBody>
-                  <a:tcPr marL="54864" marR="54864" marT="27432" marB="27432" anchor="ctr">
-                    <a:solidFill>
-                      <a:srgbClr val="F5F7F9"/>
-                    </a:solidFill>
-                  </a:tcPr>
-                </a:tc>
-                <a:tc>
-                  <a:txBody>
-                    <a:bodyPr/>
-                    <a:lstStyle/>
-                    <a:p>
-                      <a:pPr>
-                        <a:defRPr sz="650" b="0">
-                          <a:solidFill>
-                            <a:srgbClr val="0D1117"/>
-                          </a:solidFill>
-                          <a:latin typeface="Inter"/>
-                        </a:defRPr>
-                      </a:pPr>
-                      <a:r>
-                        <a:rPr>
-                          <a:latin typeface="Inter"/>
-                        </a:rPr>
-                        <a:t>2026-10-01</a:t>
-                      </a:r>
-                    </a:p>
-                  </a:txBody>
-                  <a:tcPr marL="54864" marR="54864" marT="27432" marB="27432" anchor="ctr">
-                    <a:solidFill>
-                      <a:srgbClr val="F5F7F9"/>
-                    </a:solidFill>
-                  </a:tcPr>
-                </a:tc>
-                <a:tc>
-                  <a:txBody>
-                    <a:bodyPr/>
-                    <a:lstStyle/>
-                    <a:p>
-                      <a:pPr>
-                        <a:defRPr sz="650" b="1">
-                          <a:solidFill>
-                            <a:srgbClr val="C6F432"/>
-                          </a:solidFill>
-                          <a:latin typeface="Inter"/>
-                        </a:defRPr>
-                      </a:pPr>
-                      <a:r>
-                        <a:rPr>
-                          <a:latin typeface="Inter"/>
-                        </a:rPr>
-                        <a:t>● passed</a:t>
-                      </a:r>
-                    </a:p>
-                  </a:txBody>
-                  <a:tcPr marL="54864" marR="54864" marT="27432" marB="27432" anchor="ctr">
-                    <a:solidFill>
-                      <a:srgbClr val="F5F7F9"/>
-                    </a:solidFill>
-                  </a:tcPr>
-                </a:tc>
-                <a:tc>
-                  <a:txBody>
-                    <a:bodyPr/>
-                    <a:lstStyle/>
-                    <a:p>
-                      <a:pPr>
-                        <a:defRPr sz="650" b="0">
-                          <a:solidFill>
-                            <a:srgbClr val="0D1117"/>
-                          </a:solidFill>
-                          <a:latin typeface="Inter"/>
-                        </a:defRPr>
-                      </a:pPr>
-                      <a:r>
-                        <a:rPr>
-                          <a:latin typeface="Inter"/>
-                        </a:rPr>
-                        <a:t>b8c9d0e1</a:t>
-                      </a:r>
-                    </a:p>
-                  </a:txBody>
-                  <a:tcPr marL="54864" marR="54864" marT="27432" marB="27432" anchor="ctr">
-                    <a:solidFill>
-                      <a:srgbClr val="F5F7F9"/>
-                    </a:solidFill>
-                  </a:tcPr>
-                </a:tc>
-              </a:tr>
-              <a:tr h="384810">
-                <a:tc>
-                  <a:txBody>
-                    <a:bodyPr/>
-                    <a:lstStyle/>
-                    <a:p>
-                      <a:pPr>
-                        <a:defRPr sz="650" b="1">
-                          <a:solidFill>
-                            <a:srgbClr val="0D1117"/>
-                          </a:solidFill>
-                          <a:latin typeface="Inter"/>
-                        </a:defRPr>
-                      </a:pPr>
-                      <a:r>
-                        <a:rPr>
-                          <a:latin typeface="Inter"/>
-                        </a:rPr>
-                        <a:t>S9</a:t>
-                      </a:r>
-                    </a:p>
-                  </a:txBody>
-                  <a:tcPr marL="54864" marR="54864" marT="27432" marB="27432" anchor="ctr">
-                    <a:solidFill>
-                      <a:srgbClr val="FFFFFF"/>
-                    </a:solidFill>
-                  </a:tcPr>
-                </a:tc>
-                <a:tc>
-                  <a:txBody>
-                    <a:bodyPr/>
-                    <a:lstStyle/>
-                    <a:p>
-                      <a:pPr>
-                        <a:defRPr sz="650" b="0">
-                          <a:solidFill>
-                            <a:srgbClr val="0D1117"/>
-                          </a:solidFill>
-                          <a:latin typeface="Inter"/>
-                        </a:defRPr>
-                      </a:pPr>
-                      <a:r>
-                        <a:rPr>
-                          <a:latin typeface="Inter"/>
-                        </a:rPr>
-                        <a:t>Open findings — Ridgeview</a:t>
-                      </a:r>
-                    </a:p>
-                  </a:txBody>
-                  <a:tcPr marL="54864" marR="54864" marT="27432" marB="27432" anchor="ctr">
-                    <a:solidFill>
-                      <a:srgbClr val="FFFFFF"/>
-                    </a:solidFill>
-                  </a:tcPr>
-                </a:tc>
-                <a:tc>
-                  <a:txBody>
-                    <a:bodyPr/>
-                    <a:lstStyle/>
-                    <a:p>
-                      <a:pPr>
-                        <a:defRPr sz="650" b="0">
-                          <a:solidFill>
-                            <a:srgbClr val="0D1117"/>
-                          </a:solidFill>
-                          <a:latin typeface="Inter"/>
-                        </a:defRPr>
-                      </a:pPr>
-                      <a:r>
-                        <a:rPr>
-                          <a:latin typeface="Inter"/>
-                        </a:rPr>
-                        <a:t>get_manager_diligence_findings</a:t>
-                      </a:r>
-                    </a:p>
-                  </a:txBody>
-                  <a:tcPr marL="54864" marR="54864" marT="27432" marB="27432" anchor="ctr">
-                    <a:solidFill>
-                      <a:srgbClr val="FFFFFF"/>
-                    </a:solidFill>
-                  </a:tcPr>
-                </a:tc>
-                <a:tc>
-                  <a:txBody>
-                    <a:bodyPr/>
-                    <a:lstStyle/>
-                    <a:p>
-                      <a:pPr>
-                        <a:defRPr sz="650" b="0">
-                          <a:solidFill>
-                            <a:srgbClr val="0D1117"/>
-                          </a:solidFill>
-                          <a:latin typeface="Inter"/>
-                        </a:defRPr>
-                      </a:pPr>
-                      <a:r>
-                        <a:rPr>
-                          <a:latin typeface="Inter"/>
-                        </a:rPr>
-                        <a:t>2026-10-04</a:t>
-                      </a:r>
-                    </a:p>
-                  </a:txBody>
-                  <a:tcPr marL="54864" marR="54864" marT="27432" marB="27432" anchor="ctr">
-                    <a:solidFill>
-                      <a:srgbClr val="FFFFFF"/>
-                    </a:solidFill>
-                  </a:tcPr>
-                </a:tc>
-                <a:tc>
-                  <a:txBody>
-                    <a:bodyPr/>
-                    <a:lstStyle/>
-                    <a:p>
-                      <a:pPr>
-                        <a:defRPr sz="650" b="1">
-                          <a:solidFill>
-                            <a:srgbClr val="F2A93B"/>
-                          </a:solidFill>
-                          <a:latin typeface="Inter"/>
-                        </a:defRPr>
-                      </a:pPr>
-                      <a:r>
-                        <a:rPr>
-                          <a:latin typeface="Inter"/>
-                        </a:rPr>
-                        <a:t>● advisory</a:t>
-                      </a:r>
-                    </a:p>
-                  </a:txBody>
-                  <a:tcPr marL="54864" marR="54864" marT="27432" marB="27432" anchor="ctr">
-                    <a:solidFill>
-                      <a:srgbClr val="F5F7F9"/>
-                    </a:solidFill>
-                  </a:tcPr>
-                </a:tc>
-                <a:tc>
-                  <a:txBody>
-                    <a:bodyPr/>
-                    <a:lstStyle/>
-                    <a:p>
-                      <a:pPr>
-                        <a:defRPr sz="650" b="0">
-                          <a:solidFill>
-                            <a:srgbClr val="0D1117"/>
-                          </a:solidFill>
-                          <a:latin typeface="Inter"/>
-                        </a:defRPr>
-                      </a:pPr>
-                      <a:r>
-                        <a:rPr>
-                          <a:latin typeface="Inter"/>
-                        </a:rPr>
-                        <a:t>c9d0e1f2</a:t>
-                      </a:r>
-                    </a:p>
-                  </a:txBody>
-                  <a:tcPr marL="54864" marR="54864" marT="27432" marB="27432" anchor="ctr">
-                    <a:solidFill>
-                      <a:srgbClr val="FFFFFF"/>
-                    </a:solidFill>
-                  </a:tcPr>
-                </a:tc>
-              </a:tr>
-              <a:tr h="384810">
-                <a:tc>
-                  <a:txBody>
-                    <a:bodyPr/>
-                    <a:lstStyle/>
-                    <a:p>
-                      <a:pPr>
-                        <a:defRPr sz="650" b="1">
-                          <a:solidFill>
-                            <a:srgbClr val="0D1117"/>
-                          </a:solidFill>
-                          <a:latin typeface="Inter"/>
-                        </a:defRPr>
-                      </a:pPr>
-                      <a:r>
-                        <a:rPr>
-                          <a:latin typeface="Inter"/>
-                        </a:rPr>
-                        <a:t>S10</a:t>
-                      </a:r>
-                    </a:p>
-                  </a:txBody>
-                  <a:tcPr marL="54864" marR="54864" marT="27432" marB="27432" anchor="ctr">
-                    <a:solidFill>
-                      <a:srgbClr val="F5F7F9"/>
-                    </a:solidFill>
-                  </a:tcPr>
-                </a:tc>
-                <a:tc>
-                  <a:txBody>
-                    <a:bodyPr/>
-                    <a:lstStyle/>
-                    <a:p>
-                      <a:pPr>
-                        <a:defRPr sz="650" b="0">
-                          <a:solidFill>
-                            <a:srgbClr val="0D1117"/>
-                          </a:solidFill>
-                          <a:latin typeface="Inter"/>
-                        </a:defRPr>
-                      </a:pPr>
-                      <a:r>
-                        <a:rPr>
-                          <a:latin typeface="Inter"/>
-                        </a:rPr>
-                        <a:t>Firm events</a:t>
-                      </a:r>
-                    </a:p>
-                  </a:txBody>
-                  <a:tcPr marL="54864" marR="54864" marT="27432" marB="27432" anchor="ctr">
-                    <a:solidFill>
-                      <a:srgbClr val="F5F7F9"/>
-                    </a:solidFill>
-                  </a:tcPr>
-                </a:tc>
-                <a:tc>
-                  <a:txBody>
-                    <a:bodyPr/>
-                    <a:lstStyle/>
-                    <a:p>
-                      <a:pPr>
-                        <a:defRPr sz="650" b="0">
-                          <a:solidFill>
-                            <a:srgbClr val="0D1117"/>
-                          </a:solidFill>
-                          <a:latin typeface="Inter"/>
-                        </a:defRPr>
-                      </a:pPr>
-                      <a:r>
-                        <a:rPr>
-                          <a:latin typeface="Inter"/>
-                        </a:rPr>
-                        <a:t>get_firm_fund_events</a:t>
-                      </a:r>
-                    </a:p>
-                  </a:txBody>
-                  <a:tcPr marL="54864" marR="54864" marT="27432" marB="27432" anchor="ctr">
-                    <a:solidFill>
-                      <a:srgbClr val="F5F7F9"/>
-                    </a:solidFill>
-                  </a:tcPr>
-                </a:tc>
-                <a:tc>
-                  <a:txBody>
-                    <a:bodyPr/>
-                    <a:lstStyle/>
-                    <a:p>
-                      <a:pPr>
-                        <a:defRPr sz="650" b="0">
-                          <a:solidFill>
-                            <a:srgbClr val="0D1117"/>
-                          </a:solidFill>
-                          <a:latin typeface="Inter"/>
-                        </a:defRPr>
-                      </a:pPr>
-                      <a:r>
-                        <a:rPr>
-                          <a:latin typeface="Inter"/>
-                        </a:rPr>
-                        <a:t>2026-10-04</a:t>
-                      </a:r>
-                    </a:p>
-                  </a:txBody>
-                  <a:tcPr marL="54864" marR="54864" marT="27432" marB="27432" anchor="ctr">
-                    <a:solidFill>
-                      <a:srgbClr val="F5F7F9"/>
-                    </a:solidFill>
-                  </a:tcPr>
-                </a:tc>
-                <a:tc>
-                  <a:txBody>
-                    <a:bodyPr/>
-                    <a:lstStyle/>
-                    <a:p>
-                      <a:pPr>
-                        <a:defRPr sz="650" b="1">
-                          <a:solidFill>
-                            <a:srgbClr val="C6F432"/>
-                          </a:solidFill>
-                          <a:latin typeface="Inter"/>
-                        </a:defRPr>
-                      </a:pPr>
-                      <a:r>
-                        <a:rPr>
-                          <a:latin typeface="Inter"/>
-                        </a:rPr>
-                        <a:t>● passed</a:t>
-                      </a:r>
-                    </a:p>
-                  </a:txBody>
-                  <a:tcPr marL="54864" marR="54864" marT="27432" marB="27432" anchor="ctr">
-                    <a:solidFill>
-                      <a:srgbClr val="F5F7F9"/>
-                    </a:solidFill>
-                  </a:tcPr>
-                </a:tc>
-                <a:tc>
-                  <a:txBody>
-                    <a:bodyPr/>
-                    <a:lstStyle/>
-                    <a:p>
-                      <a:pPr>
-                        <a:defRPr sz="650" b="0">
-                          <a:solidFill>
-                            <a:srgbClr val="0D1117"/>
-                          </a:solidFill>
-                          <a:latin typeface="Inter"/>
-                        </a:defRPr>
-                      </a:pPr>
-                      <a:r>
-                        <a:rPr>
-                          <a:latin typeface="Inter"/>
-                        </a:rPr>
-                        <a:t>d0e1f2a3</a:t>
-                      </a:r>
-                    </a:p>
-                  </a:txBody>
-                  <a:tcPr marL="54864" marR="54864" marT="27432" marB="27432" anchor="ctr">
-                    <a:solidFill>
-                      <a:srgbClr val="F5F7F9"/>
-                    </a:solidFill>
-                  </a:tcPr>
-                </a:tc>
-              </a:tr>
-              <a:tr h="384810">
-                <a:tc>
-                  <a:txBody>
-                    <a:bodyPr/>
-                    <a:lstStyle/>
-                    <a:p>
-                      <a:pPr>
-                        <a:defRPr sz="650" b="1">
-                          <a:solidFill>
-                            <a:srgbClr val="0D1117"/>
-                          </a:solidFill>
-                          <a:latin typeface="Inter"/>
-                        </a:defRPr>
-                      </a:pPr>
-                      <a:r>
-                        <a:rPr>
-                          <a:latin typeface="Inter"/>
-                        </a:rPr>
-                        <a:t>S11</a:t>
-                      </a:r>
-                    </a:p>
-                  </a:txBody>
-                  <a:tcPr marL="54864" marR="54864" marT="27432" marB="27432" anchor="ctr">
-                    <a:solidFill>
-                      <a:srgbClr val="FFFFFF"/>
-                    </a:solidFill>
-                  </a:tcPr>
-                </a:tc>
-                <a:tc>
-                  <a:txBody>
-                    <a:bodyPr/>
-                    <a:lstStyle/>
-                    <a:p>
-                      <a:pPr>
-                        <a:defRPr sz="650" b="0">
-                          <a:solidFill>
-                            <a:srgbClr val="0D1117"/>
-                          </a:solidFill>
-                          <a:latin typeface="Inter"/>
-                        </a:defRPr>
-                      </a:pPr>
-                      <a:r>
-                        <a:rPr>
-                          <a:latin typeface="Inter"/>
-                        </a:rPr>
-                        <a:t>ADV–13F consistency — Harbor</a:t>
-                      </a:r>
-                    </a:p>
-                  </a:txBody>
-                  <a:tcPr marL="54864" marR="54864" marT="27432" marB="27432" anchor="ctr">
-                    <a:solidFill>
-                      <a:srgbClr val="FFFFFF"/>
-                    </a:solidFill>
-                  </a:tcPr>
-                </a:tc>
-                <a:tc>
-                  <a:txBody>
-                    <a:bodyPr/>
-                    <a:lstStyle/>
-                    <a:p>
-                      <a:pPr>
-                        <a:defRPr sz="650" b="0">
-                          <a:solidFill>
-                            <a:srgbClr val="0D1117"/>
-                          </a:solidFill>
-                          <a:latin typeface="Inter"/>
-                        </a:defRPr>
-                      </a:pPr>
-                      <a:r>
-                        <a:rPr>
-                          <a:latin typeface="Inter"/>
-                        </a:rPr>
-                        <a:t>get_cross_domain_research</a:t>
-                      </a:r>
-                    </a:p>
-                  </a:txBody>
-                  <a:tcPr marL="54864" marR="54864" marT="27432" marB="27432" anchor="ctr">
-                    <a:solidFill>
-                      <a:srgbClr val="FFFFFF"/>
-                    </a:solidFill>
-                  </a:tcPr>
-                </a:tc>
-                <a:tc>
-                  <a:txBody>
-                    <a:bodyPr/>
-                    <a:lstStyle/>
-                    <a:p>
-                      <a:pPr>
-                        <a:defRPr sz="650" b="0">
-                          <a:solidFill>
-                            <a:srgbClr val="0D1117"/>
-                          </a:solidFill>
-                          <a:latin typeface="Inter"/>
-                        </a:defRPr>
-                      </a:pPr>
-                      <a:r>
-                        <a:rPr>
-                          <a:latin typeface="Inter"/>
-                        </a:rPr>
-                        <a:t>2026-10-01</a:t>
-                      </a:r>
-                    </a:p>
-                  </a:txBody>
-                  <a:tcPr marL="54864" marR="54864" marT="27432" marB="27432" anchor="ctr">
-                    <a:solidFill>
-                      <a:srgbClr val="FFFFFF"/>
-                    </a:solidFill>
-                  </a:tcPr>
-                </a:tc>
-                <a:tc>
-                  <a:txBody>
-                    <a:bodyPr/>
-                    <a:lstStyle/>
-                    <a:p>
-                      <a:pPr>
-                        <a:defRPr sz="650" b="1">
-                          <a:solidFill>
-                            <a:srgbClr val="C6F432"/>
-                          </a:solidFill>
-                          <a:latin typeface="Inter"/>
-                        </a:defRPr>
-                      </a:pPr>
-                      <a:r>
-                        <a:rPr>
-                          <a:latin typeface="Inter"/>
-                        </a:rPr>
-                        <a:t>● passed</a:t>
-                      </a:r>
-                    </a:p>
-                  </a:txBody>
-                  <a:tcPr marL="54864" marR="54864" marT="27432" marB="27432" anchor="ctr">
-                    <a:solidFill>
-                      <a:srgbClr val="F5F7F9"/>
-                    </a:solidFill>
-                  </a:tcPr>
-                </a:tc>
-                <a:tc>
-                  <a:txBody>
-                    <a:bodyPr/>
-                    <a:lstStyle/>
-                    <a:p>
-                      <a:pPr>
-                        <a:defRPr sz="650" b="0">
-                          <a:solidFill>
-                            <a:srgbClr val="0D1117"/>
-                          </a:solidFill>
-                          <a:latin typeface="Inter"/>
-                        </a:defRPr>
-                      </a:pPr>
-                      <a:r>
-                        <a:rPr>
-                          <a:latin typeface="Inter"/>
-                        </a:rPr>
-                        <a:t>e1f2a3b4</a:t>
+                        <a:t>sha256:ac4c506efcb81b48fdc16e42bff6a13136fcc0a2b78fcad838a590e4fccee0ab</a:t>
                       </a:r>
                     </a:p>
                   </a:txBody>
@@ -17634,7 +19002,49 @@
       </p:graphicFrame>
       <p:sp>
         <p:nvSpPr>
-          <p:cNvPr id="9" name="Rectangle 8"/>
+          <p:cNvPr id="10" name="TextBox 9"/>
+          <p:cNvSpPr txBox="1"/>
+          <p:nvPr/>
+        </p:nvSpPr>
+        <p:spPr>
+          <a:xfrm>
+            <a:off x="640080" y="6035040"/>
+            <a:ext cx="10908792" cy="164592"/>
+          </a:xfrm>
+          <a:prstGeom prst="rect">
+            <a:avLst/>
+          </a:prstGeom>
+          <a:noFill/>
+        </p:spPr>
+        <p:txBody>
+          <a:bodyPr wrap="none" lIns="9144" rIns="9144" tIns="9144" bIns="9144" anchor="t">
+            <a:spAutoFit/>
+          </a:bodyPr>
+          <a:lstStyle/>
+          <a:p>
+            <a:pPr algn="l">
+              <a:spcAft>
+                <a:spcPts val="0"/>
+              </a:spcAft>
+              <a:defRPr sz="680" b="0">
+                <a:solidFill>
+                  <a:srgbClr val="8A94A1"/>
+                </a:solidFill>
+                <a:latin typeface="Inter"/>
+              </a:defRPr>
+            </a:pPr>
+            <a:r>
+              <a:rPr>
+                <a:latin typeface="Inter"/>
+              </a:rPr>
+              <a:t>Illustrative, Gradient Maintained — demo data, not the client's holdings or managers. All organizations, portfolios, managers and results in this public example are illustrative.</a:t>
+            </a:r>
+          </a:p>
+        </p:txBody>
+      </p:sp>
+      <p:sp>
+        <p:nvSpPr>
+          <p:cNvPr id="11" name="Rectangle 10"/>
           <p:cNvSpPr/>
           <p:nvPr/>
         </p:nvSpPr>
@@ -17683,7 +19093,7 @@
       </p:sp>
       <p:sp>
         <p:nvSpPr>
-          <p:cNvPr id="10" name="TextBox 9"/>
+          <p:cNvPr id="12" name="TextBox 11"/>
           <p:cNvSpPr txBox="1"/>
           <p:nvPr/>
         </p:nvSpPr>
@@ -17725,7 +19135,7 @@
       </p:sp>
       <p:sp>
         <p:nvSpPr>
-          <p:cNvPr id="11" name="TextBox 10"/>
+          <p:cNvPr id="13" name="TextBox 12"/>
           <p:cNvSpPr txBox="1"/>
           <p:nvPr/>
         </p:nvSpPr>
@@ -17760,14 +19170,14 @@
               <a:rPr>
                 <a:latin typeface="Inter"/>
               </a:rPr>
-              <a:t>RENDER TEST — fictional managers, not a real comparison · Data as of 2026-10-01 (Form ADV); 2026-06-30 (Form 13F)</a:t>
+              <a:t>Confidential — manager diligence review · Data as of 2026-10-01 (Form ADV); 2026-06-30 (Form 13F)</a:t>
             </a:r>
           </a:p>
         </p:txBody>
       </p:sp>
       <p:sp>
         <p:nvSpPr>
-          <p:cNvPr id="12" name="TextBox 11"/>
+          <p:cNvPr id="14" name="TextBox 13"/>
           <p:cNvSpPr txBox="1"/>
           <p:nvPr/>
         </p:nvSpPr>
@@ -17883,7 +19293,7 @@
         <p:spPr>
           <a:xfrm>
             <a:off x="640080" y="329184"/>
-            <a:ext cx="9875520" cy="182880"/>
+            <a:ext cx="5303520" cy="182880"/>
           </a:xfrm>
           <a:prstGeom prst="rect">
             <a:avLst/>
@@ -17924,6 +19334,48 @@
         </p:nvSpPr>
         <p:spPr>
           <a:xfrm>
+            <a:off x="5897880" y="310896"/>
+            <a:ext cx="4800600" cy="256032"/>
+          </a:xfrm>
+          <a:prstGeom prst="rect">
+            <a:avLst/>
+          </a:prstGeom>
+          <a:noFill/>
+        </p:spPr>
+        <p:txBody>
+          <a:bodyPr wrap="none" lIns="9144" rIns="9144" tIns="9144" bIns="9144" anchor="t">
+            <a:spAutoFit/>
+          </a:bodyPr>
+          <a:lstStyle/>
+          <a:p>
+            <a:pPr algn="r">
+              <a:spcAft>
+                <a:spcPts val="0"/>
+              </a:spcAft>
+              <a:defRPr sz="680" b="1">
+                <a:solidFill>
+                  <a:srgbClr val="4F6B00"/>
+                </a:solidFill>
+                <a:latin typeface="Inter"/>
+              </a:defRPr>
+            </a:pPr>
+            <a:r>
+              <a:rPr>
+                <a:latin typeface="Inter"/>
+              </a:rPr>
+              <a:t>Illustrative, Gradient Maintained — demo data, not the client's holdings or managers</a:t>
+            </a:r>
+          </a:p>
+        </p:txBody>
+      </p:sp>
+      <p:sp>
+        <p:nvSpPr>
+          <p:cNvPr id="5" name="TextBox 4"/>
+          <p:cNvSpPr txBox="1"/>
+          <p:nvPr/>
+        </p:nvSpPr>
+        <p:spPr>
+          <a:xfrm>
             <a:off x="640080" y="566928"/>
             <a:ext cx="10058400" cy="530352"/>
           </a:xfrm>
@@ -17960,7 +19412,7 @@
       </p:sp>
       <p:sp>
         <p:nvSpPr>
-          <p:cNvPr id="5" name="Rectangle 4"/>
+          <p:cNvPr id="6" name="Rectangle 5"/>
           <p:cNvSpPr/>
           <p:nvPr/>
         </p:nvSpPr>
@@ -18009,7 +19461,7 @@
       </p:sp>
       <p:sp>
         <p:nvSpPr>
-          <p:cNvPr id="6" name="Rectangle 5"/>
+          <p:cNvPr id="7" name="Rectangle 6"/>
           <p:cNvSpPr/>
           <p:nvPr/>
         </p:nvSpPr>
@@ -18058,7 +19510,7 @@
       </p:sp>
       <p:sp>
         <p:nvSpPr>
-          <p:cNvPr id="7" name="TextBox 6"/>
+          <p:cNvPr id="8" name="TextBox 7"/>
           <p:cNvSpPr txBox="1"/>
           <p:nvPr/>
         </p:nvSpPr>
@@ -18100,7 +19552,7 @@
       </p:sp>
       <p:sp>
         <p:nvSpPr>
-          <p:cNvPr id="8" name="Rectangle 7"/>
+          <p:cNvPr id="9" name="Rectangle 8"/>
           <p:cNvSpPr/>
           <p:nvPr/>
         </p:nvSpPr>
@@ -18149,7 +19601,7 @@
       </p:sp>
       <p:sp>
         <p:nvSpPr>
-          <p:cNvPr id="9" name="Rectangle 8"/>
+          <p:cNvPr id="10" name="Rectangle 9"/>
           <p:cNvSpPr/>
           <p:nvPr/>
         </p:nvSpPr>
@@ -18198,7 +19650,7 @@
       </p:sp>
       <p:sp>
         <p:nvSpPr>
-          <p:cNvPr id="10" name="TextBox 9"/>
+          <p:cNvPr id="11" name="TextBox 10"/>
           <p:cNvSpPr txBox="1"/>
           <p:nvPr/>
         </p:nvSpPr>
@@ -18240,7 +19692,7 @@
       </p:sp>
       <p:sp>
         <p:nvSpPr>
-          <p:cNvPr id="11" name="TextBox 10"/>
+          <p:cNvPr id="12" name="TextBox 11"/>
           <p:cNvSpPr txBox="1"/>
           <p:nvPr/>
         </p:nvSpPr>
@@ -18282,7 +19734,7 @@
       </p:sp>
       <p:sp>
         <p:nvSpPr>
-          <p:cNvPr id="12" name="Rectangle 11"/>
+          <p:cNvPr id="13" name="Rectangle 12"/>
           <p:cNvSpPr/>
           <p:nvPr/>
         </p:nvSpPr>
@@ -18331,7 +19783,7 @@
       </p:sp>
       <p:sp>
         <p:nvSpPr>
-          <p:cNvPr id="13" name="Rectangle 12"/>
+          <p:cNvPr id="14" name="Rectangle 13"/>
           <p:cNvSpPr/>
           <p:nvPr/>
         </p:nvSpPr>
@@ -18380,7 +19832,7 @@
       </p:sp>
       <p:sp>
         <p:nvSpPr>
-          <p:cNvPr id="14" name="TextBox 13"/>
+          <p:cNvPr id="15" name="TextBox 14"/>
           <p:cNvSpPr txBox="1"/>
           <p:nvPr/>
         </p:nvSpPr>
@@ -18422,7 +19874,7 @@
       </p:sp>
       <p:sp>
         <p:nvSpPr>
-          <p:cNvPr id="15" name="TextBox 14"/>
+          <p:cNvPr id="16" name="TextBox 15"/>
           <p:cNvSpPr txBox="1"/>
           <p:nvPr/>
         </p:nvSpPr>
@@ -18464,7 +19916,7 @@
       </p:sp>
       <p:sp>
         <p:nvSpPr>
-          <p:cNvPr id="16" name="TextBox 15"/>
+          <p:cNvPr id="17" name="TextBox 16"/>
           <p:cNvSpPr txBox="1"/>
           <p:nvPr/>
         </p:nvSpPr>
@@ -18506,7 +19958,7 @@
       </p:sp>
       <p:sp>
         <p:nvSpPr>
-          <p:cNvPr id="17" name="Rectangle 16"/>
+          <p:cNvPr id="18" name="Rectangle 17"/>
           <p:cNvSpPr/>
           <p:nvPr/>
         </p:nvSpPr>
@@ -18555,7 +20007,7 @@
       </p:sp>
       <p:sp>
         <p:nvSpPr>
-          <p:cNvPr id="18" name="Rectangle 17"/>
+          <p:cNvPr id="19" name="Rectangle 18"/>
           <p:cNvSpPr/>
           <p:nvPr/>
         </p:nvSpPr>
@@ -18604,7 +20056,7 @@
       </p:sp>
       <p:sp>
         <p:nvSpPr>
-          <p:cNvPr id="19" name="TextBox 18"/>
+          <p:cNvPr id="20" name="TextBox 19"/>
           <p:cNvSpPr txBox="1"/>
           <p:nvPr/>
         </p:nvSpPr>
@@ -18646,7 +20098,7 @@
       </p:sp>
       <p:sp>
         <p:nvSpPr>
-          <p:cNvPr id="20" name="TextBox 19"/>
+          <p:cNvPr id="21" name="TextBox 20"/>
           <p:cNvSpPr txBox="1"/>
           <p:nvPr/>
         </p:nvSpPr>
@@ -18688,7 +20140,7 @@
       </p:sp>
       <p:sp>
         <p:nvSpPr>
-          <p:cNvPr id="21" name="TextBox 20"/>
+          <p:cNvPr id="22" name="TextBox 21"/>
           <p:cNvSpPr txBox="1"/>
           <p:nvPr/>
         </p:nvSpPr>
@@ -18730,7 +20182,7 @@
       </p:sp>
       <p:sp>
         <p:nvSpPr>
-          <p:cNvPr id="22" name="Rectangle 21"/>
+          <p:cNvPr id="23" name="Rectangle 22"/>
           <p:cNvSpPr/>
           <p:nvPr/>
         </p:nvSpPr>
@@ -18779,7 +20231,7 @@
       </p:sp>
       <p:sp>
         <p:nvSpPr>
-          <p:cNvPr id="23" name="Rectangle 22"/>
+          <p:cNvPr id="24" name="Rectangle 23"/>
           <p:cNvSpPr/>
           <p:nvPr/>
         </p:nvSpPr>
@@ -18828,7 +20280,7 @@
       </p:sp>
       <p:sp>
         <p:nvSpPr>
-          <p:cNvPr id="24" name="TextBox 23"/>
+          <p:cNvPr id="25" name="TextBox 24"/>
           <p:cNvSpPr txBox="1"/>
           <p:nvPr/>
         </p:nvSpPr>
@@ -18870,7 +20322,7 @@
       </p:sp>
       <p:sp>
         <p:nvSpPr>
-          <p:cNvPr id="25" name="TextBox 24"/>
+          <p:cNvPr id="26" name="TextBox 25"/>
           <p:cNvSpPr txBox="1"/>
           <p:nvPr/>
         </p:nvSpPr>
@@ -18912,7 +20364,7 @@
       </p:sp>
       <p:sp>
         <p:nvSpPr>
-          <p:cNvPr id="26" name="TextBox 25"/>
+          <p:cNvPr id="27" name="TextBox 26"/>
           <p:cNvSpPr txBox="1"/>
           <p:nvPr/>
         </p:nvSpPr>
@@ -18954,7 +20406,7 @@
       </p:sp>
       <p:sp>
         <p:nvSpPr>
-          <p:cNvPr id="27" name="Rectangle 26"/>
+          <p:cNvPr id="28" name="Rectangle 27"/>
           <p:cNvSpPr/>
           <p:nvPr/>
         </p:nvSpPr>
@@ -19003,7 +20455,7 @@
       </p:sp>
       <p:sp>
         <p:nvSpPr>
-          <p:cNvPr id="28" name="Rectangle 27"/>
+          <p:cNvPr id="29" name="Rectangle 28"/>
           <p:cNvSpPr/>
           <p:nvPr/>
         </p:nvSpPr>
@@ -19052,7 +20504,7 @@
       </p:sp>
       <p:sp>
         <p:nvSpPr>
-          <p:cNvPr id="29" name="TextBox 28"/>
+          <p:cNvPr id="30" name="TextBox 29"/>
           <p:cNvSpPr txBox="1"/>
           <p:nvPr/>
         </p:nvSpPr>
@@ -19094,7 +20546,7 @@
       </p:sp>
       <p:sp>
         <p:nvSpPr>
-          <p:cNvPr id="30" name="TextBox 29"/>
+          <p:cNvPr id="31" name="TextBox 30"/>
           <p:cNvSpPr txBox="1"/>
           <p:nvPr/>
         </p:nvSpPr>
@@ -19136,7 +20588,7 @@
       </p:sp>
       <p:sp>
         <p:nvSpPr>
-          <p:cNvPr id="31" name="TextBox 30"/>
+          <p:cNvPr id="32" name="TextBox 31"/>
           <p:cNvSpPr txBox="1"/>
           <p:nvPr/>
         </p:nvSpPr>
@@ -19178,7 +20630,7 @@
       </p:sp>
       <p:sp>
         <p:nvSpPr>
-          <p:cNvPr id="32" name="Rectangle 31"/>
+          <p:cNvPr id="33" name="Rectangle 32"/>
           <p:cNvSpPr/>
           <p:nvPr/>
         </p:nvSpPr>
@@ -19227,7 +20679,7 @@
       </p:sp>
       <p:sp>
         <p:nvSpPr>
-          <p:cNvPr id="33" name="TextBox 32"/>
+          <p:cNvPr id="34" name="TextBox 33"/>
           <p:cNvSpPr txBox="1"/>
           <p:nvPr/>
         </p:nvSpPr>
@@ -19269,7 +20721,7 @@
       </p:sp>
       <p:sp>
         <p:nvSpPr>
-          <p:cNvPr id="34" name="TextBox 33"/>
+          <p:cNvPr id="35" name="TextBox 34"/>
           <p:cNvSpPr txBox="1"/>
           <p:nvPr/>
         </p:nvSpPr>
@@ -19304,14 +20756,14 @@
               <a:rPr>
                 <a:latin typeface="Inter"/>
               </a:rPr>
-              <a:t>RENDER TEST — fictional managers, not a real comparison · Data as of 2026-10-01 (Form ADV); 2026-06-30 (Form 13F)</a:t>
+              <a:t>Confidential — manager diligence review · Data as of 2026-10-01 (Form ADV); 2026-06-30 (Form 13F)</a:t>
             </a:r>
           </a:p>
         </p:txBody>
       </p:sp>
       <p:sp>
         <p:nvSpPr>
-          <p:cNvPr id="35" name="TextBox 34"/>
+          <p:cNvPr id="36" name="TextBox 35"/>
           <p:cNvSpPr txBox="1"/>
           <p:nvPr/>
         </p:nvSpPr>
@@ -19426,6 +20878,48 @@
         </p:nvSpPr>
         <p:spPr>
           <a:xfrm>
+            <a:off x="5897880" y="310896"/>
+            <a:ext cx="4800600" cy="256032"/>
+          </a:xfrm>
+          <a:prstGeom prst="rect">
+            <a:avLst/>
+          </a:prstGeom>
+          <a:noFill/>
+        </p:spPr>
+        <p:txBody>
+          <a:bodyPr wrap="none" lIns="9144" rIns="9144" tIns="9144" bIns="9144" anchor="t">
+            <a:spAutoFit/>
+          </a:bodyPr>
+          <a:lstStyle/>
+          <a:p>
+            <a:pPr algn="r">
+              <a:spcAft>
+                <a:spcPts val="0"/>
+              </a:spcAft>
+              <a:defRPr sz="680" b="1">
+                <a:solidFill>
+                  <a:srgbClr val="4F6B00"/>
+                </a:solidFill>
+                <a:latin typeface="Inter"/>
+              </a:defRPr>
+            </a:pPr>
+            <a:r>
+              <a:rPr>
+                <a:latin typeface="Inter"/>
+              </a:rPr>
+              <a:t>Illustrative, Gradient Maintained — demo data, not the client's holdings or managers</a:t>
+            </a:r>
+          </a:p>
+        </p:txBody>
+      </p:sp>
+      <p:sp>
+        <p:nvSpPr>
+          <p:cNvPr id="4" name="TextBox 3"/>
+          <p:cNvSpPr txBox="1"/>
+          <p:nvPr/>
+        </p:nvSpPr>
+        <p:spPr>
+          <a:xfrm>
             <a:off x="640080" y="566928"/>
             <a:ext cx="10058400" cy="530352"/>
           </a:xfrm>
@@ -19455,14 +20949,14 @@
               <a:rPr>
                 <a:latin typeface="Inter"/>
               </a:rPr>
-              <a:t>Appendix A — Sources and method — continued</a:t>
+              <a:t>Appendix — Sources and methods — continued</a:t>
             </a:r>
           </a:p>
         </p:txBody>
       </p:sp>
       <p:sp>
         <p:nvSpPr>
-          <p:cNvPr id="4" name="Rectangle 3"/>
+          <p:cNvPr id="5" name="Rectangle 4"/>
           <p:cNvSpPr/>
           <p:nvPr/>
         </p:nvSpPr>
@@ -19511,7 +21005,7 @@
       </p:sp>
       <p:sp>
         <p:nvSpPr>
-          <p:cNvPr id="5" name="Rectangle 4"/>
+          <p:cNvPr id="6" name="Rectangle 5"/>
           <p:cNvSpPr/>
           <p:nvPr/>
         </p:nvSpPr>
@@ -19560,7 +21054,7 @@
       </p:sp>
       <p:sp>
         <p:nvSpPr>
-          <p:cNvPr id="6" name="TextBox 5"/>
+          <p:cNvPr id="7" name="TextBox 6"/>
           <p:cNvSpPr txBox="1"/>
           <p:nvPr/>
         </p:nvSpPr>
@@ -19602,7 +21096,7 @@
       </p:sp>
       <p:sp>
         <p:nvSpPr>
-          <p:cNvPr id="7" name="Rectangle 6"/>
+          <p:cNvPr id="8" name="Rectangle 7"/>
           <p:cNvSpPr/>
           <p:nvPr/>
         </p:nvSpPr>
@@ -19651,7 +21145,7 @@
       </p:sp>
       <p:sp>
         <p:nvSpPr>
-          <p:cNvPr id="8" name="Rectangle 7"/>
+          <p:cNvPr id="9" name="Rectangle 8"/>
           <p:cNvSpPr/>
           <p:nvPr/>
         </p:nvSpPr>
@@ -19700,7 +21194,7 @@
       </p:sp>
       <p:sp>
         <p:nvSpPr>
-          <p:cNvPr id="9" name="TextBox 8"/>
+          <p:cNvPr id="10" name="TextBox 9"/>
           <p:cNvSpPr txBox="1"/>
           <p:nvPr/>
         </p:nvSpPr>
@@ -19742,7 +21236,7 @@
       </p:sp>
       <p:sp>
         <p:nvSpPr>
-          <p:cNvPr id="10" name="TextBox 9"/>
+          <p:cNvPr id="11" name="TextBox 10"/>
           <p:cNvSpPr txBox="1"/>
           <p:nvPr/>
         </p:nvSpPr>
@@ -19784,7 +21278,7 @@
       </p:sp>
       <p:sp>
         <p:nvSpPr>
-          <p:cNvPr id="11" name="Rectangle 10"/>
+          <p:cNvPr id="12" name="Rectangle 11"/>
           <p:cNvSpPr/>
           <p:nvPr/>
         </p:nvSpPr>
@@ -19833,7 +21327,7 @@
       </p:sp>
       <p:sp>
         <p:nvSpPr>
-          <p:cNvPr id="12" name="TextBox 11"/>
+          <p:cNvPr id="13" name="TextBox 12"/>
           <p:cNvSpPr txBox="1"/>
           <p:nvPr/>
         </p:nvSpPr>
@@ -19875,7 +21369,7 @@
       </p:sp>
       <p:sp>
         <p:nvSpPr>
-          <p:cNvPr id="13" name="TextBox 12"/>
+          <p:cNvPr id="14" name="TextBox 13"/>
           <p:cNvSpPr txBox="1"/>
           <p:nvPr/>
         </p:nvSpPr>
@@ -19910,14 +21404,14 @@
               <a:rPr>
                 <a:latin typeface="Inter"/>
               </a:rPr>
-              <a:t>RENDER TEST — fictional managers, not a real comparison · Data as of 2026-10-01 (Form ADV); 2026-06-30 (Form 13F)</a:t>
+              <a:t>Confidential — manager diligence review · Data as of 2026-10-01 (Form ADV); 2026-06-30 (Form 13F)</a:t>
             </a:r>
           </a:p>
         </p:txBody>
       </p:sp>
       <p:sp>
         <p:nvSpPr>
-          <p:cNvPr id="14" name="TextBox 13"/>
+          <p:cNvPr id="15" name="TextBox 14"/>
           <p:cNvSpPr txBox="1"/>
           <p:nvPr/>
         </p:nvSpPr>
@@ -20032,6 +21526,48 @@
         </p:nvSpPr>
         <p:spPr>
           <a:xfrm>
+            <a:off x="5897880" y="310896"/>
+            <a:ext cx="4800600" cy="256032"/>
+          </a:xfrm>
+          <a:prstGeom prst="rect">
+            <a:avLst/>
+          </a:prstGeom>
+          <a:noFill/>
+        </p:spPr>
+        <p:txBody>
+          <a:bodyPr wrap="none" lIns="9144" rIns="9144" tIns="9144" bIns="9144" anchor="t">
+            <a:spAutoFit/>
+          </a:bodyPr>
+          <a:lstStyle/>
+          <a:p>
+            <a:pPr algn="r">
+              <a:spcAft>
+                <a:spcPts val="0"/>
+              </a:spcAft>
+              <a:defRPr sz="680" b="1">
+                <a:solidFill>
+                  <a:srgbClr val="4F6B00"/>
+                </a:solidFill>
+                <a:latin typeface="Inter"/>
+              </a:defRPr>
+            </a:pPr>
+            <a:r>
+              <a:rPr>
+                <a:latin typeface="Inter"/>
+              </a:rPr>
+              <a:t>Illustrative, Gradient Maintained — demo data, not the client's holdings or managers</a:t>
+            </a:r>
+          </a:p>
+        </p:txBody>
+      </p:sp>
+      <p:sp>
+        <p:nvSpPr>
+          <p:cNvPr id="4" name="TextBox 3"/>
+          <p:cNvSpPr txBox="1"/>
+          <p:nvPr/>
+        </p:nvSpPr>
+        <p:spPr>
+          <a:xfrm>
             <a:off x="640080" y="566928"/>
             <a:ext cx="10058400" cy="530352"/>
           </a:xfrm>
@@ -20061,14 +21597,14 @@
               <a:rPr>
                 <a:latin typeface="Inter"/>
               </a:rPr>
-              <a:t>Appendix A — Sources and method — continued</a:t>
+              <a:t>Appendix — Sources and methods — continued</a:t>
             </a:r>
           </a:p>
         </p:txBody>
       </p:sp>
       <p:sp>
         <p:nvSpPr>
-          <p:cNvPr id="4" name="Rectangle 3"/>
+          <p:cNvPr id="5" name="Rectangle 4"/>
           <p:cNvSpPr/>
           <p:nvPr/>
         </p:nvSpPr>
@@ -20117,7 +21653,7 @@
       </p:sp>
       <p:sp>
         <p:nvSpPr>
-          <p:cNvPr id="5" name="Rectangle 4"/>
+          <p:cNvPr id="6" name="Rectangle 5"/>
           <p:cNvSpPr/>
           <p:nvPr/>
         </p:nvSpPr>
@@ -20166,7 +21702,7 @@
       </p:sp>
       <p:sp>
         <p:nvSpPr>
-          <p:cNvPr id="6" name="TextBox 5"/>
+          <p:cNvPr id="7" name="TextBox 6"/>
           <p:cNvSpPr txBox="1"/>
           <p:nvPr/>
         </p:nvSpPr>
@@ -20208,7 +21744,7 @@
       </p:sp>
       <p:sp>
         <p:nvSpPr>
-          <p:cNvPr id="7" name="Rectangle 6"/>
+          <p:cNvPr id="8" name="Rectangle 7"/>
           <p:cNvSpPr/>
           <p:nvPr/>
         </p:nvSpPr>
@@ -20257,7 +21793,7 @@
       </p:sp>
       <p:sp>
         <p:nvSpPr>
-          <p:cNvPr id="8" name="Rectangle 7"/>
+          <p:cNvPr id="9" name="Rectangle 8"/>
           <p:cNvSpPr/>
           <p:nvPr/>
         </p:nvSpPr>
@@ -20306,7 +21842,7 @@
       </p:sp>
       <p:sp>
         <p:nvSpPr>
-          <p:cNvPr id="9" name="TextBox 8"/>
+          <p:cNvPr id="10" name="TextBox 9"/>
           <p:cNvSpPr txBox="1"/>
           <p:nvPr/>
         </p:nvSpPr>
@@ -20348,7 +21884,7 @@
       </p:sp>
       <p:sp>
         <p:nvSpPr>
-          <p:cNvPr id="10" name="TextBox 9"/>
+          <p:cNvPr id="11" name="TextBox 10"/>
           <p:cNvSpPr txBox="1"/>
           <p:nvPr/>
         </p:nvSpPr>
@@ -20383,14 +21919,14 @@
               <a:rPr>
                 <a:latin typeface="Inter"/>
               </a:rPr>
-              <a:t>Not investment, legal or compliance advice. No manager is ranked or recommended. Form ADV is adviser-reported, not SEC-verified. Form 13F is lagged, long-only reportable exposure. Percentiles are Gradient cohort positioning, not a quality ranking. All names and figures in this render test are fictional.</a:t>
+              <a:t>Not investment, legal or compliance advice. No manager is ranked or recommended. Form ADV is adviser-reported, not SEC-verified. Form 13F is lagged, long-only reportable exposure. Percentiles are Gradient cohort positioning, not a quality ranking. All names and figures in this public sample are illustrative.</a:t>
             </a:r>
           </a:p>
         </p:txBody>
       </p:sp>
       <p:sp>
         <p:nvSpPr>
-          <p:cNvPr id="11" name="Rectangle 10"/>
+          <p:cNvPr id="12" name="Rectangle 11"/>
           <p:cNvSpPr/>
           <p:nvPr/>
         </p:nvSpPr>
@@ -20439,7 +21975,7 @@
       </p:sp>
       <p:sp>
         <p:nvSpPr>
-          <p:cNvPr id="12" name="TextBox 11"/>
+          <p:cNvPr id="13" name="TextBox 12"/>
           <p:cNvSpPr txBox="1"/>
           <p:nvPr/>
         </p:nvSpPr>
@@ -20481,7 +22017,7 @@
       </p:sp>
       <p:sp>
         <p:nvSpPr>
-          <p:cNvPr id="13" name="TextBox 12"/>
+          <p:cNvPr id="14" name="TextBox 13"/>
           <p:cNvSpPr txBox="1"/>
           <p:nvPr/>
         </p:nvSpPr>
@@ -20516,14 +22052,14 @@
               <a:rPr>
                 <a:latin typeface="Inter"/>
               </a:rPr>
-              <a:t>RENDER TEST — fictional managers, not a real comparison · Data as of 2026-10-01 (Form ADV); 2026-06-30 (Form 13F)</a:t>
+              <a:t>Confidential — manager diligence review · Data as of 2026-10-01 (Form ADV); 2026-06-30 (Form 13F)</a:t>
             </a:r>
           </a:p>
         </p:txBody>
       </p:sp>
       <p:sp>
         <p:nvSpPr>
-          <p:cNvPr id="14" name="TextBox 13"/>
+          <p:cNvPr id="15" name="TextBox 14"/>
           <p:cNvSpPr txBox="1"/>
           <p:nvPr/>
         </p:nvSpPr>
@@ -20639,7 +22175,7 @@
         <p:spPr>
           <a:xfrm>
             <a:off x="640080" y="329184"/>
-            <a:ext cx="9875520" cy="182880"/>
+            <a:ext cx="5303520" cy="182880"/>
           </a:xfrm>
           <a:prstGeom prst="rect">
             <a:avLst/>
@@ -20680,6 +22216,48 @@
         </p:nvSpPr>
         <p:spPr>
           <a:xfrm>
+            <a:off x="5897880" y="310896"/>
+            <a:ext cx="4800600" cy="256032"/>
+          </a:xfrm>
+          <a:prstGeom prst="rect">
+            <a:avLst/>
+          </a:prstGeom>
+          <a:noFill/>
+        </p:spPr>
+        <p:txBody>
+          <a:bodyPr wrap="none" lIns="9144" rIns="9144" tIns="9144" bIns="9144" anchor="t">
+            <a:spAutoFit/>
+          </a:bodyPr>
+          <a:lstStyle/>
+          <a:p>
+            <a:pPr algn="r">
+              <a:spcAft>
+                <a:spcPts val="0"/>
+              </a:spcAft>
+              <a:defRPr sz="680" b="1">
+                <a:solidFill>
+                  <a:srgbClr val="4F6B00"/>
+                </a:solidFill>
+                <a:latin typeface="Inter"/>
+              </a:defRPr>
+            </a:pPr>
+            <a:r>
+              <a:rPr>
+                <a:latin typeface="Inter"/>
+              </a:rPr>
+              <a:t>Illustrative, Gradient Maintained — demo data, not the client's holdings or managers</a:t>
+            </a:r>
+          </a:p>
+        </p:txBody>
+      </p:sp>
+      <p:sp>
+        <p:nvSpPr>
+          <p:cNvPr id="5" name="TextBox 4"/>
+          <p:cNvSpPr txBox="1"/>
+          <p:nvPr/>
+        </p:nvSpPr>
+        <p:spPr>
+          <a:xfrm>
             <a:off x="640080" y="566928"/>
             <a:ext cx="10058400" cy="530352"/>
           </a:xfrm>
@@ -20716,7 +22294,7 @@
       </p:sp>
       <p:sp>
         <p:nvSpPr>
-          <p:cNvPr id="5" name="Rectangle 4"/>
+          <p:cNvPr id="6" name="Rectangle 5"/>
           <p:cNvSpPr/>
           <p:nvPr/>
         </p:nvSpPr>
@@ -20765,7 +22343,7 @@
       </p:sp>
       <p:sp>
         <p:nvSpPr>
-          <p:cNvPr id="6" name="Rectangle 5"/>
+          <p:cNvPr id="7" name="Rectangle 6"/>
           <p:cNvSpPr/>
           <p:nvPr/>
         </p:nvSpPr>
@@ -20814,7 +22392,7 @@
       </p:sp>
       <p:sp>
         <p:nvSpPr>
-          <p:cNvPr id="7" name="TextBox 6"/>
+          <p:cNvPr id="8" name="TextBox 7"/>
           <p:cNvSpPr txBox="1"/>
           <p:nvPr/>
         </p:nvSpPr>
@@ -20856,7 +22434,7 @@
       </p:sp>
       <p:sp>
         <p:nvSpPr>
-          <p:cNvPr id="8" name="TextBox 7"/>
+          <p:cNvPr id="9" name="TextBox 8"/>
           <p:cNvSpPr txBox="1"/>
           <p:nvPr/>
         </p:nvSpPr>
@@ -20898,7 +22476,7 @@
       </p:sp>
       <p:graphicFrame>
         <p:nvGraphicFramePr>
-          <p:cNvPr id="9" name="Table 8"/>
+          <p:cNvPr id="10" name="Table 9"/>
           <p:cNvGraphicFramePr>
             <a:graphicFrameLocks noGrp="1"/>
           </p:cNvGraphicFramePr>
@@ -20906,7 +22484,7 @@
         </p:nvGraphicFramePr>
         <p:xfrm>
           <a:off x="640080" y="1600200"/>
-          <a:ext cx="10908792" cy="1283734"/>
+          <a:ext cx="10908792" cy="1278879"/>
         </p:xfrm>
         <a:graphic>
           <a:graphicData uri="http://schemas.openxmlformats.org/drawingml/2006/table">
@@ -20921,7 +22499,7 @@
                 <a:gridCol w="2224278"/>
                 <a:gridCol w="2224278"/>
               </a:tblGrid>
-              <a:tr h="320933">
+              <a:tr h="319719">
                 <a:tc>
                   <a:txBody>
                     <a:bodyPr/>
@@ -21058,7 +22636,7 @@
                   </a:tcPr>
                 </a:tc>
               </a:tr>
-              <a:tr h="320933">
+              <a:tr h="319719">
                 <a:tc>
                   <a:txBody>
                     <a:bodyPr/>
@@ -21076,7 +22654,7 @@
                         <a:rPr>
                           <a:latin typeface="Inter"/>
                         </a:rPr>
-                        <a:t>Ridgeview Example Advisors (TEST)</a:t>
+                        <a:t>Ridgeview Advisors</a:t>
                       </a:r>
                     </a:p>
                   </a:txBody>
@@ -21195,7 +22773,7 @@
                   </a:tcPr>
                 </a:tc>
               </a:tr>
-              <a:tr h="320933">
+              <a:tr h="319719">
                 <a:tc>
                   <a:txBody>
                     <a:bodyPr/>
@@ -21213,7 +22791,7 @@
                         <a:rPr>
                           <a:latin typeface="Inter"/>
                         </a:rPr>
-                        <a:t>Harbor Example Capital (TEST)</a:t>
+                        <a:t>Harbor Example Capital</a:t>
                       </a:r>
                     </a:p>
                   </a:txBody>
@@ -21332,7 +22910,7 @@
                   </a:tcPr>
                 </a:tc>
               </a:tr>
-              <a:tr h="320935">
+              <a:tr h="319722">
                 <a:tc>
                   <a:txBody>
                     <a:bodyPr/>
@@ -21350,7 +22928,7 @@
                         <a:rPr>
                           <a:latin typeface="Inter"/>
                         </a:rPr>
-                        <a:t>Northfield Example Capital (TEST)</a:t>
+                        <a:t>Northfield Example Capital</a:t>
                       </a:r>
                     </a:p>
                   </a:txBody>
@@ -21475,13 +23053,13 @@
       </p:graphicFrame>
       <p:sp>
         <p:nvSpPr>
-          <p:cNvPr id="10" name="TextBox 9"/>
+          <p:cNvPr id="11" name="TextBox 10"/>
           <p:cNvSpPr txBox="1"/>
           <p:nvPr/>
         </p:nvSpPr>
         <p:spPr>
           <a:xfrm>
-            <a:off x="640080" y="2902222"/>
+            <a:off x="640080" y="2897367"/>
             <a:ext cx="10908792" cy="164592"/>
           </a:xfrm>
           <a:prstGeom prst="rect">
@@ -21517,14 +23095,14 @@
       </p:sp>
       <p:sp>
         <p:nvSpPr>
-          <p:cNvPr id="11" name="Rectangle 10"/>
+          <p:cNvPr id="12" name="Rectangle 11"/>
           <p:cNvSpPr/>
           <p:nvPr/>
         </p:nvSpPr>
         <p:spPr>
           <a:xfrm>
-            <a:off x="640080" y="3194830"/>
-            <a:ext cx="10908792" cy="1555804"/>
+            <a:off x="640080" y="3189975"/>
+            <a:ext cx="10908792" cy="1517128"/>
           </a:xfrm>
           <a:prstGeom prst="rect">
             <a:avLst/>
@@ -21566,14 +23144,14 @@
       </p:sp>
       <p:sp>
         <p:nvSpPr>
-          <p:cNvPr id="12" name="Rectangle 11"/>
+          <p:cNvPr id="13" name="Rectangle 12"/>
           <p:cNvSpPr/>
           <p:nvPr/>
         </p:nvSpPr>
         <p:spPr>
           <a:xfrm>
-            <a:off x="640080" y="3194830"/>
-            <a:ext cx="54864" cy="1555804"/>
+            <a:off x="640080" y="3189975"/>
+            <a:ext cx="54864" cy="1517128"/>
           </a:xfrm>
           <a:prstGeom prst="rect">
             <a:avLst/>
@@ -21615,13 +23193,13 @@
       </p:sp>
       <p:sp>
         <p:nvSpPr>
-          <p:cNvPr id="13" name="TextBox 12"/>
+          <p:cNvPr id="14" name="TextBox 13"/>
           <p:cNvSpPr txBox="1"/>
           <p:nvPr/>
         </p:nvSpPr>
         <p:spPr>
           <a:xfrm>
-            <a:off x="804671" y="3304558"/>
+            <a:off x="804671" y="3299703"/>
             <a:ext cx="10616184" cy="228600"/>
           </a:xfrm>
           <a:prstGeom prst="rect">
@@ -21657,14 +23235,14 @@
       </p:sp>
       <p:sp>
         <p:nvSpPr>
-          <p:cNvPr id="14" name="TextBox 13"/>
+          <p:cNvPr id="15" name="TextBox 14"/>
           <p:cNvSpPr txBox="1"/>
           <p:nvPr/>
         </p:nvSpPr>
         <p:spPr>
           <a:xfrm>
-            <a:off x="804671" y="3588022"/>
-            <a:ext cx="10616184" cy="1071172"/>
+            <a:off x="804671" y="3583167"/>
+            <a:ext cx="10616184" cy="1032496"/>
           </a:xfrm>
           <a:prstGeom prst="rect">
             <a:avLst/>
@@ -21692,21 +23270,21 @@
               <a:rPr>
                 <a:latin typeface="Inter"/>
               </a:rPr>
-              <a:t>Observation: The fictional TEST report carries a 2 of 3 managers with flags signal [S1]. Why it matters: This signal focuses oversight on the report's most decision-relevant condition. Uncertainty: Evidence coverage may exclude newer or more detailed observations. What would change the view: A governed refresh showing a different signal or breached threshold.</a:t>
+              <a:t>Observation: The sample report carries a 2 of 3 managers with flags signal [S1]. Why it matters: This signal focuses oversight on the report's most decision-relevant condition. Uncertainty: Evidence coverage may exclude newer or more detailed observations. What would change the view: A governed refresh showing a different signal or breached threshold.</a:t>
             </a:r>
           </a:p>
         </p:txBody>
       </p:sp>
       <p:sp>
         <p:nvSpPr>
-          <p:cNvPr id="15" name="Rectangle 14"/>
+          <p:cNvPr id="16" name="Rectangle 15"/>
           <p:cNvSpPr/>
           <p:nvPr/>
         </p:nvSpPr>
         <p:spPr>
           <a:xfrm>
-            <a:off x="640080" y="4860362"/>
-            <a:ext cx="10908792" cy="1357557"/>
+            <a:off x="640080" y="4816832"/>
+            <a:ext cx="10908792" cy="1401087"/>
           </a:xfrm>
           <a:prstGeom prst="rect">
             <a:avLst/>
@@ -21748,14 +23326,14 @@
       </p:sp>
       <p:sp>
         <p:nvSpPr>
-          <p:cNvPr id="16" name="Rectangle 15"/>
+          <p:cNvPr id="17" name="Rectangle 16"/>
           <p:cNvSpPr/>
           <p:nvPr/>
         </p:nvSpPr>
         <p:spPr>
           <a:xfrm>
-            <a:off x="640080" y="4860362"/>
-            <a:ext cx="54864" cy="1357557"/>
+            <a:off x="640080" y="4816832"/>
+            <a:ext cx="54864" cy="1401087"/>
           </a:xfrm>
           <a:prstGeom prst="rect">
             <a:avLst/>
@@ -21797,13 +23375,13 @@
       </p:sp>
       <p:sp>
         <p:nvSpPr>
-          <p:cNvPr id="17" name="TextBox 16"/>
+          <p:cNvPr id="18" name="TextBox 17"/>
           <p:cNvSpPr txBox="1"/>
           <p:nvPr/>
         </p:nvSpPr>
         <p:spPr>
           <a:xfrm>
-            <a:off x="804671" y="4970090"/>
+            <a:off x="804671" y="4926560"/>
             <a:ext cx="10616184" cy="228600"/>
           </a:xfrm>
           <a:prstGeom prst="rect">
@@ -21839,14 +23417,14 @@
       </p:sp>
       <p:sp>
         <p:nvSpPr>
-          <p:cNvPr id="18" name="TextBox 17"/>
+          <p:cNvPr id="19" name="TextBox 18"/>
           <p:cNvSpPr txBox="1"/>
           <p:nvPr/>
         </p:nvSpPr>
         <p:spPr>
           <a:xfrm>
-            <a:off x="804671" y="5253554"/>
-            <a:ext cx="10616184" cy="872925"/>
+            <a:off x="804671" y="5210024"/>
+            <a:ext cx="10616184" cy="916455"/>
           </a:xfrm>
           <a:prstGeom prst="rect">
             <a:avLst/>
@@ -21874,14 +23452,14 @@
               <a:rPr>
                 <a:latin typeface="Inter"/>
               </a:rPr>
-              <a:t>Observation: Managers compared is 3 in the TEST evidence [S2]. Why it matters: This measure establishes the baseline for comparing later governed results. Uncertainty: The source basis may omit newer observations outside this fixture. What would change the view: A refreshed source report showing a change above 1%.</a:t>
+              <a:t>Observation: Managers compared is 3 in the review evidence [S2]. Why it matters: This measure establishes the baseline for comparing later governed results. Uncertainty: The source basis may omit newer observations outside the reviewed evidence. What would change the view: A refreshed source report showing a change above 1%.</a:t>
             </a:r>
           </a:p>
         </p:txBody>
       </p:sp>
       <p:sp>
         <p:nvSpPr>
-          <p:cNvPr id="19" name="Rectangle 18"/>
+          <p:cNvPr id="20" name="Rectangle 19"/>
           <p:cNvSpPr/>
           <p:nvPr/>
         </p:nvSpPr>
@@ -21930,7 +23508,7 @@
       </p:sp>
       <p:sp>
         <p:nvSpPr>
-          <p:cNvPr id="20" name="TextBox 19"/>
+          <p:cNvPr id="21" name="TextBox 20"/>
           <p:cNvSpPr txBox="1"/>
           <p:nvPr/>
         </p:nvSpPr>
@@ -21972,7 +23550,7 @@
       </p:sp>
       <p:sp>
         <p:nvSpPr>
-          <p:cNvPr id="21" name="TextBox 20"/>
+          <p:cNvPr id="22" name="TextBox 21"/>
           <p:cNvSpPr txBox="1"/>
           <p:nvPr/>
         </p:nvSpPr>
@@ -22007,14 +23585,14 @@
               <a:rPr>
                 <a:latin typeface="Inter"/>
               </a:rPr>
-              <a:t>RENDER TEST — fictional managers, not a real comparison · Data as of 2026-10-01 (Form ADV); 2026-06-30 (Form 13F)</a:t>
+              <a:t>Confidential — manager diligence review · Data as of 2026-10-01 (Form ADV); 2026-06-30 (Form 13F)</a:t>
             </a:r>
           </a:p>
         </p:txBody>
       </p:sp>
       <p:sp>
         <p:nvSpPr>
-          <p:cNvPr id="22" name="TextBox 21"/>
+          <p:cNvPr id="23" name="TextBox 22"/>
           <p:cNvSpPr txBox="1"/>
           <p:nvPr/>
         </p:nvSpPr>
@@ -22130,7 +23708,7 @@
         <p:spPr>
           <a:xfrm>
             <a:off x="640080" y="329184"/>
-            <a:ext cx="9875520" cy="182880"/>
+            <a:ext cx="5303520" cy="182880"/>
           </a:xfrm>
           <a:prstGeom prst="rect">
             <a:avLst/>
@@ -22171,6 +23749,48 @@
         </p:nvSpPr>
         <p:spPr>
           <a:xfrm>
+            <a:off x="5897880" y="310896"/>
+            <a:ext cx="4800600" cy="256032"/>
+          </a:xfrm>
+          <a:prstGeom prst="rect">
+            <a:avLst/>
+          </a:prstGeom>
+          <a:noFill/>
+        </p:spPr>
+        <p:txBody>
+          <a:bodyPr wrap="none" lIns="9144" rIns="9144" tIns="9144" bIns="9144" anchor="t">
+            <a:spAutoFit/>
+          </a:bodyPr>
+          <a:lstStyle/>
+          <a:p>
+            <a:pPr algn="r">
+              <a:spcAft>
+                <a:spcPts val="0"/>
+              </a:spcAft>
+              <a:defRPr sz="680" b="1">
+                <a:solidFill>
+                  <a:srgbClr val="4F6B00"/>
+                </a:solidFill>
+                <a:latin typeface="Inter"/>
+              </a:defRPr>
+            </a:pPr>
+            <a:r>
+              <a:rPr>
+                <a:latin typeface="Inter"/>
+              </a:rPr>
+              <a:t>Illustrative, Gradient Maintained — demo data, not the client's holdings or managers</a:t>
+            </a:r>
+          </a:p>
+        </p:txBody>
+      </p:sp>
+      <p:sp>
+        <p:nvSpPr>
+          <p:cNvPr id="5" name="TextBox 4"/>
+          <p:cNvSpPr txBox="1"/>
+          <p:nvPr/>
+        </p:nvSpPr>
+        <p:spPr>
+          <a:xfrm>
             <a:off x="640080" y="566928"/>
             <a:ext cx="10058400" cy="530352"/>
           </a:xfrm>
@@ -22207,7 +23827,7 @@
       </p:sp>
       <p:sp>
         <p:nvSpPr>
-          <p:cNvPr id="5" name="Rectangle 4"/>
+          <p:cNvPr id="6" name="Rectangle 5"/>
           <p:cNvSpPr/>
           <p:nvPr/>
         </p:nvSpPr>
@@ -22256,7 +23876,7 @@
       </p:sp>
       <p:sp>
         <p:nvSpPr>
-          <p:cNvPr id="6" name="Rectangle 5"/>
+          <p:cNvPr id="7" name="Rectangle 6"/>
           <p:cNvSpPr/>
           <p:nvPr/>
         </p:nvSpPr>
@@ -22305,7 +23925,7 @@
       </p:sp>
       <p:sp>
         <p:nvSpPr>
-          <p:cNvPr id="7" name="TextBox 6"/>
+          <p:cNvPr id="8" name="TextBox 7"/>
           <p:cNvSpPr txBox="1"/>
           <p:nvPr/>
         </p:nvSpPr>
@@ -22347,7 +23967,7 @@
       </p:sp>
       <p:sp>
         <p:nvSpPr>
-          <p:cNvPr id="8" name="Rectangle 7"/>
+          <p:cNvPr id="9" name="Rectangle 8"/>
           <p:cNvSpPr/>
           <p:nvPr/>
         </p:nvSpPr>
@@ -22396,7 +24016,7 @@
       </p:sp>
       <p:sp>
         <p:nvSpPr>
-          <p:cNvPr id="9" name="Rectangle 8"/>
+          <p:cNvPr id="10" name="Rectangle 9"/>
           <p:cNvSpPr/>
           <p:nvPr/>
         </p:nvSpPr>
@@ -22445,7 +24065,7 @@
       </p:sp>
       <p:sp>
         <p:nvSpPr>
-          <p:cNvPr id="10" name="TextBox 9"/>
+          <p:cNvPr id="11" name="TextBox 10"/>
           <p:cNvSpPr txBox="1"/>
           <p:nvPr/>
         </p:nvSpPr>
@@ -22487,7 +24107,7 @@
       </p:sp>
       <p:sp>
         <p:nvSpPr>
-          <p:cNvPr id="11" name="TextBox 10"/>
+          <p:cNvPr id="12" name="TextBox 11"/>
           <p:cNvSpPr txBox="1"/>
           <p:nvPr/>
         </p:nvSpPr>
@@ -22522,14 +24142,14 @@
               <a:rPr>
                 <a:latin typeface="Inter"/>
               </a:rPr>
-              <a:t>Observation: Item 11 disclosures is 0 in the TEST evidence [S3]. Why it matters: This result determines which item receives priority in the next monitoring cycle. Uncertainty: Supporting coverage may omit later filings or corroborating detail. What would change the view: A new filing or report that resolves the item or changes it by 1%.</a:t>
+              <a:t>Observation: Item 11 disclosures is 0 in the review evidence [S3]. Why it matters: This result determines which item receives priority in the next monitoring cycle. Uncertainty: Supporting coverage may omit later filings or corroborating detail. What would change the view: A new filing or report that resolves the item or changes it by 1%.</a:t>
             </a:r>
           </a:p>
         </p:txBody>
       </p:sp>
       <p:sp>
         <p:nvSpPr>
-          <p:cNvPr id="12" name="Rectangle 11"/>
+          <p:cNvPr id="13" name="Rectangle 12"/>
           <p:cNvSpPr/>
           <p:nvPr/>
         </p:nvSpPr>
@@ -22578,7 +24198,7 @@
       </p:sp>
       <p:sp>
         <p:nvSpPr>
-          <p:cNvPr id="13" name="TextBox 12"/>
+          <p:cNvPr id="14" name="TextBox 13"/>
           <p:cNvSpPr txBox="1"/>
           <p:nvPr/>
         </p:nvSpPr>
@@ -22620,7 +24240,7 @@
       </p:sp>
       <p:sp>
         <p:nvSpPr>
-          <p:cNvPr id="14" name="TextBox 13"/>
+          <p:cNvPr id="15" name="TextBox 14"/>
           <p:cNvSpPr txBox="1"/>
           <p:nvPr/>
         </p:nvSpPr>
@@ -22655,14 +24275,14 @@
               <a:rPr>
                 <a:latin typeface="Inter"/>
               </a:rPr>
-              <a:t>RENDER TEST — fictional managers, not a real comparison · Data as of 2026-10-01 (Form ADV); 2026-06-30 (Form 13F)</a:t>
+              <a:t>Confidential — manager diligence review · Data as of 2026-10-01 (Form ADV); 2026-06-30 (Form 13F)</a:t>
             </a:r>
           </a:p>
         </p:txBody>
       </p:sp>
       <p:sp>
         <p:nvSpPr>
-          <p:cNvPr id="15" name="TextBox 14"/>
+          <p:cNvPr id="16" name="TextBox 15"/>
           <p:cNvSpPr txBox="1"/>
           <p:nvPr/>
         </p:nvSpPr>
@@ -22778,7 +24398,7 @@
         <p:spPr>
           <a:xfrm>
             <a:off x="640080" y="329184"/>
-            <a:ext cx="9875520" cy="182880"/>
+            <a:ext cx="5303520" cy="182880"/>
           </a:xfrm>
           <a:prstGeom prst="rect">
             <a:avLst/>
@@ -22819,6 +24439,48 @@
         </p:nvSpPr>
         <p:spPr>
           <a:xfrm>
+            <a:off x="5897880" y="310896"/>
+            <a:ext cx="4800600" cy="256032"/>
+          </a:xfrm>
+          <a:prstGeom prst="rect">
+            <a:avLst/>
+          </a:prstGeom>
+          <a:noFill/>
+        </p:spPr>
+        <p:txBody>
+          <a:bodyPr wrap="none" lIns="9144" rIns="9144" tIns="9144" bIns="9144" anchor="t">
+            <a:spAutoFit/>
+          </a:bodyPr>
+          <a:lstStyle/>
+          <a:p>
+            <a:pPr algn="r">
+              <a:spcAft>
+                <a:spcPts val="0"/>
+              </a:spcAft>
+              <a:defRPr sz="680" b="1">
+                <a:solidFill>
+                  <a:srgbClr val="4F6B00"/>
+                </a:solidFill>
+                <a:latin typeface="Inter"/>
+              </a:defRPr>
+            </a:pPr>
+            <a:r>
+              <a:rPr>
+                <a:latin typeface="Inter"/>
+              </a:rPr>
+              <a:t>Illustrative, Gradient Maintained — demo data, not the client's holdings or managers</a:t>
+            </a:r>
+          </a:p>
+        </p:txBody>
+      </p:sp>
+      <p:sp>
+        <p:nvSpPr>
+          <p:cNvPr id="5" name="TextBox 4"/>
+          <p:cNvSpPr txBox="1"/>
+          <p:nvPr/>
+        </p:nvSpPr>
+        <p:spPr>
+          <a:xfrm>
             <a:off x="640080" y="566928"/>
             <a:ext cx="10058400" cy="530352"/>
           </a:xfrm>
@@ -22855,7 +24517,7 @@
       </p:sp>
       <p:sp>
         <p:nvSpPr>
-          <p:cNvPr id="5" name="Rectangle 4"/>
+          <p:cNvPr id="6" name="Rectangle 5"/>
           <p:cNvSpPr/>
           <p:nvPr/>
         </p:nvSpPr>
@@ -22904,7 +24566,7 @@
       </p:sp>
       <p:sp>
         <p:nvSpPr>
-          <p:cNvPr id="6" name="Rectangle 5"/>
+          <p:cNvPr id="7" name="Rectangle 6"/>
           <p:cNvSpPr/>
           <p:nvPr/>
         </p:nvSpPr>
@@ -22953,7 +24615,7 @@
       </p:sp>
       <p:sp>
         <p:nvSpPr>
-          <p:cNvPr id="7" name="TextBox 6"/>
+          <p:cNvPr id="8" name="TextBox 7"/>
           <p:cNvSpPr txBox="1"/>
           <p:nvPr/>
         </p:nvSpPr>
@@ -22995,7 +24657,7 @@
       </p:sp>
       <p:sp>
         <p:nvSpPr>
-          <p:cNvPr id="8" name="TextBox 7"/>
+          <p:cNvPr id="9" name="TextBox 8"/>
           <p:cNvSpPr txBox="1"/>
           <p:nvPr/>
         </p:nvSpPr>
@@ -23037,7 +24699,7 @@
       </p:sp>
       <p:graphicFrame>
         <p:nvGraphicFramePr>
-          <p:cNvPr id="9" name="Chart 8"/>
+          <p:cNvPr id="10" name="Chart 9"/>
           <p:cNvGraphicFramePr>
             <a:graphicFrameLocks noGrp="1"/>
           </p:cNvGraphicFramePr>
@@ -23055,7 +24717,7 @@
       </p:graphicFrame>
       <p:sp>
         <p:nvSpPr>
-          <p:cNvPr id="10" name="Rectangle 9"/>
+          <p:cNvPr id="11" name="Rectangle 10"/>
           <p:cNvSpPr/>
           <p:nvPr/>
         </p:nvSpPr>
@@ -23104,7 +24766,7 @@
       </p:sp>
       <p:sp>
         <p:nvSpPr>
-          <p:cNvPr id="11" name="TextBox 10"/>
+          <p:cNvPr id="12" name="TextBox 11"/>
           <p:cNvSpPr txBox="1"/>
           <p:nvPr/>
         </p:nvSpPr>
@@ -23146,7 +24808,7 @@
       </p:sp>
       <p:sp>
         <p:nvSpPr>
-          <p:cNvPr id="12" name="TextBox 11"/>
+          <p:cNvPr id="13" name="TextBox 12"/>
           <p:cNvSpPr txBox="1"/>
           <p:nvPr/>
         </p:nvSpPr>
@@ -23181,14 +24843,14 @@
               <a:rPr>
                 <a:latin typeface="Inter"/>
               </a:rPr>
-              <a:t>RENDER TEST — fictional managers, not a real comparison · Data as of 2026-10-01 (Form ADV); 2026-06-30 (Form 13F)</a:t>
+              <a:t>Confidential — manager diligence review · Data as of 2026-10-01 (Form ADV); 2026-06-30 (Form 13F)</a:t>
             </a:r>
           </a:p>
         </p:txBody>
       </p:sp>
       <p:sp>
         <p:nvSpPr>
-          <p:cNvPr id="13" name="TextBox 12"/>
+          <p:cNvPr id="14" name="TextBox 13"/>
           <p:cNvSpPr txBox="1"/>
           <p:nvPr/>
         </p:nvSpPr>
@@ -23304,7 +24966,7 @@
         <p:spPr>
           <a:xfrm>
             <a:off x="640080" y="329184"/>
-            <a:ext cx="9875520" cy="182880"/>
+            <a:ext cx="5303520" cy="182880"/>
           </a:xfrm>
           <a:prstGeom prst="rect">
             <a:avLst/>
@@ -23345,6 +25007,48 @@
         </p:nvSpPr>
         <p:spPr>
           <a:xfrm>
+            <a:off x="5897880" y="310896"/>
+            <a:ext cx="4800600" cy="256032"/>
+          </a:xfrm>
+          <a:prstGeom prst="rect">
+            <a:avLst/>
+          </a:prstGeom>
+          <a:noFill/>
+        </p:spPr>
+        <p:txBody>
+          <a:bodyPr wrap="none" lIns="9144" rIns="9144" tIns="9144" bIns="9144" anchor="t">
+            <a:spAutoFit/>
+          </a:bodyPr>
+          <a:lstStyle/>
+          <a:p>
+            <a:pPr algn="r">
+              <a:spcAft>
+                <a:spcPts val="0"/>
+              </a:spcAft>
+              <a:defRPr sz="680" b="1">
+                <a:solidFill>
+                  <a:srgbClr val="4F6B00"/>
+                </a:solidFill>
+                <a:latin typeface="Inter"/>
+              </a:defRPr>
+            </a:pPr>
+            <a:r>
+              <a:rPr>
+                <a:latin typeface="Inter"/>
+              </a:rPr>
+              <a:t>Illustrative, Gradient Maintained — demo data, not the client's holdings or managers</a:t>
+            </a:r>
+          </a:p>
+        </p:txBody>
+      </p:sp>
+      <p:sp>
+        <p:nvSpPr>
+          <p:cNvPr id="5" name="TextBox 4"/>
+          <p:cNvSpPr txBox="1"/>
+          <p:nvPr/>
+        </p:nvSpPr>
+        <p:spPr>
+          <a:xfrm>
             <a:off x="640080" y="566928"/>
             <a:ext cx="10058400" cy="530352"/>
           </a:xfrm>
@@ -23381,7 +25085,7 @@
       </p:sp>
       <p:sp>
         <p:nvSpPr>
-          <p:cNvPr id="5" name="Rectangle 4"/>
+          <p:cNvPr id="6" name="Rectangle 5"/>
           <p:cNvSpPr/>
           <p:nvPr/>
         </p:nvSpPr>
@@ -23430,7 +25134,7 @@
       </p:sp>
       <p:sp>
         <p:nvSpPr>
-          <p:cNvPr id="6" name="Rectangle 5"/>
+          <p:cNvPr id="7" name="Rectangle 6"/>
           <p:cNvSpPr/>
           <p:nvPr/>
         </p:nvSpPr>
@@ -23479,7 +25183,7 @@
       </p:sp>
       <p:sp>
         <p:nvSpPr>
-          <p:cNvPr id="7" name="TextBox 6"/>
+          <p:cNvPr id="8" name="TextBox 7"/>
           <p:cNvSpPr txBox="1"/>
           <p:nvPr/>
         </p:nvSpPr>
@@ -23521,7 +25225,7 @@
       </p:sp>
       <p:sp>
         <p:nvSpPr>
-          <p:cNvPr id="8" name="TextBox 7"/>
+          <p:cNvPr id="9" name="TextBox 8"/>
           <p:cNvSpPr txBox="1"/>
           <p:nvPr/>
         </p:nvSpPr>
@@ -23563,7 +25267,7 @@
       </p:sp>
       <p:graphicFrame>
         <p:nvGraphicFramePr>
-          <p:cNvPr id="9" name="Chart 8"/>
+          <p:cNvPr id="10" name="Chart 9"/>
           <p:cNvGraphicFramePr>
             <a:graphicFrameLocks noGrp="1"/>
           </p:cNvGraphicFramePr>
@@ -23581,7 +25285,7 @@
       </p:graphicFrame>
       <p:sp>
         <p:nvSpPr>
-          <p:cNvPr id="10" name="Rectangle 9"/>
+          <p:cNvPr id="11" name="Rectangle 10"/>
           <p:cNvSpPr/>
           <p:nvPr/>
         </p:nvSpPr>
@@ -23630,7 +25334,7 @@
       </p:sp>
       <p:sp>
         <p:nvSpPr>
-          <p:cNvPr id="11" name="TextBox 10"/>
+          <p:cNvPr id="12" name="TextBox 11"/>
           <p:cNvSpPr txBox="1"/>
           <p:nvPr/>
         </p:nvSpPr>
@@ -23672,7 +25376,7 @@
       </p:sp>
       <p:sp>
         <p:nvSpPr>
-          <p:cNvPr id="12" name="TextBox 11"/>
+          <p:cNvPr id="13" name="TextBox 12"/>
           <p:cNvSpPr txBox="1"/>
           <p:nvPr/>
         </p:nvSpPr>
@@ -23707,14 +25411,14 @@
               <a:rPr>
                 <a:latin typeface="Inter"/>
               </a:rPr>
-              <a:t>RENDER TEST — fictional managers, not a real comparison · Data as of 2026-10-01 (Form ADV); 2026-06-30 (Form 13F)</a:t>
+              <a:t>Confidential — manager diligence review · Data as of 2026-10-01 (Form ADV); 2026-06-30 (Form 13F)</a:t>
             </a:r>
           </a:p>
         </p:txBody>
       </p:sp>
       <p:sp>
         <p:nvSpPr>
-          <p:cNvPr id="13" name="TextBox 12"/>
+          <p:cNvPr id="14" name="TextBox 13"/>
           <p:cNvSpPr txBox="1"/>
           <p:nvPr/>
         </p:nvSpPr>
@@ -23830,7 +25534,7 @@
         <p:spPr>
           <a:xfrm>
             <a:off x="640080" y="329184"/>
-            <a:ext cx="9875520" cy="182880"/>
+            <a:ext cx="5303520" cy="182880"/>
           </a:xfrm>
           <a:prstGeom prst="rect">
             <a:avLst/>
@@ -23871,6 +25575,48 @@
         </p:nvSpPr>
         <p:spPr>
           <a:xfrm>
+            <a:off x="5897880" y="310896"/>
+            <a:ext cx="4800600" cy="256032"/>
+          </a:xfrm>
+          <a:prstGeom prst="rect">
+            <a:avLst/>
+          </a:prstGeom>
+          <a:noFill/>
+        </p:spPr>
+        <p:txBody>
+          <a:bodyPr wrap="none" lIns="9144" rIns="9144" tIns="9144" bIns="9144" anchor="t">
+            <a:spAutoFit/>
+          </a:bodyPr>
+          <a:lstStyle/>
+          <a:p>
+            <a:pPr algn="r">
+              <a:spcAft>
+                <a:spcPts val="0"/>
+              </a:spcAft>
+              <a:defRPr sz="680" b="1">
+                <a:solidFill>
+                  <a:srgbClr val="4F6B00"/>
+                </a:solidFill>
+                <a:latin typeface="Inter"/>
+              </a:defRPr>
+            </a:pPr>
+            <a:r>
+              <a:rPr>
+                <a:latin typeface="Inter"/>
+              </a:rPr>
+              <a:t>Illustrative, Gradient Maintained — demo data, not the client's holdings or managers</a:t>
+            </a:r>
+          </a:p>
+        </p:txBody>
+      </p:sp>
+      <p:sp>
+        <p:nvSpPr>
+          <p:cNvPr id="5" name="TextBox 4"/>
+          <p:cNvSpPr txBox="1"/>
+          <p:nvPr/>
+        </p:nvSpPr>
+        <p:spPr>
+          <a:xfrm>
             <a:off x="640080" y="566928"/>
             <a:ext cx="10058400" cy="530352"/>
           </a:xfrm>
@@ -23907,7 +25653,7 @@
       </p:sp>
       <p:sp>
         <p:nvSpPr>
-          <p:cNvPr id="5" name="Rectangle 4"/>
+          <p:cNvPr id="6" name="Rectangle 5"/>
           <p:cNvSpPr/>
           <p:nvPr/>
         </p:nvSpPr>
@@ -23956,7 +25702,7 @@
       </p:sp>
       <p:sp>
         <p:nvSpPr>
-          <p:cNvPr id="6" name="Rectangle 5"/>
+          <p:cNvPr id="7" name="Rectangle 6"/>
           <p:cNvSpPr/>
           <p:nvPr/>
         </p:nvSpPr>
@@ -24005,7 +25751,7 @@
       </p:sp>
       <p:sp>
         <p:nvSpPr>
-          <p:cNvPr id="7" name="TextBox 6"/>
+          <p:cNvPr id="8" name="TextBox 7"/>
           <p:cNvSpPr txBox="1"/>
           <p:nvPr/>
         </p:nvSpPr>
@@ -24047,7 +25793,7 @@
       </p:sp>
       <p:sp>
         <p:nvSpPr>
-          <p:cNvPr id="8" name="TextBox 7"/>
+          <p:cNvPr id="9" name="TextBox 8"/>
           <p:cNvSpPr txBox="1"/>
           <p:nvPr/>
         </p:nvSpPr>
@@ -24089,7 +25835,7 @@
       </p:sp>
       <p:graphicFrame>
         <p:nvGraphicFramePr>
-          <p:cNvPr id="9" name="Chart 8"/>
+          <p:cNvPr id="10" name="Chart 9"/>
           <p:cNvGraphicFramePr>
             <a:graphicFrameLocks noGrp="1"/>
           </p:cNvGraphicFramePr>
@@ -24107,7 +25853,7 @@
       </p:graphicFrame>
       <p:sp>
         <p:nvSpPr>
-          <p:cNvPr id="10" name="Rectangle 9"/>
+          <p:cNvPr id="11" name="Rectangle 10"/>
           <p:cNvSpPr/>
           <p:nvPr/>
         </p:nvSpPr>
@@ -24156,7 +25902,7 @@
       </p:sp>
       <p:sp>
         <p:nvSpPr>
-          <p:cNvPr id="11" name="TextBox 10"/>
+          <p:cNvPr id="12" name="TextBox 11"/>
           <p:cNvSpPr txBox="1"/>
           <p:nvPr/>
         </p:nvSpPr>
@@ -24198,7 +25944,7 @@
       </p:sp>
       <p:sp>
         <p:nvSpPr>
-          <p:cNvPr id="12" name="TextBox 11"/>
+          <p:cNvPr id="13" name="TextBox 12"/>
           <p:cNvSpPr txBox="1"/>
           <p:nvPr/>
         </p:nvSpPr>
@@ -24233,14 +25979,14 @@
               <a:rPr>
                 <a:latin typeface="Inter"/>
               </a:rPr>
-              <a:t>RENDER TEST — fictional managers, not a real comparison · Data as of 2026-10-01 (Form ADV); 2026-06-30 (Form 13F)</a:t>
+              <a:t>Confidential — manager diligence review · Data as of 2026-10-01 (Form ADV); 2026-06-30 (Form 13F)</a:t>
             </a:r>
           </a:p>
         </p:txBody>
       </p:sp>
       <p:sp>
         <p:nvSpPr>
-          <p:cNvPr id="13" name="TextBox 12"/>
+          <p:cNvPr id="14" name="TextBox 13"/>
           <p:cNvSpPr txBox="1"/>
           <p:nvPr/>
         </p:nvSpPr>
@@ -24356,7 +26102,7 @@
         <p:spPr>
           <a:xfrm>
             <a:off x="640080" y="329184"/>
-            <a:ext cx="9875520" cy="182880"/>
+            <a:ext cx="5303520" cy="182880"/>
           </a:xfrm>
           <a:prstGeom prst="rect">
             <a:avLst/>
@@ -24397,6 +26143,48 @@
         </p:nvSpPr>
         <p:spPr>
           <a:xfrm>
+            <a:off x="5897880" y="310896"/>
+            <a:ext cx="4800600" cy="256032"/>
+          </a:xfrm>
+          <a:prstGeom prst="rect">
+            <a:avLst/>
+          </a:prstGeom>
+          <a:noFill/>
+        </p:spPr>
+        <p:txBody>
+          <a:bodyPr wrap="none" lIns="9144" rIns="9144" tIns="9144" bIns="9144" anchor="t">
+            <a:spAutoFit/>
+          </a:bodyPr>
+          <a:lstStyle/>
+          <a:p>
+            <a:pPr algn="r">
+              <a:spcAft>
+                <a:spcPts val="0"/>
+              </a:spcAft>
+              <a:defRPr sz="680" b="1">
+                <a:solidFill>
+                  <a:srgbClr val="4F6B00"/>
+                </a:solidFill>
+                <a:latin typeface="Inter"/>
+              </a:defRPr>
+            </a:pPr>
+            <a:r>
+              <a:rPr>
+                <a:latin typeface="Inter"/>
+              </a:rPr>
+              <a:t>Illustrative, Gradient Maintained — demo data, not the client's holdings or managers</a:t>
+            </a:r>
+          </a:p>
+        </p:txBody>
+      </p:sp>
+      <p:sp>
+        <p:nvSpPr>
+          <p:cNvPr id="5" name="TextBox 4"/>
+          <p:cNvSpPr txBox="1"/>
+          <p:nvPr/>
+        </p:nvSpPr>
+        <p:spPr>
+          <a:xfrm>
             <a:off x="640080" y="566928"/>
             <a:ext cx="10058400" cy="530352"/>
           </a:xfrm>
@@ -24433,7 +26221,7 @@
       </p:sp>
       <p:sp>
         <p:nvSpPr>
-          <p:cNvPr id="5" name="Rectangle 4"/>
+          <p:cNvPr id="6" name="Rectangle 5"/>
           <p:cNvSpPr/>
           <p:nvPr/>
         </p:nvSpPr>
@@ -24482,7 +26270,7 @@
       </p:sp>
       <p:sp>
         <p:nvSpPr>
-          <p:cNvPr id="6" name="Rectangle 5"/>
+          <p:cNvPr id="7" name="Rectangle 6"/>
           <p:cNvSpPr/>
           <p:nvPr/>
         </p:nvSpPr>
@@ -24531,7 +26319,7 @@
       </p:sp>
       <p:sp>
         <p:nvSpPr>
-          <p:cNvPr id="7" name="TextBox 6"/>
+          <p:cNvPr id="8" name="TextBox 7"/>
           <p:cNvSpPr txBox="1"/>
           <p:nvPr/>
         </p:nvSpPr>
@@ -24573,7 +26361,7 @@
       </p:sp>
       <p:sp>
         <p:nvSpPr>
-          <p:cNvPr id="8" name="TextBox 7"/>
+          <p:cNvPr id="9" name="TextBox 8"/>
           <p:cNvSpPr txBox="1"/>
           <p:nvPr/>
         </p:nvSpPr>
@@ -24615,7 +26403,7 @@
       </p:sp>
       <p:graphicFrame>
         <p:nvGraphicFramePr>
-          <p:cNvPr id="9" name="Chart 8"/>
+          <p:cNvPr id="10" name="Chart 9"/>
           <p:cNvGraphicFramePr>
             <a:graphicFrameLocks noGrp="1"/>
           </p:cNvGraphicFramePr>
@@ -24633,7 +26421,7 @@
       </p:graphicFrame>
       <p:sp>
         <p:nvSpPr>
-          <p:cNvPr id="10" name="Rectangle 9"/>
+          <p:cNvPr id="11" name="Rectangle 10"/>
           <p:cNvSpPr/>
           <p:nvPr/>
         </p:nvSpPr>
@@ -24682,7 +26470,7 @@
       </p:sp>
       <p:sp>
         <p:nvSpPr>
-          <p:cNvPr id="11" name="TextBox 10"/>
+          <p:cNvPr id="12" name="TextBox 11"/>
           <p:cNvSpPr txBox="1"/>
           <p:nvPr/>
         </p:nvSpPr>
@@ -24724,7 +26512,7 @@
       </p:sp>
       <p:sp>
         <p:nvSpPr>
-          <p:cNvPr id="12" name="TextBox 11"/>
+          <p:cNvPr id="13" name="TextBox 12"/>
           <p:cNvSpPr txBox="1"/>
           <p:nvPr/>
         </p:nvSpPr>
@@ -24759,14 +26547,14 @@
               <a:rPr>
                 <a:latin typeface="Inter"/>
               </a:rPr>
-              <a:t>RENDER TEST — fictional managers, not a real comparison · Data as of 2026-10-01 (Form ADV); 2026-06-30 (Form 13F)</a:t>
+              <a:t>Confidential — manager diligence review · Data as of 2026-10-01 (Form ADV); 2026-06-30 (Form 13F)</a:t>
             </a:r>
           </a:p>
         </p:txBody>
       </p:sp>
       <p:sp>
         <p:nvSpPr>
-          <p:cNvPr id="13" name="TextBox 12"/>
+          <p:cNvPr id="14" name="TextBox 13"/>
           <p:cNvSpPr txBox="1"/>
           <p:nvPr/>
         </p:nvSpPr>
@@ -24882,7 +26670,7 @@
         <p:spPr>
           <a:xfrm>
             <a:off x="640080" y="329184"/>
-            <a:ext cx="9875520" cy="182880"/>
+            <a:ext cx="5303520" cy="182880"/>
           </a:xfrm>
           <a:prstGeom prst="rect">
             <a:avLst/>
@@ -24923,6 +26711,48 @@
         </p:nvSpPr>
         <p:spPr>
           <a:xfrm>
+            <a:off x="5897880" y="310896"/>
+            <a:ext cx="4800600" cy="256032"/>
+          </a:xfrm>
+          <a:prstGeom prst="rect">
+            <a:avLst/>
+          </a:prstGeom>
+          <a:noFill/>
+        </p:spPr>
+        <p:txBody>
+          <a:bodyPr wrap="none" lIns="9144" rIns="9144" tIns="9144" bIns="9144" anchor="t">
+            <a:spAutoFit/>
+          </a:bodyPr>
+          <a:lstStyle/>
+          <a:p>
+            <a:pPr algn="r">
+              <a:spcAft>
+                <a:spcPts val="0"/>
+              </a:spcAft>
+              <a:defRPr sz="680" b="1">
+                <a:solidFill>
+                  <a:srgbClr val="4F6B00"/>
+                </a:solidFill>
+                <a:latin typeface="Inter"/>
+              </a:defRPr>
+            </a:pPr>
+            <a:r>
+              <a:rPr>
+                <a:latin typeface="Inter"/>
+              </a:rPr>
+              <a:t>Illustrative, Gradient Maintained — demo data, not the client's holdings or managers</a:t>
+            </a:r>
+          </a:p>
+        </p:txBody>
+      </p:sp>
+      <p:sp>
+        <p:nvSpPr>
+          <p:cNvPr id="5" name="TextBox 4"/>
+          <p:cNvSpPr txBox="1"/>
+          <p:nvPr/>
+        </p:nvSpPr>
+        <p:spPr>
+          <a:xfrm>
             <a:off x="640080" y="566928"/>
             <a:ext cx="10058400" cy="530352"/>
           </a:xfrm>
@@ -24959,7 +26789,7 @@
       </p:sp>
       <p:sp>
         <p:nvSpPr>
-          <p:cNvPr id="5" name="Rectangle 4"/>
+          <p:cNvPr id="6" name="Rectangle 5"/>
           <p:cNvSpPr/>
           <p:nvPr/>
         </p:nvSpPr>
@@ -25008,7 +26838,7 @@
       </p:sp>
       <p:sp>
         <p:nvSpPr>
-          <p:cNvPr id="6" name="Rectangle 5"/>
+          <p:cNvPr id="7" name="Rectangle 6"/>
           <p:cNvSpPr/>
           <p:nvPr/>
         </p:nvSpPr>
@@ -25057,7 +26887,7 @@
       </p:sp>
       <p:sp>
         <p:nvSpPr>
-          <p:cNvPr id="7" name="TextBox 6"/>
+          <p:cNvPr id="8" name="TextBox 7"/>
           <p:cNvSpPr txBox="1"/>
           <p:nvPr/>
         </p:nvSpPr>
@@ -25099,7 +26929,7 @@
       </p:sp>
       <p:graphicFrame>
         <p:nvGraphicFramePr>
-          <p:cNvPr id="8" name="Table 7"/>
+          <p:cNvPr id="9" name="Table 8"/>
           <p:cNvGraphicFramePr>
             <a:graphicFrameLocks noGrp="1"/>
           </p:cNvGraphicFramePr>
@@ -25166,7 +26996,7 @@
                         <a:rPr>
                           <a:latin typeface="Inter"/>
                         </a:rPr>
-                        <a:t>Ridgeview (TEST)</a:t>
+                        <a:t>Ridgeview</a:t>
                       </a:r>
                     </a:p>
                   </a:txBody>
@@ -25193,7 +27023,7 @@
                         <a:rPr>
                           <a:latin typeface="Inter"/>
                         </a:rPr>
-                        <a:t>Harbor (TEST)</a:t>
+                        <a:t>Harbor</a:t>
                       </a:r>
                     </a:p>
                   </a:txBody>
@@ -25220,7 +27050,7 @@
                         <a:rPr>
                           <a:latin typeface="Inter"/>
                         </a:rPr>
-                        <a:t>Northfield (TEST)</a:t>
+                        <a:t>Northfield</a:t>
                       </a:r>
                     </a:p>
                   </a:txBody>
@@ -26557,7 +28387,7 @@
       </p:graphicFrame>
       <p:sp>
         <p:nvSpPr>
-          <p:cNvPr id="9" name="TextBox 8"/>
+          <p:cNvPr id="10" name="TextBox 9"/>
           <p:cNvSpPr txBox="1"/>
           <p:nvPr/>
         </p:nvSpPr>
@@ -26599,7 +28429,7 @@
       </p:sp>
       <p:sp>
         <p:nvSpPr>
-          <p:cNvPr id="10" name="Rectangle 9"/>
+          <p:cNvPr id="11" name="Rectangle 10"/>
           <p:cNvSpPr/>
           <p:nvPr/>
         </p:nvSpPr>
@@ -26648,7 +28478,7 @@
       </p:sp>
       <p:sp>
         <p:nvSpPr>
-          <p:cNvPr id="11" name="TextBox 10"/>
+          <p:cNvPr id="12" name="TextBox 11"/>
           <p:cNvSpPr txBox="1"/>
           <p:nvPr/>
         </p:nvSpPr>
@@ -26690,7 +28520,7 @@
       </p:sp>
       <p:sp>
         <p:nvSpPr>
-          <p:cNvPr id="12" name="TextBox 11"/>
+          <p:cNvPr id="13" name="TextBox 12"/>
           <p:cNvSpPr txBox="1"/>
           <p:nvPr/>
         </p:nvSpPr>
@@ -26725,14 +28555,14 @@
               <a:rPr>
                 <a:latin typeface="Inter"/>
               </a:rPr>
-              <a:t>RENDER TEST — fictional managers, not a real comparison · Data as of 2026-10-01 (Form ADV); 2026-06-30 (Form 13F)</a:t>
+              <a:t>Confidential — manager diligence review · Data as of 2026-10-01 (Form ADV); 2026-06-30 (Form 13F)</a:t>
             </a:r>
           </a:p>
         </p:txBody>
       </p:sp>
       <p:sp>
         <p:nvSpPr>
-          <p:cNvPr id="13" name="TextBox 12"/>
+          <p:cNvPr id="14" name="TextBox 13"/>
           <p:cNvSpPr txBox="1"/>
           <p:nvPr/>
         </p:nvSpPr>
